--- a/slides/02_Exploring_Our_Data.pptx
+++ b/slides/02_Exploring_Our_Data.pptx
@@ -136,7 +136,7 @@
   <p:extLst>
     <p:ext uri="{521415D9-36F7-43E2-AB2F-B90AF26B5E84}">
       <p14:sectionLst xmlns:p14="http://schemas.microsoft.com/office/powerpoint/2010/main">
-        <p14:section name="Introduction" id="{d6df4510-c7aa-f368-9006-a26f7327324c}">
+        <p14:section name="Introduction" id="{ef3dca5b-843a-ade7-642c-08b4fc75743e}">
           <p14:sldIdLst>
             <p14:sldId id="256"/>
             <p14:sldId id="257"/>
@@ -145,7 +145,7 @@
             <p14:sldId id="260"/>
           </p14:sldIdLst>
         </p14:section>
-        <p14:section name="Notebooks and cells" id="{01d40b28-f440-d800-7976-cf471888cc3c}">
+        <p14:section name="Notebooks and cells" id="{3712a2b9-8b02-36de-afd9-224fda2e9169}">
           <p14:sldIdLst>
             <p14:sldId id="261"/>
             <p14:sldId id="262"/>
@@ -153,26 +153,26 @@
             <p14:sldId id="264"/>
           </p14:sldIdLst>
         </p14:section>
-        <p14:section name="Import Polars" id="{57245c35-5c78-2a3e-a2cd-5accf0e836b7}">
+        <p14:section name="Import Polars" id="{7b0ada12-1316-4e5e-d5ce-a12409e7611c}">
           <p14:sldIdLst>
             <p14:sldId id="265"/>
             <p14:sldId id="266"/>
           </p14:sldIdLst>
         </p14:section>
-        <p14:section name="Load the data" id="{0b0d4b81-595c-97f4-13d3-aa056dfe39af}">
+        <p14:section name="Load the data" id="{91df8689-66c6-f322-be39-d8f6852996ab}">
           <p14:sldIdLst>
             <p14:sldId id="267"/>
             <p14:sldId id="268"/>
             <p14:sldId id="269"/>
           </p14:sldIdLst>
         </p14:section>
-        <p14:section name="How big is our data?" id="{19ec355f-a745-fdca-c375-d19c2841b638}">
+        <p14:section name="How big is our data?" id="{5db10cbd-29c4-0175-674b-d647a49c7daf}">
           <p14:sldIdLst>
             <p14:sldId id="270"/>
             <p14:sldId id="271"/>
           </p14:sldIdLst>
         </p14:section>
-        <p14:section name="What kind of data is in each column?" id="{ff822d95-615a-690e-19a9-b20ca41bdb46}">
+        <p14:section name="What kind of data is in each column?" id="{1e4b8423-6779-c1e9-b8d6-b82874a609a3}">
           <p14:sldIdLst>
             <p14:sldId id="272"/>
             <p14:sldId id="273"/>
@@ -180,7 +180,7 @@
             <p14:sldId id="275"/>
           </p14:sldIdLst>
         </p14:section>
-        <p14:section name="Reactive cells" id="{77d7d8e2-1d06-74cf-16c4-3114fc107dc5}">
+        <p14:section name="Reactive cells" id="{a2c2b427-fb65-f9d9-9417-26903d189640}">
           <p14:sldIdLst>
             <p14:sldId id="276"/>
             <p14:sldId id="277"/>
@@ -189,14 +189,14 @@
             <p14:sldId id="280"/>
           </p14:sldIdLst>
         </p14:section>
-        <p14:section name="Exploring with the table viewer" id="{e4090046-07ba-8843-0603-8225c99cb205}">
+        <p14:section name="Exploring with the table viewer" id="{b60de039-c6eb-7443-6df9-0439d4cbb6e5}">
           <p14:sldIdLst>
             <p14:sldId id="281"/>
             <p14:sldId id="282"/>
             <p14:sldId id="283"/>
           </p14:sldIdLst>
         </p14:section>
-        <p14:section name="Wrap up" id="{2d3a6e18-cf3a-f3e9-5288-fa52a3371e43}">
+        <p14:section name="Wrap up" id="{7f4946b4-c174-cd5b-4e33-7b5e005137c1}">
           <p14:sldIdLst>
             <p14:sldId id="284"/>
             <p14:sldId id="285"/>
@@ -4653,7 +4653,7 @@
               <a:t> → imports Polars with the short name </a:t>
             </a:r>
             <a:r>
-              <a:rPr lang="en-US" sz="1200" dirty="0">
+              <a:rPr lang="en-US" sz="1200" b="1" dirty="0">
                 <a:solidFill>
                   <a:srgbClr val="B86E1E"/>
                 </a:solidFill>
@@ -4672,7 +4672,7 @@
               <a:t>, so we type </a:t>
             </a:r>
             <a:r>
-              <a:rPr lang="en-US" sz="1200" dirty="0">
+              <a:rPr lang="en-US" sz="1200" b="1" dirty="0">
                 <a:solidFill>
                   <a:srgbClr val="B86E1E"/>
                 </a:solidFill>
@@ -4691,7 +4691,7 @@
               <a:t> instead of </a:t>
             </a:r>
             <a:r>
-              <a:rPr lang="en-US" sz="1200" dirty="0">
+              <a:rPr lang="en-US" sz="1200" b="1" dirty="0">
                 <a:solidFill>
                   <a:srgbClr val="B86E1E"/>
                 </a:solidFill>
@@ -5325,7 +5325,7 @@
               <a:t>Polars' </a:t>
             </a:r>
             <a:r>
-              <a:rPr lang="en-US" sz="1300" dirty="0">
+              <a:rPr lang="en-US" sz="1300" b="1" dirty="0">
                 <a:solidFill>
                   <a:srgbClr val="B86E1E"/>
                 </a:solidFill>
@@ -5344,7 +5344,7 @@
               <a:t> reads </a:t>
             </a:r>
             <a:r>
-              <a:rPr lang="en-US" sz="1300" dirty="0">
+              <a:rPr lang="en-US" sz="1300" b="1" dirty="0">
                 <a:solidFill>
                   <a:srgbClr val="B86E1E"/>
                 </a:solidFill>
@@ -5363,7 +5363,7 @@
               <a:t> into a DataFrame. We call it </a:t>
             </a:r>
             <a:r>
-              <a:rPr lang="en-US" sz="1300" dirty="0">
+              <a:rPr lang="en-US" sz="1300" b="1" dirty="0">
                 <a:solidFill>
                   <a:srgbClr val="B86E1E"/>
                 </a:solidFill>
@@ -5476,7 +5476,7 @@
               <a:t> → reads every row of </a:t>
             </a:r>
             <a:r>
-              <a:rPr lang="en-US" sz="1200" dirty="0">
+              <a:rPr lang="en-US" sz="1200" b="1" dirty="0">
                 <a:solidFill>
                   <a:srgbClr val="B86E1E"/>
                 </a:solidFill>
@@ -5495,7 +5495,7 @@
               <a:t> into a DataFrame called </a:t>
             </a:r>
             <a:r>
-              <a:rPr lang="en-US" sz="1200" dirty="0">
+              <a:rPr lang="en-US" sz="1200" b="1" dirty="0">
                 <a:solidFill>
                   <a:srgbClr val="B86E1E"/>
                 </a:solidFill>
@@ -5540,7 +5540,7 @@
               <a:t> → shows </a:t>
             </a:r>
             <a:r>
-              <a:rPr lang="en-US" sz="1200" dirty="0">
+              <a:rPr lang="en-US" sz="1200" b="1" dirty="0">
                 <a:solidFill>
                   <a:srgbClr val="B86E1E"/>
                 </a:solidFill>
@@ -6489,7 +6489,7 @@
               <a:t>this cell uses </a:t>
             </a:r>
             <a:r>
-              <a:rPr lang="en-US" sz="1200" dirty="0">
+              <a:rPr lang="en-US" sz="1200" b="1" dirty="0">
                 <a:solidFill>
                   <a:srgbClr val="B86E1E"/>
                 </a:solidFill>
@@ -7041,7 +7041,7 @@
               <a:t>What data type do you think </a:t>
             </a:r>
             <a:r>
-              <a:rPr lang="en-US" sz="1300" dirty="0">
+              <a:rPr lang="en-US" sz="1300" b="1" dirty="0">
                 <a:solidFill>
                   <a:srgbClr val="B86E1E"/>
                 </a:solidFill>
@@ -7335,7 +7335,7 @@
               <a:t>​</a:t>
             </a:r>
             <a:r>
-              <a:rPr lang="en-US" sz="1300" dirty="0">
+              <a:rPr lang="en-US" sz="1300" b="1" dirty="0">
                 <a:solidFill>
                   <a:srgbClr val="B86E1E"/>
                 </a:solidFill>
@@ -9256,7 +9256,7 @@
               <a:t> → creates a variable called </a:t>
             </a:r>
             <a:r>
-              <a:rPr lang="en-US" sz="1200" dirty="0">
+              <a:rPr lang="en-US" sz="1200" b="1" dirty="0">
                 <a:solidFill>
                   <a:srgbClr val="B86E1E"/>
                 </a:solidFill>
@@ -9275,7 +9275,7 @@
               <a:t> that holds the number </a:t>
             </a:r>
             <a:r>
-              <a:rPr lang="en-US" sz="1200" dirty="0">
+              <a:rPr lang="en-US" sz="1200" b="1" dirty="0">
                 <a:solidFill>
                   <a:srgbClr val="B86E1E"/>
                 </a:solidFill>
@@ -9559,7 +9559,7 @@
               <a:t>The </a:t>
             </a:r>
             <a:r>
-              <a:rPr lang="en-US" sz="1300" dirty="0">
+              <a:rPr lang="en-US" sz="1300" b="1" dirty="0">
                 <a:solidFill>
                   <a:srgbClr val="B86E1E"/>
                 </a:solidFill>
@@ -9706,7 +9706,7 @@
               <a:t>Change </a:t>
             </a:r>
             <a:r>
-              <a:rPr lang="en-US" sz="1300" dirty="0">
+              <a:rPr lang="en-US" sz="1300" b="1" dirty="0">
                 <a:solidFill>
                   <a:srgbClr val="B86E1E"/>
                 </a:solidFill>
@@ -9725,7 +9725,7 @@
               <a:t> to </a:t>
             </a:r>
             <a:r>
-              <a:rPr lang="en-US" sz="1300" dirty="0">
+              <a:rPr lang="en-US" sz="1300" b="1" dirty="0">
                 <a:solidFill>
                   <a:srgbClr val="B86E1E"/>
                 </a:solidFill>
@@ -9829,7 +9829,7 @@
               <a:t>The </a:t>
             </a:r>
             <a:r>
-              <a:rPr lang="en-US" sz="1300" dirty="0">
+              <a:rPr lang="en-US" sz="1300" b="1" dirty="0">
                 <a:solidFill>
                   <a:srgbClr val="B86E1E"/>
                 </a:solidFill>
@@ -9848,7 +9848,7 @@
               <a:t> method shows the first few rows of a DataFrame. Here it shows the first </a:t>
             </a:r>
             <a:r>
-              <a:rPr lang="en-US" sz="1300" dirty="0">
+              <a:rPr lang="en-US" sz="1300" b="1" dirty="0">
                 <a:solidFill>
                   <a:srgbClr val="B86E1E"/>
                 </a:solidFill>
@@ -9867,7 +9867,7 @@
               <a:t> rows of </a:t>
             </a:r>
             <a:r>
-              <a:rPr lang="en-US" sz="1300" dirty="0">
+              <a:rPr lang="en-US" sz="1300" b="1" dirty="0">
                 <a:solidFill>
                   <a:srgbClr val="B86E1E"/>
                 </a:solidFill>
@@ -10461,7 +10461,7 @@
               <a:t>In a normal Python program we often write </a:t>
             </a:r>
             <a:r>
-              <a:rPr lang="en-US" sz="1800" dirty="0">
+              <a:rPr lang="en-US" sz="1800" b="1" dirty="0">
                 <a:solidFill>
                   <a:srgbClr val="B86E1E"/>
                 </a:solidFill>
@@ -10480,7 +10480,7 @@
               <a:t>. In marimo that creates </a:t>
             </a:r>
             <a:r>
-              <a:rPr lang="en-US" sz="1800" dirty="0">
+              <a:rPr lang="en-US" sz="1800" b="1" dirty="0">
                 <a:solidFill>
                   <a:srgbClr val="B86E1E"/>
                 </a:solidFill>
@@ -10499,7 +10499,7 @@
               <a:t> in a second cell, which breaks the rule. Instead, we give the new version a new name, such as </a:t>
             </a:r>
             <a:r>
-              <a:rPr lang="en-US" sz="1800" dirty="0">
+              <a:rPr lang="en-US" sz="1800" b="1" dirty="0">
                 <a:solidFill>
                   <a:srgbClr val="B86E1E"/>
                 </a:solidFill>
@@ -10673,7 +10673,7 @@
               <a:t>The table marimo shows for </a:t>
             </a:r>
             <a:r>
-              <a:rPr lang="en-US" sz="1600" dirty="0">
+              <a:rPr lang="en-US" sz="1600" b="1" dirty="0">
                 <a:solidFill>
                   <a:srgbClr val="E8A55A"/>
                 </a:solidFill>
@@ -11182,7 +11182,7 @@
               <a:t>Sort by </a:t>
             </a:r>
             <a:r>
-              <a:rPr lang="en-US" sz="1800" dirty="0">
+              <a:rPr lang="en-US" sz="1800" b="1" dirty="0">
                 <a:solidFill>
                   <a:srgbClr val="B86E1E"/>
                 </a:solidFill>
@@ -11228,7 +11228,7 @@
               <a:t>Search for </a:t>
             </a:r>
             <a:r>
-              <a:rPr lang="en-US" sz="1800" dirty="0">
+              <a:rPr lang="en-US" sz="1800" b="1" dirty="0">
                 <a:solidFill>
                   <a:srgbClr val="B86E1E"/>
                 </a:solidFill>
@@ -11274,7 +11274,7 @@
               <a:t>Sort by </a:t>
             </a:r>
             <a:r>
-              <a:rPr lang="en-US" sz="1800" dirty="0">
+              <a:rPr lang="en-US" sz="1800" b="1" dirty="0">
                 <a:solidFill>
                   <a:srgbClr val="B86E1E"/>
                 </a:solidFill>
@@ -11477,7 +11477,7 @@
               <a:t>What does </a:t>
             </a:r>
             <a:r>
-              <a:rPr lang="en-US" sz="1800" dirty="0">
+              <a:rPr lang="en-US" sz="1800" b="1" dirty="0">
                 <a:solidFill>
                   <a:srgbClr val="E8A55A"/>
                 </a:solidFill>
@@ -11523,7 +11523,7 @@
               <a:t>Why is it a problem that </a:t>
             </a:r>
             <a:r>
-              <a:rPr lang="en-US" sz="1800" dirty="0">
+              <a:rPr lang="en-US" sz="1800" b="1" dirty="0">
                 <a:solidFill>
                   <a:srgbClr val="E8A55A"/>
                 </a:solidFill>
@@ -11596,7 +11596,7 @@
               <a:t>Why does marimo refuse to run a second cell that creates </a:t>
             </a:r>
             <a:r>
-              <a:rPr lang="en-US" sz="1800" dirty="0">
+              <a:rPr lang="en-US" sz="1800" b="1" dirty="0">
                 <a:solidFill>
                   <a:srgbClr val="E8A55A"/>
                 </a:solidFill>
@@ -13258,7 +13258,7 @@
               <a:t>marimo notebooks are saved as ordinary Python files. </a:t>
             </a:r>
             <a:r>
-              <a:rPr lang="en-US" sz="1300" dirty="0">
+              <a:rPr lang="en-US" sz="1300" b="1" dirty="0">
                 <a:solidFill>
                   <a:srgbClr val="B86E1E"/>
                 </a:solidFill>
@@ -13363,7 +13363,7 @@
               <a:t>open </a:t>
             </a:r>
             <a:r>
-              <a:rPr lang="en-US" sz="1200" dirty="0">
+              <a:rPr lang="en-US" sz="1200" b="1" dirty="0">
                 <a:solidFill>
                   <a:srgbClr val="B86E1E"/>
                 </a:solidFill>
@@ -13408,7 +13408,7 @@
               <a:t>check the prompt starts with </a:t>
             </a:r>
             <a:r>
-              <a:rPr lang="en-US" sz="1200" dirty="0">
+              <a:rPr lang="en-US" sz="1200" b="1" dirty="0">
                 <a:solidFill>
                   <a:srgbClr val="B86E1E"/>
                 </a:solidFill>

--- a/slides/02_Exploring_Our_Data.pptx
+++ b/slides/02_Exploring_Our_Data.pptx
@@ -35,9 +35,11 @@
     <p:sldId id="283" r:id="rId29"/>
     <p:sldId id="284" r:id="rId30"/>
     <p:sldId id="285" r:id="rId31"/>
+    <p:sldId id="286" r:id="rId32"/>
+    <p:sldId id="287" r:id="rId33"/>
   </p:sldIdLst>
   <p:notesMasterIdLst>
-    <p:notesMasterId r:id="rId32"/>
+    <p:notesMasterId r:id="rId34"/>
   </p:notesMasterIdLst>
   <p:sldSz cx="9144000" cy="5143500"/>
   <p:notesSz cx="5143500" cy="9144000"/>
@@ -136,7 +138,7 @@
   <p:extLst>
     <p:ext uri="{521415D9-36F7-43E2-AB2F-B90AF26B5E84}">
       <p14:sectionLst xmlns:p14="http://schemas.microsoft.com/office/powerpoint/2010/main">
-        <p14:section name="Introduction" id="{ef3dca5b-843a-ade7-642c-08b4fc75743e}">
+        <p14:section name="Introduction" id="{04e42105-5e48-8f3b-40be-28853d7fdc93}">
           <p14:sldIdLst>
             <p14:sldId id="256"/>
             <p14:sldId id="257"/>
@@ -145,7 +147,7 @@
             <p14:sldId id="260"/>
           </p14:sldIdLst>
         </p14:section>
-        <p14:section name="Notebooks and cells" id="{3712a2b9-8b02-36de-afd9-224fda2e9169}">
+        <p14:section name="Notebooks and cells" id="{ce8a7632-711e-ff44-1bdb-0764a3879c29}">
           <p14:sldIdLst>
             <p14:sldId id="261"/>
             <p14:sldId id="262"/>
@@ -153,53 +155,55 @@
             <p14:sldId id="264"/>
           </p14:sldIdLst>
         </p14:section>
-        <p14:section name="Import Polars" id="{7b0ada12-1316-4e5e-d5ce-a12409e7611c}">
+        <p14:section name="Import Polars" id="{03b8ccea-c216-11f9-69d3-141fa5361b0c}">
           <p14:sldIdLst>
             <p14:sldId id="265"/>
             <p14:sldId id="266"/>
           </p14:sldIdLst>
         </p14:section>
-        <p14:section name="Load the data" id="{91df8689-66c6-f322-be39-d8f6852996ab}">
+        <p14:section name="Load the data" id="{5fd0a0a4-2043-99b6-38a2-21705fb413d6}">
           <p14:sldIdLst>
             <p14:sldId id="267"/>
             <p14:sldId id="268"/>
             <p14:sldId id="269"/>
           </p14:sldIdLst>
         </p14:section>
-        <p14:section name="How big is our data?" id="{5db10cbd-29c4-0175-674b-d647a49c7daf}">
+        <p14:section name="How big is our data?" id="{16fcd5c4-9c8c-5e9d-166a-dd1252392d24}">
           <p14:sldIdLst>
             <p14:sldId id="270"/>
             <p14:sldId id="271"/>
           </p14:sldIdLst>
         </p14:section>
-        <p14:section name="What kind of data is in each column?" id="{1e4b8423-6779-c1e9-b8d6-b82874a609a3}">
+        <p14:section name="What kind of data is in each column?" id="{5d36351a-08ed-1c9e-2356-4147c11b066b}">
           <p14:sldIdLst>
             <p14:sldId id="272"/>
             <p14:sldId id="273"/>
             <p14:sldId id="274"/>
             <p14:sldId id="275"/>
+            <p14:sldId id="276"/>
+            <p14:sldId id="277"/>
           </p14:sldIdLst>
         </p14:section>
-        <p14:section name="Reactive cells" id="{a2c2b427-fb65-f9d9-9417-26903d189640}">
+        <p14:section name="Reactive cells" id="{5fa6632d-43b4-54b0-9412-98b97b4f8a96}">
           <p14:sldIdLst>
-            <p14:sldId id="276"/>
-            <p14:sldId id="277"/>
             <p14:sldId id="278"/>
             <p14:sldId id="279"/>
             <p14:sldId id="280"/>
+            <p14:sldId id="281"/>
+            <p14:sldId id="282"/>
           </p14:sldIdLst>
         </p14:section>
-        <p14:section name="Exploring with the table viewer" id="{b60de039-c6eb-7443-6df9-0439d4cbb6e5}">
+        <p14:section name="Exploring with the table viewer" id="{88472f26-46a1-bed6-e332-fa37e93a48a7}">
           <p14:sldIdLst>
-            <p14:sldId id="281"/>
-            <p14:sldId id="282"/>
             <p14:sldId id="283"/>
+            <p14:sldId id="284"/>
+            <p14:sldId id="285"/>
           </p14:sldIdLst>
         </p14:section>
-        <p14:section name="Wrap up" id="{7f4946b4-c174-cd5b-4e33-7b5e005137c1}">
+        <p14:section name="Wrap up" id="{ee61534c-22b8-dc40-8d33-79550d126d52}">
           <p14:sldIdLst>
-            <p14:sldId id="284"/>
-            <p14:sldId id="285"/>
+            <p14:sldId id="286"/>
+            <p14:sldId id="287"/>
           </p14:sldIdLst>
         </p14:section>
       </p14:sectionLst>
@@ -1486,7 +1490,7 @@
           <a:p>
             <a:r>
               <a:rPr lang="en-US" dirty="0"/>
-              <a:t>This is the first clue that real data is messy. Ask students to add it to their list of strange things for the Your data story task.</a:t>
+              <a:t>Ask: can you see every column's data type? (No, only the first few.) How could we show each column on its own line? Students know for loops and dictionaries from the Turtle course.</a:t>
             </a:r>
             <a:endParaRPr lang="en-US" dirty="0"/>
           </a:p>
@@ -1662,7 +1666,7 @@
           <a:p>
             <a:r>
               <a:rPr lang="en-US" dirty="0"/>
-              <a:t>Ask for another example of each from the schema. For instance, Negative is Int64 and Developers is String.</a:t>
+              <a:t>This changes the existing schema cell. Remind students that print output appears below the cell.</a:t>
             </a:r>
             <a:endParaRPr lang="en-US" dirty="0"/>
           </a:p>
@@ -1750,7 +1754,7 @@
           <a:p>
             <a:r>
               <a:rPr lang="en-US" dirty="0"/>
-              <a:t>We'll store a number in one cell, then use it in another cell to decide how many rows to show.</a:t>
+              <a:t>This is the first clue that real data is messy. Ask students to add it to their list of strange things for the Your data story task.</a:t>
             </a:r>
             <a:endParaRPr lang="en-US" dirty="0"/>
           </a:p>
@@ -1838,7 +1842,7 @@
           <a:p>
             <a:r>
               <a:rPr lang="en-US" dirty="0"/>
-              <a:t>Keep this quick: the interesting part is the next cell.</a:t>
+              <a:t>Ask for another example of each from the schema. For instance, Negative is Int64 and Developers is String.</a:t>
             </a:r>
             <a:endParaRPr lang="en-US" dirty="0"/>
           </a:p>
@@ -1926,7 +1930,7 @@
           <a:p>
             <a:r>
               <a:rPr lang="en-US" dirty="0"/>
-              <a:t>PRIMM step 4: students change 5 to 10 in the sample_size cell, not this one. marimo knows the head cell uses sample_size, so we never have to remember which cells to re-run.</a:t>
+              <a:t>We'll store a number in one cell, then use it in another cell to decide how many rows to show.</a:t>
             </a:r>
             <a:endParaRPr lang="en-US" dirty="0"/>
           </a:p>
@@ -2014,7 +2018,7 @@
           <a:p>
             <a:r>
               <a:rPr lang="en-US" dirty="0"/>
-              <a:t>Have students add a new cell with sample_size = 10 to see this. Reactivity only works if marimo knows exactly which cell creates each variable. The fix: hover over the new cell and click the delete (bin) button, then change the original cell instead.</a:t>
+              <a:t>Keep this quick: the interesting part is the next cell.</a:t>
             </a:r>
             <a:endParaRPr lang="en-US" dirty="0"/>
           </a:p>
@@ -2102,7 +2106,7 @@
           <a:p>
             <a:r>
               <a:rPr lang="en-US" dirty="0"/>
-              <a:t>We'll use this pattern a lot when we clean our data, so make sure students see why.</a:t>
+              <a:t>PRIMM step 4: students change 5 to 10 in the sample_size cell, not this one. marimo knows the head cell uses sample_size, so we never have to remember which cells to re-run.</a:t>
             </a:r>
             <a:endParaRPr lang="en-US" dirty="0"/>
           </a:p>
@@ -2190,7 +2194,7 @@
           <a:p>
             <a:r>
               <a:rPr lang="en-US" dirty="0"/>
-              <a:t>Scroll back up to the games cell.</a:t>
+              <a:t>Have students add a new cell with sample_size = 10 to see this. Reactivity only works if marimo knows exactly which cell creates each variable. The fix: hover over the new cell and click the delete (bin) button, then change the original cell instead.</a:t>
             </a:r>
             <a:endParaRPr lang="en-US" dirty="0"/>
           </a:p>
@@ -2278,7 +2282,7 @@
           <a:p>
             <a:r>
               <a:rPr lang="en-US" dirty="0"/>
-              <a:t>Demonstrate each feature on the projector before students try the modify tasks.</a:t>
+              <a:t>We'll use this pattern a lot when we clean our data, so make sure students see why.</a:t>
             </a:r>
             <a:endParaRPr lang="en-US" dirty="0"/>
           </a:p>
@@ -2366,7 +2370,7 @@
           <a:p>
             <a:r>
               <a:rPr lang="en-US" dirty="0"/>
-              <a:t>Hollow Knight has 403,641 positive and 12,305 negative reviews. For task 3, don't give the answer yet: we look into those 0 scores next lesson. Free games really do cost 0.</a:t>
+              <a:t>Scroll back up to the games cell.</a:t>
             </a:r>
             <a:endParaRPr lang="en-US" dirty="0"/>
           </a:p>
@@ -2454,13 +2458,7 @@
           <a:p>
             <a:r>
               <a:rPr lang="en-US" dirty="0"/>
-              <a:t>Cold-call or use mini whiteboards.
-Answers:
-1. Above its code.
-2. The number of rows (10,250 games) and columns (13).
-3. We can't sort text dates into the right order or work out which year a game came out.
-4. Changing a cell automatically re-runs every cell that uses its variables.
-5. Each variable can only be created in one cell, otherwise marimo can't tell which value it should have.</a:t>
+              <a:t>Demonstrate each feature on the projector before students try the modify tasks.</a:t>
             </a:r>
             <a:endParaRPr lang="en-US" dirty="0"/>
           </a:p>
@@ -2636,7 +2634,7 @@
           <a:p>
             <a:r>
               <a:rPr lang="en-US" dirty="0"/>
-              <a:t>Students use the table viewer for this. The strange things they note are clues for Behind the Scenes.</a:t>
+              <a:t>Hollow Knight has 403,641 positive and 12,305 negative reviews. For task 3, don't give the answer yet: we look into those 0 scores next lesson. Free games really do cost 0.</a:t>
             </a:r>
             <a:endParaRPr lang="en-US" dirty="0"/>
           </a:p>
@@ -2660,6 +2658,188 @@
             <a:fld id="{F7021451-1387-4CA6-816F-3879F97B5CBC}" type="slidenum">
               <a:rPr lang="en-US"/>
               <a:t>30</a:t>
+            </a:fld>
+            <a:endParaRPr lang="en-US"/>
+          </a:p>
+        </p:txBody>
+      </p:sp>
+    </p:spTree>
+    <p:extLst>
+      <p:ext uri="{BB962C8B-B14F-4D97-AF65-F5344CB8AC3E}">
+        <p14:creationId xmlns:p14="http://schemas.microsoft.com/office/powerpoint/2010/main" val="1024086991"/>
+      </p:ext>
+    </p:extLst>
+  </p:cSld>
+  <p:clrMapOvr>
+    <a:masterClrMapping/>
+  </p:clrMapOvr>
+</p:notes>
+</file>
+
+<file path=ppt/notesSlides/notesSlide31.xml><?xml version="1.0" encoding="utf-8"?>
+<p:notes xmlns:a="http://schemas.openxmlformats.org/drawingml/2006/main" xmlns:r="http://schemas.openxmlformats.org/officeDocument/2006/relationships" xmlns:p="http://schemas.openxmlformats.org/presentationml/2006/main">
+  <p:cSld>
+    <p:spTree>
+      <p:nvGrpSpPr>
+        <p:cNvPr id="1" name=""/>
+        <p:cNvGrpSpPr/>
+        <p:nvPr/>
+      </p:nvGrpSpPr>
+      <p:grpSpPr>
+        <a:xfrm>
+          <a:off x="0" y="0"/>
+          <a:ext cx="0" cy="0"/>
+          <a:chOff x="0" y="0"/>
+          <a:chExt cx="0" cy="0"/>
+        </a:xfrm>
+      </p:grpSpPr>
+      <p:sp>
+        <p:nvSpPr>
+          <p:cNvPr id="2" name="Slide Image Placeholder 1"/>
+          <p:cNvSpPr>
+            <a:spLocks noGrp="1" noRot="1" noChangeAspect="1"/>
+          </p:cNvSpPr>
+          <p:nvPr>
+            <p:ph type="sldImg"/>
+          </p:nvPr>
+        </p:nvSpPr>
+        <p:spPr/>
+      </p:sp>
+      <p:sp>
+        <p:nvSpPr>
+          <p:cNvPr id="3" name="Notes Placeholder 2"/>
+          <p:cNvSpPr>
+            <a:spLocks noGrp="1"/>
+          </p:cNvSpPr>
+          <p:nvPr>
+            <p:ph type="body" idx="1"/>
+          </p:nvPr>
+        </p:nvSpPr>
+        <p:spPr/>
+        <p:txBody>
+          <a:bodyPr/>
+          <a:lstStyle/>
+          <a:p>
+            <a:r>
+              <a:rPr lang="en-US" dirty="0"/>
+              <a:t>Cold-call or use mini whiteboards.
+Answers:
+1. Below its code.
+2. The number of rows (10,250 games) and columns (13).
+3. We can't sort text dates into the right order or work out which year a game came out.
+4. Changing a cell automatically re-runs every cell that uses its variables.
+5. Each variable can only be created in one cell, otherwise marimo can't tell which value it should have.</a:t>
+            </a:r>
+            <a:endParaRPr lang="en-US" dirty="0"/>
+          </a:p>
+        </p:txBody>
+      </p:sp>
+      <p:sp>
+        <p:nvSpPr>
+          <p:cNvPr id="4" name="Slide Number Placeholder 3"/>
+          <p:cNvSpPr>
+            <a:spLocks noGrp="1"/>
+          </p:cNvSpPr>
+          <p:nvPr>
+            <p:ph type="sldNum" sz="quarter" idx="10"/>
+          </p:nvPr>
+        </p:nvSpPr>
+        <p:spPr/>
+        <p:txBody>
+          <a:bodyPr/>
+          <a:lstStyle/>
+          <a:p>
+            <a:fld id="{F7021451-1387-4CA6-816F-3879F97B5CBC}" type="slidenum">
+              <a:rPr lang="en-US"/>
+              <a:t>31</a:t>
+            </a:fld>
+            <a:endParaRPr lang="en-US"/>
+          </a:p>
+        </p:txBody>
+      </p:sp>
+    </p:spTree>
+    <p:extLst>
+      <p:ext uri="{BB962C8B-B14F-4D97-AF65-F5344CB8AC3E}">
+        <p14:creationId xmlns:p14="http://schemas.microsoft.com/office/powerpoint/2010/main" val="1024086991"/>
+      </p:ext>
+    </p:extLst>
+  </p:cSld>
+  <p:clrMapOvr>
+    <a:masterClrMapping/>
+  </p:clrMapOvr>
+</p:notes>
+</file>
+
+<file path=ppt/notesSlides/notesSlide32.xml><?xml version="1.0" encoding="utf-8"?>
+<p:notes xmlns:a="http://schemas.openxmlformats.org/drawingml/2006/main" xmlns:r="http://schemas.openxmlformats.org/officeDocument/2006/relationships" xmlns:p="http://schemas.openxmlformats.org/presentationml/2006/main">
+  <p:cSld>
+    <p:spTree>
+      <p:nvGrpSpPr>
+        <p:cNvPr id="1" name=""/>
+        <p:cNvGrpSpPr/>
+        <p:nvPr/>
+      </p:nvGrpSpPr>
+      <p:grpSpPr>
+        <a:xfrm>
+          <a:off x="0" y="0"/>
+          <a:ext cx="0" cy="0"/>
+          <a:chOff x="0" y="0"/>
+          <a:chExt cx="0" cy="0"/>
+        </a:xfrm>
+      </p:grpSpPr>
+      <p:sp>
+        <p:nvSpPr>
+          <p:cNvPr id="2" name="Slide Image Placeholder 1"/>
+          <p:cNvSpPr>
+            <a:spLocks noGrp="1" noRot="1" noChangeAspect="1"/>
+          </p:cNvSpPr>
+          <p:nvPr>
+            <p:ph type="sldImg"/>
+          </p:nvPr>
+        </p:nvSpPr>
+        <p:spPr/>
+      </p:sp>
+      <p:sp>
+        <p:nvSpPr>
+          <p:cNvPr id="3" name="Notes Placeholder 2"/>
+          <p:cNvSpPr>
+            <a:spLocks noGrp="1"/>
+          </p:cNvSpPr>
+          <p:nvPr>
+            <p:ph type="body" idx="1"/>
+          </p:nvPr>
+        </p:nvSpPr>
+        <p:spPr/>
+        <p:txBody>
+          <a:bodyPr/>
+          <a:lstStyle/>
+          <a:p>
+            <a:r>
+              <a:rPr lang="en-US" dirty="0"/>
+              <a:t>Students use the table viewer for this. The strange things they note are clues for Behind the Scenes.</a:t>
+            </a:r>
+            <a:endParaRPr lang="en-US" dirty="0"/>
+          </a:p>
+        </p:txBody>
+      </p:sp>
+      <p:sp>
+        <p:nvSpPr>
+          <p:cNvPr id="4" name="Slide Number Placeholder 3"/>
+          <p:cNvSpPr>
+            <a:spLocks noGrp="1"/>
+          </p:cNvSpPr>
+          <p:nvPr>
+            <p:ph type="sldNum" sz="quarter" idx="10"/>
+          </p:nvPr>
+        </p:nvSpPr>
+        <p:spPr/>
+        <p:txBody>
+          <a:bodyPr/>
+          <a:lstStyle/>
+          <a:p>
+            <a:fld id="{F7021451-1387-4CA6-816F-3879F97B5CBC}" type="slidenum">
+              <a:rPr lang="en-US"/>
+              <a:t>32</a:t>
             </a:fld>
             <a:endParaRPr lang="en-US"/>
           </a:p>
@@ -3076,7 +3256,7 @@
           <a:p>
             <a:r>
               <a:rPr lang="en-US" dirty="0"/>
-              <a:t>Model each one on the projector. The output above the code catches students out: they look below the cell for results.</a:t>
+              <a:t>Model each one on the projector. Point out where the output appears: directly below the cell's code.</a:t>
             </a:r>
             <a:endParaRPr lang="en-US" dirty="0"/>
           </a:p>
@@ -5237,7 +5417,7 @@
                   <a:srgbClr val="2B1D19"/>
                 </a:solidFill>
               </a:rPr>
-              <a:t>What will appear above the cell when we run it?</a:t>
+              <a:t>What will appear below the cell when we run it?</a:t>
             </a:r>
             <a:endParaRPr lang="en-US" sz="1500" dirty="0"/>
           </a:p>
@@ -7266,7 +7446,7 @@
                   <a:srgbClr val="4E342E"/>
                 </a:solidFill>
               </a:rPr>
-              <a:t>The schema lists all 13 columns</a:t>
+              <a:t>The schema runs off the edge</a:t>
             </a:r>
             <a:endParaRPr lang="en-US" sz="2800" dirty="0"/>
           </a:p>
@@ -7274,7 +7454,7 @@
       </p:sp>
       <p:pic>
         <p:nvPicPr>
-          <p:cNvPr id="3" name="Image 0" descr="The output of games.schema, listing each column name with its data type, such as Int64, String and Float64">    </p:cNvPr>
+          <p:cNvPr id="3" name="Image 0" descr="The output of games.schema on one long line, cut off at the right edge after the first few columns">    </p:cNvPr>
           <p:cNvPicPr>
             <a:picLocks noChangeAspect="1"/>
           </p:cNvPicPr>
@@ -7335,23 +7515,12 @@
               <a:t>​</a:t>
             </a:r>
             <a:r>
-              <a:rPr lang="en-US" sz="1300" b="1" dirty="0">
-                <a:solidFill>
-                  <a:srgbClr val="B86E1E"/>
-                </a:solidFill>
-                <a:latin typeface="Courier New" pitchFamily="34" charset="0"/>
-                <a:ea typeface="Courier New" pitchFamily="34" charset="-122"/>
-                <a:cs typeface="Courier New" pitchFamily="34" charset="-120"/>
-              </a:rPr>
-              <a:t>Release date</a:t>
-            </a:r>
-            <a:r>
               <a:rPr lang="en-US" sz="1500" dirty="0">
                 <a:solidFill>
                   <a:srgbClr val="2B1D19"/>
                 </a:solidFill>
               </a:rPr>
-              <a:t> is a </a:t>
+              <a:t>the whole schema is on </a:t>
             </a:r>
             <a:r>
               <a:rPr lang="en-US" sz="1500" b="1" dirty="0">
@@ -7359,7 +7528,7 @@
                   <a:srgbClr val="2B1D19"/>
                 </a:solidFill>
               </a:rPr>
-              <a:t>String</a:t>
+              <a:t>one line</a:t>
             </a:r>
             <a:r>
               <a:rPr lang="en-US" sz="1500" dirty="0">
@@ -7367,7 +7536,7 @@
                   <a:srgbClr val="2B1D19"/>
                 </a:solidFill>
               </a:rPr>
-              <a:t>, not a date: Polars stored the dates as text</a:t>
+              <a:t>, so it runs off the right edge</a:t>
             </a:r>
             <a:endParaRPr lang="en-US" sz="1500" dirty="0"/>
           </a:p>
@@ -7393,7 +7562,7 @@
                   <a:srgbClr val="2B1D19"/>
                 </a:solidFill>
               </a:rPr>
-              <a:t>we can't sort text dates into the right order or work out a game's year</a:t>
+              <a:t>we can scroll across, but it's hard to read</a:t>
             </a:r>
             <a:endParaRPr lang="en-US" sz="1500" dirty="0"/>
           </a:p>
@@ -7419,7 +7588,15 @@
                   <a:srgbClr val="2B1D19"/>
                 </a:solidFill>
               </a:rPr>
-              <a:t>we'll need to fix this column in Behind the Scenes</a:t>
+              <a:t>it would be easier with </a:t>
+            </a:r>
+            <a:r>
+              <a:rPr lang="en-US" sz="1500" b="1" dirty="0">
+                <a:solidFill>
+                  <a:srgbClr val="2B1D19"/>
+                </a:solidFill>
+              </a:rPr>
+              <a:t>each column on its own line</a:t>
             </a:r>
             <a:endParaRPr lang="en-US" sz="1500" dirty="0"/>
           </a:p>
@@ -7852,6 +8029,967 @@
                   <a:srgbClr val="4E342E"/>
                 </a:solidFill>
               </a:rPr>
+              <a:t>One column per line</a:t>
+            </a:r>
+            <a:endParaRPr lang="en-US" sz="2800" dirty="0"/>
+          </a:p>
+        </p:txBody>
+      </p:sp>
+      <p:sp>
+        <p:nvSpPr>
+          <p:cNvPr id="3" name="Code panel"/>
+          <p:cNvSpPr/>
+          <p:nvPr/>
+        </p:nvSpPr>
+        <p:spPr>
+          <a:xfrm>
+            <a:off x="457200" y="1051560"/>
+            <a:ext cx="5059680" cy="1024890"/>
+          </a:xfrm>
+          <a:prstGeom prst="roundRect">
+            <a:avLst>
+              <a:gd name="adj" fmla="val 5353"/>
+            </a:avLst>
+          </a:prstGeom>
+          <a:solidFill>
+            <a:srgbClr val="2B1D19"/>
+          </a:solidFill>
+          <a:ln w="12700">
+            <a:solidFill>
+              <a:srgbClr val="2B1D19"/>
+            </a:solidFill>
+            <a:prstDash val="solid"/>
+          </a:ln>
+        </p:spPr>
+      </p:sp>
+      <p:sp>
+        <p:nvSpPr>
+          <p:cNvPr id="4" name="Text 2"/>
+          <p:cNvSpPr txBox="1"/>
+          <p:nvPr/>
+        </p:nvSpPr>
+        <p:spPr>
+          <a:xfrm>
+            <a:off x="640080" y="1161288"/>
+            <a:ext cx="4693920" cy="274320"/>
+          </a:xfrm>
+          <a:prstGeom prst="rect">
+            <a:avLst/>
+          </a:prstGeom>
+          <a:noFill/>
+          <a:ln/>
+        </p:spPr>
+        <p:txBody>
+          <a:bodyPr wrap="square" lIns="0" tIns="0" rIns="0" bIns="0" rtlCol="0" anchor="ctr"/>
+          <a:lstStyle/>
+          <a:p>
+            <a:pPr indent="0" marL="0">
+              <a:buNone/>
+            </a:pPr>
+            <a:r>
+              <a:rPr lang="en-US" sz="1200" b="1" dirty="0">
+                <a:solidFill>
+                  <a:srgbClr val="E8A55A"/>
+                </a:solidFill>
+              </a:rPr>
+              <a:t>clean_steam.py — change existing cell</a:t>
+            </a:r>
+            <a:endParaRPr lang="en-US" sz="1200" dirty="0"/>
+          </a:p>
+        </p:txBody>
+      </p:sp>
+      <p:sp>
+        <p:nvSpPr>
+          <p:cNvPr id="5" name="Code"/>
+          <p:cNvSpPr txBox="1"/>
+          <p:nvPr/>
+        </p:nvSpPr>
+        <p:spPr>
+          <a:xfrm>
+            <a:off x="594360" y="1508760"/>
+            <a:ext cx="4785360" cy="490220"/>
+          </a:xfrm>
+          <a:prstGeom prst="rect">
+            <a:avLst/>
+          </a:prstGeom>
+          <a:noFill/>
+          <a:ln/>
+        </p:spPr>
+        <p:txBody>
+          <a:bodyPr wrap="square" lIns="0" tIns="0" rIns="0" bIns="0" rtlCol="0" anchor="t"/>
+          <a:lstStyle/>
+          <a:p>
+            <a:pPr indent="0" marL="0">
+              <a:lnSpc>
+                <a:spcPts val="1750"/>
+              </a:lnSpc>
+              <a:buNone/>
+            </a:pPr>
+            <a:r>
+              <a:rPr lang="en-US" sz="1400" dirty="0">
+                <a:solidFill>
+                  <a:srgbClr val="9C8A80"/>
+                </a:solidFill>
+                <a:latin typeface="Courier New" pitchFamily="34" charset="0"/>
+                <a:ea typeface="Courier New" pitchFamily="34" charset="-122"/>
+                <a:cs typeface="Courier New" pitchFamily="34" charset="-120"/>
+              </a:rPr>
+              <a:t> 1  </a:t>
+            </a:r>
+            <a:r>
+              <a:rPr lang="en-US" sz="1400" dirty="0">
+                <a:solidFill>
+                  <a:srgbClr val="F7EFE6"/>
+                </a:solidFill>
+                <a:latin typeface="Courier New" pitchFamily="34" charset="0"/>
+                <a:ea typeface="Courier New" pitchFamily="34" charset="-122"/>
+                <a:cs typeface="Courier New" pitchFamily="34" charset="-120"/>
+              </a:rPr>
+              <a:t>for name, dtype in games.schema.items():</a:t>
+            </a:r>
+            <a:endParaRPr lang="en-US" sz="1400" dirty="0"/>
+          </a:p>
+          <a:p>
+            <a:pPr indent="0" marL="0">
+              <a:lnSpc>
+                <a:spcPts val="1750"/>
+              </a:lnSpc>
+              <a:buNone/>
+            </a:pPr>
+            <a:r>
+              <a:rPr lang="en-US" sz="1400" dirty="0">
+                <a:solidFill>
+                  <a:srgbClr val="9C8A80"/>
+                </a:solidFill>
+                <a:latin typeface="Courier New" pitchFamily="34" charset="0"/>
+                <a:ea typeface="Courier New" pitchFamily="34" charset="-122"/>
+                <a:cs typeface="Courier New" pitchFamily="34" charset="-120"/>
+              </a:rPr>
+              <a:t> 2  </a:t>
+            </a:r>
+            <a:r>
+              <a:rPr lang="en-US" sz="1400" dirty="0">
+                <a:solidFill>
+                  <a:srgbClr val="F7EFE6"/>
+                </a:solidFill>
+                <a:latin typeface="Courier New" pitchFamily="34" charset="0"/>
+                <a:ea typeface="Courier New" pitchFamily="34" charset="-122"/>
+                <a:cs typeface="Courier New" pitchFamily="34" charset="-120"/>
+              </a:rPr>
+              <a:t>    print(name, dtype)</a:t>
+            </a:r>
+            <a:endParaRPr lang="en-US" sz="1400" dirty="0"/>
+          </a:p>
+        </p:txBody>
+      </p:sp>
+      <p:sp>
+        <p:nvSpPr>
+          <p:cNvPr id="6" name="Text 4"/>
+          <p:cNvSpPr txBox="1"/>
+          <p:nvPr/>
+        </p:nvSpPr>
+        <p:spPr>
+          <a:xfrm>
+            <a:off x="457200" y="2167890"/>
+            <a:ext cx="5059680" cy="384048"/>
+          </a:xfrm>
+          <a:prstGeom prst="rect">
+            <a:avLst/>
+          </a:prstGeom>
+          <a:noFill/>
+          <a:ln/>
+        </p:spPr>
+        <p:txBody>
+          <a:bodyPr wrap="square" lIns="0" tIns="0" rIns="0" bIns="0" rtlCol="0" anchor="ctr">
+            <a:normAutofit/>
+          </a:bodyPr>
+          <a:lstStyle/>
+          <a:p>
+            <a:pPr indent="0" marL="0">
+              <a:spcAft>
+                <a:spcPts val="800"/>
+              </a:spcAft>
+              <a:buNone/>
+            </a:pPr>
+            <a:r>
+              <a:rPr lang="en-US" sz="1500" dirty="0">
+                <a:solidFill>
+                  <a:srgbClr val="2B1D19"/>
+                </a:solidFill>
+              </a:rPr>
+              <a:t>​</a:t>
+            </a:r>
+            <a:r>
+              <a:rPr lang="en-US" sz="1500" dirty="0">
+                <a:solidFill>
+                  <a:srgbClr val="2B1D19"/>
+                </a:solidFill>
+              </a:rPr>
+              <a:t>13 lines, from </a:t>
+            </a:r>
+            <a:r>
+              <a:rPr lang="en-US" sz="1300" b="1" dirty="0">
+                <a:solidFill>
+                  <a:srgbClr val="B86E1E"/>
+                </a:solidFill>
+                <a:latin typeface="Courier New" pitchFamily="34" charset="0"/>
+                <a:ea typeface="Courier New" pitchFamily="34" charset="-122"/>
+                <a:cs typeface="Courier New" pitchFamily="34" charset="-120"/>
+              </a:rPr>
+              <a:t>AppID Int64</a:t>
+            </a:r>
+            <a:r>
+              <a:rPr lang="en-US" sz="1500" dirty="0">
+                <a:solidFill>
+                  <a:srgbClr val="2B1D19"/>
+                </a:solidFill>
+              </a:rPr>
+              <a:t> to </a:t>
+            </a:r>
+            <a:r>
+              <a:rPr lang="en-US" sz="1300" b="1" dirty="0">
+                <a:solidFill>
+                  <a:srgbClr val="B86E1E"/>
+                </a:solidFill>
+                <a:latin typeface="Courier New" pitchFamily="34" charset="0"/>
+                <a:ea typeface="Courier New" pitchFamily="34" charset="-122"/>
+                <a:cs typeface="Courier New" pitchFamily="34" charset="-120"/>
+              </a:rPr>
+              <a:t>Support email String</a:t>
+            </a:r>
+            <a:r>
+              <a:rPr lang="en-US" sz="1500" dirty="0">
+                <a:solidFill>
+                  <a:srgbClr val="2B1D19"/>
+                </a:solidFill>
+              </a:rPr>
+              <a:t>.</a:t>
+            </a:r>
+            <a:endParaRPr lang="en-US" sz="1500" dirty="0"/>
+          </a:p>
+        </p:txBody>
+      </p:sp>
+      <p:sp>
+        <p:nvSpPr>
+          <p:cNvPr id="7" name="primm box"/>
+          <p:cNvSpPr/>
+          <p:nvPr/>
+        </p:nvSpPr>
+        <p:spPr>
+          <a:xfrm>
+            <a:off x="457200" y="2670810"/>
+            <a:ext cx="5059680" cy="1056640"/>
+          </a:xfrm>
+          <a:prstGeom prst="roundRect">
+            <a:avLst>
+              <a:gd name="adj" fmla="val 6923"/>
+            </a:avLst>
+          </a:prstGeom>
+          <a:solidFill>
+            <a:srgbClr val="E6F2E6"/>
+          </a:solidFill>
+          <a:ln w="12700">
+            <a:solidFill>
+              <a:srgbClr val="E6F2E6"/>
+            </a:solidFill>
+            <a:prstDash val="solid"/>
+          </a:ln>
+        </p:spPr>
+      </p:sp>
+      <p:sp>
+        <p:nvSpPr>
+          <p:cNvPr id="8" name="Text 6"/>
+          <p:cNvSpPr txBox="1"/>
+          <p:nvPr/>
+        </p:nvSpPr>
+        <p:spPr>
+          <a:xfrm>
+            <a:off x="685800" y="2807970"/>
+            <a:ext cx="4602480" cy="365760"/>
+          </a:xfrm>
+          <a:prstGeom prst="rect">
+            <a:avLst/>
+          </a:prstGeom>
+          <a:noFill/>
+          <a:ln/>
+        </p:spPr>
+        <p:txBody>
+          <a:bodyPr wrap="square" lIns="0" tIns="0" rIns="0" bIns="0" rtlCol="0" anchor="ctr"/>
+          <a:lstStyle/>
+          <a:p>
+            <a:pPr indent="0" marL="0">
+              <a:buNone/>
+            </a:pPr>
+            <a:r>
+              <a:rPr lang="en-US" sz="1600" b="1" dirty="0">
+                <a:solidFill>
+                  <a:srgbClr val="2E6B30"/>
+                </a:solidFill>
+              </a:rPr>
+              <a:t>Predict</a:t>
+            </a:r>
+            <a:endParaRPr lang="en-US" sz="1600" dirty="0"/>
+          </a:p>
+        </p:txBody>
+      </p:sp>
+      <p:sp>
+        <p:nvSpPr>
+          <p:cNvPr id="9" name="Text 7"/>
+          <p:cNvSpPr txBox="1"/>
+          <p:nvPr/>
+        </p:nvSpPr>
+        <p:spPr>
+          <a:xfrm>
+            <a:off x="685800" y="3173730"/>
+            <a:ext cx="4602480" cy="370840"/>
+          </a:xfrm>
+          <a:prstGeom prst="rect">
+            <a:avLst/>
+          </a:prstGeom>
+          <a:noFill/>
+          <a:ln/>
+        </p:spPr>
+        <p:txBody>
+          <a:bodyPr wrap="square" lIns="0" tIns="0" rIns="0" bIns="0" rtlCol="0" anchor="t">
+            <a:normAutofit/>
+          </a:bodyPr>
+          <a:lstStyle/>
+          <a:p>
+            <a:pPr indent="0" marL="0">
+              <a:spcAft>
+                <a:spcPts val="800"/>
+              </a:spcAft>
+              <a:buNone/>
+            </a:pPr>
+            <a:r>
+              <a:rPr lang="en-US" sz="1500" dirty="0">
+                <a:solidFill>
+                  <a:srgbClr val="2B1D19"/>
+                </a:solidFill>
+              </a:rPr>
+              <a:t>​</a:t>
+            </a:r>
+            <a:r>
+              <a:rPr lang="en-US" sz="1500" dirty="0">
+                <a:solidFill>
+                  <a:srgbClr val="2B1D19"/>
+                </a:solidFill>
+              </a:rPr>
+              <a:t>What will appear below the cell? How many lines?</a:t>
+            </a:r>
+            <a:endParaRPr lang="en-US" sz="1500" dirty="0"/>
+          </a:p>
+        </p:txBody>
+      </p:sp>
+      <p:sp>
+        <p:nvSpPr>
+          <p:cNvPr id="10" name="Text 8"/>
+          <p:cNvSpPr txBox="1"/>
+          <p:nvPr/>
+        </p:nvSpPr>
+        <p:spPr>
+          <a:xfrm>
+            <a:off x="5791200" y="1051560"/>
+            <a:ext cx="2895600" cy="320040"/>
+          </a:xfrm>
+          <a:prstGeom prst="rect">
+            <a:avLst/>
+          </a:prstGeom>
+          <a:noFill/>
+          <a:ln/>
+        </p:spPr>
+        <p:txBody>
+          <a:bodyPr wrap="square" lIns="0" tIns="0" rIns="0" bIns="0" rtlCol="0" anchor="ctr"/>
+          <a:lstStyle/>
+          <a:p>
+            <a:pPr indent="0" marL="0">
+              <a:buNone/>
+            </a:pPr>
+            <a:r>
+              <a:rPr lang="en-US" sz="1400" b="1" dirty="0">
+                <a:solidFill>
+                  <a:srgbClr val="B86E1E"/>
+                </a:solidFill>
+              </a:rPr>
+              <a:t>Why</a:t>
+            </a:r>
+            <a:endParaRPr lang="en-US" sz="1400" dirty="0"/>
+          </a:p>
+        </p:txBody>
+      </p:sp>
+      <p:sp>
+        <p:nvSpPr>
+          <p:cNvPr id="11" name="Text 9"/>
+          <p:cNvSpPr txBox="1"/>
+          <p:nvPr/>
+        </p:nvSpPr>
+        <p:spPr>
+          <a:xfrm>
+            <a:off x="5791200" y="1399032"/>
+            <a:ext cx="2895600" cy="1554480"/>
+          </a:xfrm>
+          <a:prstGeom prst="rect">
+            <a:avLst/>
+          </a:prstGeom>
+          <a:noFill/>
+          <a:ln/>
+        </p:spPr>
+        <p:txBody>
+          <a:bodyPr wrap="square" lIns="0" tIns="0" rIns="0" bIns="0" rtlCol="0" anchor="t">
+            <a:normAutofit/>
+          </a:bodyPr>
+          <a:lstStyle/>
+          <a:p>
+            <a:pPr indent="0" marL="0">
+              <a:spcAft>
+                <a:spcPts val="800"/>
+              </a:spcAft>
+              <a:buNone/>
+            </a:pPr>
+            <a:r>
+              <a:rPr lang="en-US" sz="1500" dirty="0">
+                <a:solidFill>
+                  <a:srgbClr val="2B1D19"/>
+                </a:solidFill>
+              </a:rPr>
+              <a:t>​</a:t>
+            </a:r>
+            <a:r>
+              <a:rPr lang="en-US" sz="1500" dirty="0">
+                <a:solidFill>
+                  <a:srgbClr val="2B1D19"/>
+                </a:solidFill>
+              </a:rPr>
+              <a:t>The schema works like a dictionary: column names are the keys and data types are the values. </a:t>
+            </a:r>
+            <a:r>
+              <a:rPr lang="en-US" sz="1300" b="1" dirty="0">
+                <a:solidFill>
+                  <a:srgbClr val="B86E1E"/>
+                </a:solidFill>
+                <a:latin typeface="Courier New" pitchFamily="34" charset="0"/>
+                <a:ea typeface="Courier New" pitchFamily="34" charset="-122"/>
+                <a:cs typeface="Courier New" pitchFamily="34" charset="-120"/>
+              </a:rPr>
+              <a:t>items()</a:t>
+            </a:r>
+            <a:r>
+              <a:rPr lang="en-US" sz="1500" dirty="0">
+                <a:solidFill>
+                  <a:srgbClr val="2B1D19"/>
+                </a:solidFill>
+              </a:rPr>
+              <a:t> gives each pair, so a </a:t>
+            </a:r>
+            <a:r>
+              <a:rPr lang="en-US" sz="1300" b="1" dirty="0">
+                <a:solidFill>
+                  <a:srgbClr val="B86E1E"/>
+                </a:solidFill>
+                <a:latin typeface="Courier New" pitchFamily="34" charset="0"/>
+                <a:ea typeface="Courier New" pitchFamily="34" charset="-122"/>
+                <a:cs typeface="Courier New" pitchFamily="34" charset="-120"/>
+              </a:rPr>
+              <a:t>for</a:t>
+            </a:r>
+            <a:r>
+              <a:rPr lang="en-US" sz="1500" dirty="0">
+                <a:solidFill>
+                  <a:srgbClr val="2B1D19"/>
+                </a:solidFill>
+              </a:rPr>
+              <a:t> loop can </a:t>
+            </a:r>
+            <a:r>
+              <a:rPr lang="en-US" sz="1300" b="1" dirty="0">
+                <a:solidFill>
+                  <a:srgbClr val="B86E1E"/>
+                </a:solidFill>
+                <a:latin typeface="Courier New" pitchFamily="34" charset="0"/>
+                <a:ea typeface="Courier New" pitchFamily="34" charset="-122"/>
+                <a:cs typeface="Courier New" pitchFamily="34" charset="-120"/>
+              </a:rPr>
+              <a:t>print</a:t>
+            </a:r>
+            <a:r>
+              <a:rPr lang="en-US" sz="1500" dirty="0">
+                <a:solidFill>
+                  <a:srgbClr val="2B1D19"/>
+                </a:solidFill>
+              </a:rPr>
+              <a:t> one column per line.</a:t>
+            </a:r>
+            <a:endParaRPr lang="en-US" sz="1500" dirty="0"/>
+          </a:p>
+        </p:txBody>
+      </p:sp>
+      <p:sp>
+        <p:nvSpPr>
+          <p:cNvPr id="12" name="Text 10"/>
+          <p:cNvSpPr txBox="1"/>
+          <p:nvPr/>
+        </p:nvSpPr>
+        <p:spPr>
+          <a:xfrm>
+            <a:off x="5791200" y="3136392"/>
+            <a:ext cx="2895600" cy="320040"/>
+          </a:xfrm>
+          <a:prstGeom prst="rect">
+            <a:avLst/>
+          </a:prstGeom>
+          <a:noFill/>
+          <a:ln/>
+        </p:spPr>
+        <p:txBody>
+          <a:bodyPr wrap="square" lIns="0" tIns="0" rIns="0" bIns="0" rtlCol="0" anchor="ctr"/>
+          <a:lstStyle/>
+          <a:p>
+            <a:pPr indent="0" marL="0">
+              <a:buNone/>
+            </a:pPr>
+            <a:r>
+              <a:rPr lang="en-US" sz="1400" b="1" dirty="0">
+                <a:solidFill>
+                  <a:srgbClr val="B86E1E"/>
+                </a:solidFill>
+              </a:rPr>
+              <a:t>What it does</a:t>
+            </a:r>
+            <a:endParaRPr lang="en-US" sz="1400" dirty="0"/>
+          </a:p>
+        </p:txBody>
+      </p:sp>
+      <p:sp>
+        <p:nvSpPr>
+          <p:cNvPr id="13" name="Text 11"/>
+          <p:cNvSpPr txBox="1"/>
+          <p:nvPr/>
+        </p:nvSpPr>
+        <p:spPr>
+          <a:xfrm>
+            <a:off x="5791200" y="3483864"/>
+            <a:ext cx="2895600" cy="1042416"/>
+          </a:xfrm>
+          <a:prstGeom prst="rect">
+            <a:avLst/>
+          </a:prstGeom>
+          <a:noFill/>
+          <a:ln/>
+        </p:spPr>
+        <p:txBody>
+          <a:bodyPr wrap="square" lIns="0" tIns="0" rIns="0" bIns="0" rtlCol="0" anchor="t">
+            <a:normAutofit/>
+          </a:bodyPr>
+          <a:lstStyle/>
+          <a:p>
+            <a:pPr marL="342900" indent="-342900">
+              <a:spcAft>
+                <a:spcPts val="400"/>
+              </a:spcAft>
+              <a:buSzPct val="100000"/>
+              <a:buChar char="•"/>
+            </a:pPr>
+            <a:r>
+              <a:rPr lang="en-US" sz="1400" dirty="0">
+                <a:solidFill>
+                  <a:srgbClr val="2B1D19"/>
+                </a:solidFill>
+              </a:rPr>
+              <a:t>​</a:t>
+            </a:r>
+            <a:r>
+              <a:rPr lang="en-US" sz="1400" b="1" dirty="0">
+                <a:solidFill>
+                  <a:srgbClr val="2B1D19"/>
+                </a:solidFill>
+              </a:rPr>
+              <a:t>line 1</a:t>
+            </a:r>
+            <a:r>
+              <a:rPr lang="en-US" sz="1400" dirty="0">
+                <a:solidFill>
+                  <a:srgbClr val="2B1D19"/>
+                </a:solidFill>
+              </a:rPr>
+              <a:t> → loops through each column's name and data type</a:t>
+            </a:r>
+            <a:endParaRPr lang="en-US" sz="1400" dirty="0"/>
+          </a:p>
+          <a:p>
+            <a:pPr marL="342900" indent="-342900">
+              <a:spcAft>
+                <a:spcPts val="400"/>
+              </a:spcAft>
+              <a:buSzPct val="100000"/>
+              <a:buChar char="•"/>
+            </a:pPr>
+            <a:r>
+              <a:rPr lang="en-US" sz="1400" dirty="0">
+                <a:solidFill>
+                  <a:srgbClr val="2B1D19"/>
+                </a:solidFill>
+              </a:rPr>
+              <a:t>​</a:t>
+            </a:r>
+            <a:r>
+              <a:rPr lang="en-US" sz="1400" b="1" dirty="0">
+                <a:solidFill>
+                  <a:srgbClr val="2B1D19"/>
+                </a:solidFill>
+              </a:rPr>
+              <a:t>line 2</a:t>
+            </a:r>
+            <a:r>
+              <a:rPr lang="en-US" sz="1400" dirty="0">
+                <a:solidFill>
+                  <a:srgbClr val="2B1D19"/>
+                </a:solidFill>
+              </a:rPr>
+              <a:t> → prints them on one line</a:t>
+            </a:r>
+            <a:endParaRPr lang="en-US" sz="1400" dirty="0"/>
+          </a:p>
+        </p:txBody>
+      </p:sp>
+      <p:sp>
+        <p:nvSpPr>
+          <p:cNvPr id="25" name="Slide Number Placeholder 0"/>
+          <p:cNvSpPr>
+            <a:spLocks noGrp="1"/>
+          </p:cNvSpPr>
+          <p:nvPr>
+            <p:ph type="sldNum" sz="quarter" idx="4294967295"/>
+          </p:nvPr>
+        </p:nvSpPr>
+        <p:spPr>
+          <a:xfrm>
+            <a:off x="365760" y="4709160"/>
+            <a:ext cx="548640" cy="274320"/>
+          </a:xfrm>
+          <a:prstGeom prst="rect">
+            <a:avLst/>
+          </a:prstGeom>
+          <a:extLst>
+            <a:ext uri="{C572A759-6A51-4108-AA02-DFA0A04FC94B}">
+              <ma14:wrappingTextBoxFlag xmlns:ma14="http://schemas.microsoft.com/office/mac/drawingml/2011/main" val="0"/>
+            </a:ext>
+          </a:extLst>
+        </p:spPr>
+        <p:txBody>
+          <a:bodyPr/>
+          <a:lstStyle>
+            <a:lvl1pPr>
+              <a:defRPr sz="1000">
+                <a:solidFill>
+                  <a:srgbClr val="6B6B6B"/>
+                </a:solidFill>
+              </a:defRPr>
+            </a:lvl1pPr>
+          </a:lstStyle>
+          <a:p>
+            <a:pPr algn="l"/>
+            <a:fld id="{F7021451-1387-4CA6-816F-3879F97B5CBC}" type="slidenum">
+              <a:rPr b="0" lang="en-US"/>
+              <a:t>20</a:t>
+            </a:fld>
+            <a:endParaRPr lang="en-US"/>
+          </a:p>
+        </p:txBody>
+      </p:sp>
+    </p:spTree>
+  </p:cSld>
+  <p:clrMapOvr>
+    <a:masterClrMapping/>
+  </p:clrMapOvr>
+</p:sld>
+</file>
+
+<file path=ppt/slides/slide21.xml><?xml version="1.0" encoding="utf-8"?>
+<p:sld xmlns:a="http://schemas.openxmlformats.org/drawingml/2006/main" xmlns:r="http://schemas.openxmlformats.org/officeDocument/2006/relationships" xmlns:p="http://schemas.openxmlformats.org/presentationml/2006/main">
+  <p:cSld name="Slide 21">
+    <p:spTree>
+      <p:nvGrpSpPr>
+        <p:cNvPr id="1" name=""/>
+        <p:cNvGrpSpPr/>
+        <p:nvPr/>
+      </p:nvGrpSpPr>
+      <p:grpSpPr>
+        <a:xfrm>
+          <a:off x="0" y="0"/>
+          <a:ext cx="0" cy="0"/>
+          <a:chOff x="0" y="0"/>
+          <a:chExt cx="0" cy="0"/>
+        </a:xfrm>
+      </p:grpSpPr>
+      <p:sp>
+        <p:nvSpPr>
+          <p:cNvPr id="2" name="Title"/>
+          <p:cNvSpPr txBox="1"/>
+          <p:nvPr/>
+        </p:nvSpPr>
+        <p:spPr>
+          <a:xfrm>
+            <a:off x="457200" y="274320"/>
+            <a:ext cx="8229600" cy="640080"/>
+          </a:xfrm>
+          <a:prstGeom prst="rect">
+            <a:avLst/>
+          </a:prstGeom>
+          <a:noFill/>
+          <a:ln/>
+        </p:spPr>
+        <p:txBody>
+          <a:bodyPr wrap="square" lIns="0" tIns="0" rIns="0" bIns="0" rtlCol="0" anchor="ctr">
+            <a:normAutofit/>
+          </a:bodyPr>
+          <a:lstStyle/>
+          <a:p>
+            <a:pPr indent="0" marL="0">
+              <a:buNone/>
+            </a:pPr>
+            <a:r>
+              <a:rPr lang="en-US" sz="2800" b="1" dirty="0">
+                <a:solidFill>
+                  <a:srgbClr val="4E342E"/>
+                </a:solidFill>
+              </a:rPr>
+              <a:t>What the schema tells us</a:t>
+            </a:r>
+            <a:endParaRPr lang="en-US" sz="2800" dirty="0"/>
+          </a:p>
+        </p:txBody>
+      </p:sp>
+      <p:sp>
+        <p:nvSpPr>
+          <p:cNvPr id="3" name="Text 1"/>
+          <p:cNvSpPr txBox="1"/>
+          <p:nvPr/>
+        </p:nvSpPr>
+        <p:spPr>
+          <a:xfrm>
+            <a:off x="457200" y="1097280"/>
+            <a:ext cx="8229600" cy="3383280"/>
+          </a:xfrm>
+          <a:prstGeom prst="rect">
+            <a:avLst/>
+          </a:prstGeom>
+          <a:noFill/>
+          <a:ln/>
+        </p:spPr>
+        <p:txBody>
+          <a:bodyPr wrap="square" lIns="0" tIns="0" rIns="0" bIns="0" rtlCol="0" anchor="t">
+            <a:normAutofit/>
+          </a:bodyPr>
+          <a:lstStyle/>
+          <a:p>
+            <a:pPr marL="342900" indent="-342900">
+              <a:spcAft>
+                <a:spcPts val="800"/>
+              </a:spcAft>
+              <a:buSzPct val="100000"/>
+              <a:buChar char="•"/>
+            </a:pPr>
+            <a:r>
+              <a:rPr lang="en-US" sz="1700" dirty="0">
+                <a:solidFill>
+                  <a:srgbClr val="2B1D19"/>
+                </a:solidFill>
+              </a:rPr>
+              <a:t>​</a:t>
+            </a:r>
+            <a:r>
+              <a:rPr lang="en-US" sz="1500" b="1" dirty="0">
+                <a:solidFill>
+                  <a:srgbClr val="B86E1E"/>
+                </a:solidFill>
+                <a:latin typeface="Courier New" pitchFamily="34" charset="0"/>
+                <a:ea typeface="Courier New" pitchFamily="34" charset="-122"/>
+                <a:cs typeface="Courier New" pitchFamily="34" charset="-120"/>
+              </a:rPr>
+              <a:t>Release date</a:t>
+            </a:r>
+            <a:r>
+              <a:rPr lang="en-US" sz="1700" dirty="0">
+                <a:solidFill>
+                  <a:srgbClr val="2B1D19"/>
+                </a:solidFill>
+              </a:rPr>
+              <a:t> is a </a:t>
+            </a:r>
+            <a:r>
+              <a:rPr lang="en-US" sz="1700" b="1" dirty="0">
+                <a:solidFill>
+                  <a:srgbClr val="2B1D19"/>
+                </a:solidFill>
+              </a:rPr>
+              <a:t>String</a:t>
+            </a:r>
+            <a:r>
+              <a:rPr lang="en-US" sz="1700" dirty="0">
+                <a:solidFill>
+                  <a:srgbClr val="2B1D19"/>
+                </a:solidFill>
+              </a:rPr>
+              <a:t>, not a date: Polars stored the dates as text</a:t>
+            </a:r>
+            <a:endParaRPr lang="en-US" sz="1700" dirty="0"/>
+          </a:p>
+          <a:p>
+            <a:pPr marL="342900" indent="-342900">
+              <a:spcAft>
+                <a:spcPts val="800"/>
+              </a:spcAft>
+              <a:buSzPct val="100000"/>
+              <a:buChar char="•"/>
+            </a:pPr>
+            <a:r>
+              <a:rPr lang="en-US" sz="1700" dirty="0">
+                <a:solidFill>
+                  <a:srgbClr val="2B1D19"/>
+                </a:solidFill>
+              </a:rPr>
+              <a:t>​</a:t>
+            </a:r>
+            <a:r>
+              <a:rPr lang="en-US" sz="1700" dirty="0">
+                <a:solidFill>
+                  <a:srgbClr val="2B1D19"/>
+                </a:solidFill>
+              </a:rPr>
+              <a:t>we can't sort text dates into the right order or work out a game's year</a:t>
+            </a:r>
+            <a:endParaRPr lang="en-US" sz="1700" dirty="0"/>
+          </a:p>
+          <a:p>
+            <a:pPr marL="342900" indent="-342900">
+              <a:spcAft>
+                <a:spcPts val="800"/>
+              </a:spcAft>
+              <a:buSzPct val="100000"/>
+              <a:buChar char="•"/>
+            </a:pPr>
+            <a:r>
+              <a:rPr lang="en-US" sz="1700" dirty="0">
+                <a:solidFill>
+                  <a:srgbClr val="2B1D19"/>
+                </a:solidFill>
+              </a:rPr>
+              <a:t>​</a:t>
+            </a:r>
+            <a:r>
+              <a:rPr lang="en-US" sz="1700" dirty="0">
+                <a:solidFill>
+                  <a:srgbClr val="2B1D19"/>
+                </a:solidFill>
+              </a:rPr>
+              <a:t>we'll need to fix this column in Behind the Scenes</a:t>
+            </a:r>
+            <a:endParaRPr lang="en-US" sz="1700" dirty="0"/>
+          </a:p>
+        </p:txBody>
+      </p:sp>
+      <p:sp>
+        <p:nvSpPr>
+          <p:cNvPr id="25" name="Slide Number Placeholder 0"/>
+          <p:cNvSpPr>
+            <a:spLocks noGrp="1"/>
+          </p:cNvSpPr>
+          <p:nvPr>
+            <p:ph type="sldNum" sz="quarter" idx="4294967295"/>
+          </p:nvPr>
+        </p:nvSpPr>
+        <p:spPr>
+          <a:xfrm>
+            <a:off x="365760" y="4709160"/>
+            <a:ext cx="548640" cy="274320"/>
+          </a:xfrm>
+          <a:prstGeom prst="rect">
+            <a:avLst/>
+          </a:prstGeom>
+          <a:extLst>
+            <a:ext uri="{C572A759-6A51-4108-AA02-DFA0A04FC94B}">
+              <ma14:wrappingTextBoxFlag xmlns:ma14="http://schemas.microsoft.com/office/mac/drawingml/2011/main" val="0"/>
+            </a:ext>
+          </a:extLst>
+        </p:spPr>
+        <p:txBody>
+          <a:bodyPr/>
+          <a:lstStyle>
+            <a:lvl1pPr>
+              <a:defRPr sz="1000">
+                <a:solidFill>
+                  <a:srgbClr val="6B6B6B"/>
+                </a:solidFill>
+              </a:defRPr>
+            </a:lvl1pPr>
+          </a:lstStyle>
+          <a:p>
+            <a:pPr algn="l"/>
+            <a:fld id="{F7021451-1387-4CA6-816F-3879F97B5CBC}" type="slidenum">
+              <a:rPr b="0" lang="en-US"/>
+              <a:t>21</a:t>
+            </a:fld>
+            <a:endParaRPr lang="en-US"/>
+          </a:p>
+        </p:txBody>
+      </p:sp>
+    </p:spTree>
+  </p:cSld>
+  <p:clrMapOvr>
+    <a:masterClrMapping/>
+  </p:clrMapOvr>
+</p:sld>
+</file>
+
+<file path=ppt/slides/slide22.xml><?xml version="1.0" encoding="utf-8"?>
+<p:sld xmlns:a="http://schemas.openxmlformats.org/drawingml/2006/main" xmlns:r="http://schemas.openxmlformats.org/officeDocument/2006/relationships" xmlns:p="http://schemas.openxmlformats.org/presentationml/2006/main">
+  <p:cSld name="Slide 22">
+    <p:spTree>
+      <p:nvGrpSpPr>
+        <p:cNvPr id="1" name=""/>
+        <p:cNvGrpSpPr/>
+        <p:nvPr/>
+      </p:nvGrpSpPr>
+      <p:grpSpPr>
+        <a:xfrm>
+          <a:off x="0" y="0"/>
+          <a:ext cx="0" cy="0"/>
+          <a:chOff x="0" y="0"/>
+          <a:chExt cx="0" cy="0"/>
+        </a:xfrm>
+      </p:grpSpPr>
+      <p:sp>
+        <p:nvSpPr>
+          <p:cNvPr id="2" name="Title"/>
+          <p:cNvSpPr txBox="1"/>
+          <p:nvPr/>
+        </p:nvSpPr>
+        <p:spPr>
+          <a:xfrm>
+            <a:off x="457200" y="274320"/>
+            <a:ext cx="8229600" cy="640080"/>
+          </a:xfrm>
+          <a:prstGeom prst="rect">
+            <a:avLst/>
+          </a:prstGeom>
+          <a:noFill/>
+          <a:ln/>
+        </p:spPr>
+        <p:txBody>
+          <a:bodyPr wrap="square" lIns="0" tIns="0" rIns="0" bIns="0" rtlCol="0" anchor="ctr">
+            <a:normAutofit/>
+          </a:bodyPr>
+          <a:lstStyle/>
+          <a:p>
+            <a:pPr indent="0" marL="0">
+              <a:buNone/>
+            </a:pPr>
+            <a:r>
+              <a:rPr lang="en-US" sz="2800" b="1" dirty="0">
+                <a:solidFill>
+                  <a:srgbClr val="4E342E"/>
+                </a:solidFill>
+              </a:rPr>
               <a:t>Three data types we'll meet again and again</a:t>
             </a:r>
             <a:endParaRPr lang="en-US" sz="2800" dirty="0"/>
@@ -7860,7 +8998,7 @@
       </p:sp>
       <p:graphicFrame>
         <p:nvGraphicFramePr>
-          <p:cNvPr id="21" name="Table 0"/>
+          <p:cNvPr id="23" name="Table 0"/>
           <p:cNvGraphicFramePr>
             <a:graphicFrameLocks noGrp="1"/>
           </p:cNvGraphicFramePr>
@@ -8740,594 +9878,6 @@
             <a:pPr algn="l"/>
             <a:fld id="{F7021451-1387-4CA6-816F-3879F97B5CBC}" type="slidenum">
               <a:rPr b="0" lang="en-US"/>
-              <a:t>20</a:t>
-            </a:fld>
-            <a:endParaRPr lang="en-US"/>
-          </a:p>
-        </p:txBody>
-      </p:sp>
-    </p:spTree>
-  </p:cSld>
-  <p:clrMapOvr>
-    <a:masterClrMapping/>
-  </p:clrMapOvr>
-</p:sld>
-</file>
-
-<file path=ppt/slides/slide21.xml><?xml version="1.0" encoding="utf-8"?>
-<p:sld xmlns:a="http://schemas.openxmlformats.org/drawingml/2006/main" xmlns:r="http://schemas.openxmlformats.org/officeDocument/2006/relationships" xmlns:p="http://schemas.openxmlformats.org/presentationml/2006/main">
-  <p:cSld name="Slide 21">
-    <p:spTree>
-      <p:nvGrpSpPr>
-        <p:cNvPr id="1" name=""/>
-        <p:cNvGrpSpPr/>
-        <p:nvPr/>
-      </p:nvGrpSpPr>
-      <p:grpSpPr>
-        <a:xfrm>
-          <a:off x="0" y="0"/>
-          <a:ext cx="0" cy="0"/>
-          <a:chOff x="0" y="0"/>
-          <a:chExt cx="0" cy="0"/>
-        </a:xfrm>
-      </p:grpSpPr>
-      <p:sp>
-        <p:nvSpPr>
-          <p:cNvPr id="2" name="Text 0"/>
-          <p:cNvSpPr txBox="1"/>
-          <p:nvPr/>
-        </p:nvSpPr>
-        <p:spPr>
-          <a:xfrm>
-            <a:off x="457200" y="1554480"/>
-            <a:ext cx="7498080" cy="914400"/>
-          </a:xfrm>
-          <a:prstGeom prst="rect">
-            <a:avLst/>
-          </a:prstGeom>
-          <a:noFill/>
-          <a:ln/>
-        </p:spPr>
-        <p:txBody>
-          <a:bodyPr wrap="square" lIns="0" tIns="0" rIns="0" bIns="0" rtlCol="0" anchor="ctr">
-            <a:normAutofit/>
-          </a:bodyPr>
-          <a:lstStyle/>
-          <a:p>
-            <a:pPr indent="0" marL="0">
-              <a:buNone/>
-            </a:pPr>
-            <a:r>
-              <a:rPr lang="en-US" sz="3600" b="1" dirty="0">
-                <a:solidFill>
-                  <a:srgbClr val="FFFFFF"/>
-                </a:solidFill>
-              </a:rPr>
-              <a:t>Reactive cells</a:t>
-            </a:r>
-            <a:endParaRPr lang="en-US" sz="3600" dirty="0"/>
-          </a:p>
-        </p:txBody>
-      </p:sp>
-      <p:sp>
-        <p:nvSpPr>
-          <p:cNvPr id="3" name="Text 1"/>
-          <p:cNvSpPr txBox="1"/>
-          <p:nvPr/>
-        </p:nvSpPr>
-        <p:spPr>
-          <a:xfrm>
-            <a:off x="457200" y="2514600"/>
-            <a:ext cx="7132320" cy="1097280"/>
-          </a:xfrm>
-          <a:prstGeom prst="rect">
-            <a:avLst/>
-          </a:prstGeom>
-          <a:noFill/>
-          <a:ln/>
-        </p:spPr>
-        <p:txBody>
-          <a:bodyPr wrap="square" lIns="0" tIns="0" rIns="0" bIns="0" rtlCol="0" anchor="t"/>
-          <a:lstStyle/>
-          <a:p>
-            <a:pPr indent="0" marL="0">
-              <a:spcAft>
-                <a:spcPts val="800"/>
-              </a:spcAft>
-              <a:buNone/>
-            </a:pPr>
-            <a:r>
-              <a:rPr lang="en-US" sz="1800" dirty="0">
-                <a:solidFill>
-                  <a:srgbClr val="F7EFE6"/>
-                </a:solidFill>
-              </a:rPr>
-              <a:t>​</a:t>
-            </a:r>
-            <a:r>
-              <a:rPr lang="en-US" sz="1800" dirty="0">
-                <a:solidFill>
-                  <a:srgbClr val="F7EFE6"/>
-                </a:solidFill>
-              </a:rPr>
-              <a:t>When we change a cell, marimo automatically re-runs every cell that uses its variables.</a:t>
-            </a:r>
-            <a:endParaRPr lang="en-US" sz="1800" dirty="0"/>
-          </a:p>
-        </p:txBody>
-      </p:sp>
-      <p:sp>
-        <p:nvSpPr>
-          <p:cNvPr id="25" name="Slide Number Placeholder 0"/>
-          <p:cNvSpPr>
-            <a:spLocks noGrp="1"/>
-          </p:cNvSpPr>
-          <p:nvPr>
-            <p:ph type="sldNum" sz="quarter" idx="4294967295"/>
-          </p:nvPr>
-        </p:nvSpPr>
-        <p:spPr>
-          <a:xfrm>
-            <a:off x="365760" y="4709160"/>
-            <a:ext cx="548640" cy="274320"/>
-          </a:xfrm>
-          <a:prstGeom prst="rect">
-            <a:avLst/>
-          </a:prstGeom>
-          <a:extLst>
-            <a:ext uri="{C572A759-6A51-4108-AA02-DFA0A04FC94B}">
-              <ma14:wrappingTextBoxFlag xmlns:ma14="http://schemas.microsoft.com/office/mac/drawingml/2011/main" val="0"/>
-            </a:ext>
-          </a:extLst>
-        </p:spPr>
-        <p:txBody>
-          <a:bodyPr/>
-          <a:lstStyle>
-            <a:lvl1pPr>
-              <a:defRPr sz="1000">
-                <a:solidFill>
-                  <a:srgbClr val="F7EFE6"/>
-                </a:solidFill>
-              </a:defRPr>
-            </a:lvl1pPr>
-          </a:lstStyle>
-          <a:p>
-            <a:pPr algn="l"/>
-            <a:fld id="{F7021451-1387-4CA6-816F-3879F97B5CBC}" type="slidenum">
-              <a:rPr b="0" lang="en-US"/>
-              <a:t>21</a:t>
-            </a:fld>
-            <a:endParaRPr lang="en-US"/>
-          </a:p>
-        </p:txBody>
-      </p:sp>
-    </p:spTree>
-  </p:cSld>
-  <p:clrMapOvr>
-    <a:masterClrMapping/>
-  </p:clrMapOvr>
-</p:sld>
-</file>
-
-<file path=ppt/slides/slide22.xml><?xml version="1.0" encoding="utf-8"?>
-<p:sld xmlns:a="http://schemas.openxmlformats.org/drawingml/2006/main" xmlns:r="http://schemas.openxmlformats.org/officeDocument/2006/relationships" xmlns:p="http://schemas.openxmlformats.org/presentationml/2006/main">
-  <p:cSld name="Slide 22">
-    <p:spTree>
-      <p:nvGrpSpPr>
-        <p:cNvPr id="1" name=""/>
-        <p:cNvGrpSpPr/>
-        <p:nvPr/>
-      </p:nvGrpSpPr>
-      <p:grpSpPr>
-        <a:xfrm>
-          <a:off x="0" y="0"/>
-          <a:ext cx="0" cy="0"/>
-          <a:chOff x="0" y="0"/>
-          <a:chExt cx="0" cy="0"/>
-        </a:xfrm>
-      </p:grpSpPr>
-      <p:sp>
-        <p:nvSpPr>
-          <p:cNvPr id="2" name="Title"/>
-          <p:cNvSpPr txBox="1"/>
-          <p:nvPr/>
-        </p:nvSpPr>
-        <p:spPr>
-          <a:xfrm>
-            <a:off x="457200" y="274320"/>
-            <a:ext cx="8229600" cy="640080"/>
-          </a:xfrm>
-          <a:prstGeom prst="rect">
-            <a:avLst/>
-          </a:prstGeom>
-          <a:noFill/>
-          <a:ln/>
-        </p:spPr>
-        <p:txBody>
-          <a:bodyPr wrap="square" lIns="0" tIns="0" rIns="0" bIns="0" rtlCol="0" anchor="ctr">
-            <a:normAutofit/>
-          </a:bodyPr>
-          <a:lstStyle/>
-          <a:p>
-            <a:pPr indent="0" marL="0">
-              <a:buNone/>
-            </a:pPr>
-            <a:r>
-              <a:rPr lang="en-US" sz="2800" b="1" dirty="0">
-                <a:solidFill>
-                  <a:srgbClr val="4E342E"/>
-                </a:solidFill>
-              </a:rPr>
-              <a:t>Store a number in its own cell</a:t>
-            </a:r>
-            <a:endParaRPr lang="en-US" sz="2800" dirty="0"/>
-          </a:p>
-        </p:txBody>
-      </p:sp>
-      <p:sp>
-        <p:nvSpPr>
-          <p:cNvPr id="3" name="Code panel"/>
-          <p:cNvSpPr/>
-          <p:nvPr/>
-        </p:nvSpPr>
-        <p:spPr>
-          <a:xfrm>
-            <a:off x="457200" y="1051560"/>
-            <a:ext cx="3840480" cy="786765"/>
-          </a:xfrm>
-          <a:prstGeom prst="roundRect">
-            <a:avLst>
-              <a:gd name="adj" fmla="val 6973"/>
-            </a:avLst>
-          </a:prstGeom>
-          <a:solidFill>
-            <a:srgbClr val="2B1D19"/>
-          </a:solidFill>
-          <a:ln w="12700">
-            <a:solidFill>
-              <a:srgbClr val="2B1D19"/>
-            </a:solidFill>
-            <a:prstDash val="solid"/>
-          </a:ln>
-        </p:spPr>
-      </p:sp>
-      <p:sp>
-        <p:nvSpPr>
-          <p:cNvPr id="4" name="Text 2"/>
-          <p:cNvSpPr txBox="1"/>
-          <p:nvPr/>
-        </p:nvSpPr>
-        <p:spPr>
-          <a:xfrm>
-            <a:off x="640080" y="1161288"/>
-            <a:ext cx="3474720" cy="274320"/>
-          </a:xfrm>
-          <a:prstGeom prst="rect">
-            <a:avLst/>
-          </a:prstGeom>
-          <a:noFill/>
-          <a:ln/>
-        </p:spPr>
-        <p:txBody>
-          <a:bodyPr wrap="square" lIns="0" tIns="0" rIns="0" bIns="0" rtlCol="0" anchor="ctr"/>
-          <a:lstStyle/>
-          <a:p>
-            <a:pPr indent="0" marL="0">
-              <a:buNone/>
-            </a:pPr>
-            <a:r>
-              <a:rPr lang="en-US" sz="1200" b="1" dirty="0">
-                <a:solidFill>
-                  <a:srgbClr val="E8A55A"/>
-                </a:solidFill>
-              </a:rPr>
-              <a:t>clean_steam.py — new cell</a:t>
-            </a:r>
-            <a:endParaRPr lang="en-US" sz="1200" dirty="0"/>
-          </a:p>
-        </p:txBody>
-      </p:sp>
-      <p:sp>
-        <p:nvSpPr>
-          <p:cNvPr id="5" name="Code"/>
-          <p:cNvSpPr txBox="1"/>
-          <p:nvPr/>
-        </p:nvSpPr>
-        <p:spPr>
-          <a:xfrm>
-            <a:off x="594360" y="1508760"/>
-            <a:ext cx="3566160" cy="267970"/>
-          </a:xfrm>
-          <a:prstGeom prst="rect">
-            <a:avLst/>
-          </a:prstGeom>
-          <a:noFill/>
-          <a:ln/>
-        </p:spPr>
-        <p:txBody>
-          <a:bodyPr wrap="square" lIns="0" tIns="0" rIns="0" bIns="0" rtlCol="0" anchor="t"/>
-          <a:lstStyle/>
-          <a:p>
-            <a:pPr indent="0" marL="0">
-              <a:lnSpc>
-                <a:spcPts val="1750"/>
-              </a:lnSpc>
-              <a:buNone/>
-            </a:pPr>
-            <a:r>
-              <a:rPr lang="en-US" sz="1400" dirty="0">
-                <a:solidFill>
-                  <a:srgbClr val="9C8A80"/>
-                </a:solidFill>
-                <a:latin typeface="Courier New" pitchFamily="34" charset="0"/>
-                <a:ea typeface="Courier New" pitchFamily="34" charset="-122"/>
-                <a:cs typeface="Courier New" pitchFamily="34" charset="-120"/>
-              </a:rPr>
-              <a:t> 1  </a:t>
-            </a:r>
-            <a:r>
-              <a:rPr lang="en-US" sz="1400" dirty="0">
-                <a:solidFill>
-                  <a:srgbClr val="F7EFE6"/>
-                </a:solidFill>
-                <a:latin typeface="Courier New" pitchFamily="34" charset="0"/>
-                <a:ea typeface="Courier New" pitchFamily="34" charset="-122"/>
-                <a:cs typeface="Courier New" pitchFamily="34" charset="-120"/>
-              </a:rPr>
-              <a:t>sample_size = 5</a:t>
-            </a:r>
-            <a:endParaRPr lang="en-US" sz="1400" dirty="0"/>
-          </a:p>
-        </p:txBody>
-      </p:sp>
-      <p:sp>
-        <p:nvSpPr>
-          <p:cNvPr id="6" name="Text 4"/>
-          <p:cNvSpPr txBox="1"/>
-          <p:nvPr/>
-        </p:nvSpPr>
-        <p:spPr>
-          <a:xfrm>
-            <a:off x="4572000" y="1051560"/>
-            <a:ext cx="4114800" cy="320040"/>
-          </a:xfrm>
-          <a:prstGeom prst="rect">
-            <a:avLst/>
-          </a:prstGeom>
-          <a:noFill/>
-          <a:ln/>
-        </p:spPr>
-        <p:txBody>
-          <a:bodyPr wrap="square" lIns="0" tIns="0" rIns="0" bIns="0" rtlCol="0" anchor="ctr"/>
-          <a:lstStyle/>
-          <a:p>
-            <a:pPr indent="0" marL="0">
-              <a:buNone/>
-            </a:pPr>
-            <a:r>
-              <a:rPr lang="en-US" sz="1400" b="1" dirty="0">
-                <a:solidFill>
-                  <a:srgbClr val="B86E1E"/>
-                </a:solidFill>
-              </a:rPr>
-              <a:t>Why</a:t>
-            </a:r>
-            <a:endParaRPr lang="en-US" sz="1400" dirty="0"/>
-          </a:p>
-        </p:txBody>
-      </p:sp>
-      <p:sp>
-        <p:nvSpPr>
-          <p:cNvPr id="7" name="Text 5"/>
-          <p:cNvSpPr txBox="1"/>
-          <p:nvPr/>
-        </p:nvSpPr>
-        <p:spPr>
-          <a:xfrm>
-            <a:off x="4572000" y="1399032"/>
-            <a:ext cx="4114800" cy="868680"/>
-          </a:xfrm>
-          <a:prstGeom prst="rect">
-            <a:avLst/>
-          </a:prstGeom>
-          <a:noFill/>
-          <a:ln/>
-        </p:spPr>
-        <p:txBody>
-          <a:bodyPr wrap="square" lIns="0" tIns="0" rIns="0" bIns="0" rtlCol="0" anchor="t">
-            <a:normAutofit/>
-          </a:bodyPr>
-          <a:lstStyle/>
-          <a:p>
-            <a:pPr indent="0" marL="0">
-              <a:spcAft>
-                <a:spcPts val="800"/>
-              </a:spcAft>
-              <a:buNone/>
-            </a:pPr>
-            <a:r>
-              <a:rPr lang="en-US" sz="1500" dirty="0">
-                <a:solidFill>
-                  <a:srgbClr val="2B1D19"/>
-                </a:solidFill>
-              </a:rPr>
-              <a:t>​</a:t>
-            </a:r>
-            <a:r>
-              <a:rPr lang="en-US" sz="1500" dirty="0">
-                <a:solidFill>
-                  <a:srgbClr val="2B1D19"/>
-                </a:solidFill>
-              </a:rPr>
-              <a:t>We'll store a number in one cell, then use it in another cell to decide how many rows to show.</a:t>
-            </a:r>
-            <a:endParaRPr lang="en-US" sz="1500" dirty="0"/>
-          </a:p>
-        </p:txBody>
-      </p:sp>
-      <p:sp>
-        <p:nvSpPr>
-          <p:cNvPr id="8" name="Text 6"/>
-          <p:cNvSpPr txBox="1"/>
-          <p:nvPr/>
-        </p:nvSpPr>
-        <p:spPr>
-          <a:xfrm>
-            <a:off x="4572000" y="2450592"/>
-            <a:ext cx="4114800" cy="320040"/>
-          </a:xfrm>
-          <a:prstGeom prst="rect">
-            <a:avLst/>
-          </a:prstGeom>
-          <a:noFill/>
-          <a:ln/>
-        </p:spPr>
-        <p:txBody>
-          <a:bodyPr wrap="square" lIns="0" tIns="0" rIns="0" bIns="0" rtlCol="0" anchor="ctr"/>
-          <a:lstStyle/>
-          <a:p>
-            <a:pPr indent="0" marL="0">
-              <a:buNone/>
-            </a:pPr>
-            <a:r>
-              <a:rPr lang="en-US" sz="1400" b="1" dirty="0">
-                <a:solidFill>
-                  <a:srgbClr val="B86E1E"/>
-                </a:solidFill>
-              </a:rPr>
-              <a:t>What it does</a:t>
-            </a:r>
-            <a:endParaRPr lang="en-US" sz="1400" dirty="0"/>
-          </a:p>
-        </p:txBody>
-      </p:sp>
-      <p:sp>
-        <p:nvSpPr>
-          <p:cNvPr id="9" name="Text 7"/>
-          <p:cNvSpPr txBox="1"/>
-          <p:nvPr/>
-        </p:nvSpPr>
-        <p:spPr>
-          <a:xfrm>
-            <a:off x="4572000" y="2798064"/>
-            <a:ext cx="4114800" cy="1728216"/>
-          </a:xfrm>
-          <a:prstGeom prst="rect">
-            <a:avLst/>
-          </a:prstGeom>
-          <a:noFill/>
-          <a:ln/>
-        </p:spPr>
-        <p:txBody>
-          <a:bodyPr wrap="square" lIns="0" tIns="0" rIns="0" bIns="0" rtlCol="0" anchor="t">
-            <a:normAutofit/>
-          </a:bodyPr>
-          <a:lstStyle/>
-          <a:p>
-            <a:pPr marL="342900" indent="-342900">
-              <a:spcAft>
-                <a:spcPts val="400"/>
-              </a:spcAft>
-              <a:buSzPct val="100000"/>
-              <a:buChar char="•"/>
-            </a:pPr>
-            <a:r>
-              <a:rPr lang="en-US" sz="1400" dirty="0">
-                <a:solidFill>
-                  <a:srgbClr val="2B1D19"/>
-                </a:solidFill>
-              </a:rPr>
-              <a:t>​</a:t>
-            </a:r>
-            <a:r>
-              <a:rPr lang="en-US" sz="1400" b="1" dirty="0">
-                <a:solidFill>
-                  <a:srgbClr val="2B1D19"/>
-                </a:solidFill>
-              </a:rPr>
-              <a:t>line 1</a:t>
-            </a:r>
-            <a:r>
-              <a:rPr lang="en-US" sz="1400" dirty="0">
-                <a:solidFill>
-                  <a:srgbClr val="2B1D19"/>
-                </a:solidFill>
-              </a:rPr>
-              <a:t> → creates a variable called </a:t>
-            </a:r>
-            <a:r>
-              <a:rPr lang="en-US" sz="1200" b="1" dirty="0">
-                <a:solidFill>
-                  <a:srgbClr val="B86E1E"/>
-                </a:solidFill>
-                <a:latin typeface="Courier New" pitchFamily="34" charset="0"/>
-                <a:ea typeface="Courier New" pitchFamily="34" charset="-122"/>
-                <a:cs typeface="Courier New" pitchFamily="34" charset="-120"/>
-              </a:rPr>
-              <a:t>sample_size</a:t>
-            </a:r>
-            <a:r>
-              <a:rPr lang="en-US" sz="1400" dirty="0">
-                <a:solidFill>
-                  <a:srgbClr val="2B1D19"/>
-                </a:solidFill>
-              </a:rPr>
-              <a:t> that holds the number </a:t>
-            </a:r>
-            <a:r>
-              <a:rPr lang="en-US" sz="1200" b="1" dirty="0">
-                <a:solidFill>
-                  <a:srgbClr val="B86E1E"/>
-                </a:solidFill>
-                <a:latin typeface="Courier New" pitchFamily="34" charset="0"/>
-                <a:ea typeface="Courier New" pitchFamily="34" charset="-122"/>
-                <a:cs typeface="Courier New" pitchFamily="34" charset="-120"/>
-              </a:rPr>
-              <a:t>5</a:t>
-            </a:r>
-            <a:endParaRPr lang="en-US" sz="1400" dirty="0"/>
-          </a:p>
-        </p:txBody>
-      </p:sp>
-      <p:sp>
-        <p:nvSpPr>
-          <p:cNvPr id="25" name="Slide Number Placeholder 0"/>
-          <p:cNvSpPr>
-            <a:spLocks noGrp="1"/>
-          </p:cNvSpPr>
-          <p:nvPr>
-            <p:ph type="sldNum" sz="quarter" idx="4294967295"/>
-          </p:nvPr>
-        </p:nvSpPr>
-        <p:spPr>
-          <a:xfrm>
-            <a:off x="365760" y="4709160"/>
-            <a:ext cx="548640" cy="274320"/>
-          </a:xfrm>
-          <a:prstGeom prst="rect">
-            <a:avLst/>
-          </a:prstGeom>
-          <a:extLst>
-            <a:ext uri="{C572A759-6A51-4108-AA02-DFA0A04FC94B}">
-              <ma14:wrappingTextBoxFlag xmlns:ma14="http://schemas.microsoft.com/office/mac/drawingml/2011/main" val="0"/>
-            </a:ext>
-          </a:extLst>
-        </p:spPr>
-        <p:txBody>
-          <a:bodyPr/>
-          <a:lstStyle>
-            <a:lvl1pPr>
-              <a:defRPr sz="1000">
-                <a:solidFill>
-                  <a:srgbClr val="6B6B6B"/>
-                </a:solidFill>
-              </a:defRPr>
-            </a:lvl1pPr>
-          </a:lstStyle>
-          <a:p>
-            <a:pPr algn="l"/>
-            <a:fld id="{F7021451-1387-4CA6-816F-3879F97B5CBC}" type="slidenum">
-              <a:rPr b="0" lang="en-US"/>
               <a:t>22</a:t>
             </a:fld>
             <a:endParaRPr lang="en-US"/>
@@ -9361,14 +9911,14 @@
       </p:grpSpPr>
       <p:sp>
         <p:nvSpPr>
-          <p:cNvPr id="2" name="Title"/>
+          <p:cNvPr id="2" name="Text 0"/>
           <p:cNvSpPr txBox="1"/>
           <p:nvPr/>
         </p:nvSpPr>
         <p:spPr>
           <a:xfrm>
-            <a:off x="457200" y="274320"/>
-            <a:ext cx="8229600" cy="640080"/>
+            <a:off x="457200" y="1554480"/>
+            <a:ext cx="7498080" cy="914400"/>
           </a:xfrm>
           <a:prstGeom prst="rect">
             <a:avLst/>
@@ -9386,54 +9936,27 @@
               <a:buNone/>
             </a:pPr>
             <a:r>
-              <a:rPr lang="en-US" sz="2800" b="1" dirty="0">
-                <a:solidFill>
-                  <a:srgbClr val="4E342E"/>
-                </a:solidFill>
-              </a:rPr>
-              <a:t>Use it to show the first rows</a:t>
-            </a:r>
-            <a:endParaRPr lang="en-US" sz="2800" dirty="0"/>
-          </a:p>
-        </p:txBody>
-      </p:sp>
-      <p:sp>
-        <p:nvSpPr>
-          <p:cNvPr id="3" name="Code panel"/>
-          <p:cNvSpPr/>
-          <p:nvPr/>
-        </p:nvSpPr>
-        <p:spPr>
-          <a:xfrm>
-            <a:off x="457200" y="1051560"/>
-            <a:ext cx="3840480" cy="786765"/>
-          </a:xfrm>
-          <a:prstGeom prst="roundRect">
-            <a:avLst>
-              <a:gd name="adj" fmla="val 6973"/>
-            </a:avLst>
-          </a:prstGeom>
-          <a:solidFill>
-            <a:srgbClr val="2B1D19"/>
-          </a:solidFill>
-          <a:ln w="12700">
-            <a:solidFill>
-              <a:srgbClr val="2B1D19"/>
-            </a:solidFill>
-            <a:prstDash val="solid"/>
-          </a:ln>
-        </p:spPr>
-      </p:sp>
-      <p:sp>
-        <p:nvSpPr>
-          <p:cNvPr id="4" name="Text 2"/>
+              <a:rPr lang="en-US" sz="3600" b="1" dirty="0">
+                <a:solidFill>
+                  <a:srgbClr val="FFFFFF"/>
+                </a:solidFill>
+              </a:rPr>
+              <a:t>Reactive cells</a:t>
+            </a:r>
+            <a:endParaRPr lang="en-US" sz="3600" dirty="0"/>
+          </a:p>
+        </p:txBody>
+      </p:sp>
+      <p:sp>
+        <p:nvSpPr>
+          <p:cNvPr id="3" name="Text 1"/>
           <p:cNvSpPr txBox="1"/>
           <p:nvPr/>
         </p:nvSpPr>
         <p:spPr>
           <a:xfrm>
-            <a:off x="640080" y="1161288"/>
-            <a:ext cx="3474720" cy="274320"/>
+            <a:off x="457200" y="2514600"/>
+            <a:ext cx="7132320" cy="1097280"/>
           </a:xfrm>
           <a:prstGeom prst="rect">
             <a:avLst/>
@@ -9442,98 +9965,7 @@
           <a:ln/>
         </p:spPr>
         <p:txBody>
-          <a:bodyPr wrap="square" lIns="0" tIns="0" rIns="0" bIns="0" rtlCol="0" anchor="ctr"/>
-          <a:lstStyle/>
-          <a:p>
-            <a:pPr indent="0" marL="0">
-              <a:buNone/>
-            </a:pPr>
-            <a:r>
-              <a:rPr lang="en-US" sz="1200" b="1" dirty="0">
-                <a:solidFill>
-                  <a:srgbClr val="E8A55A"/>
-                </a:solidFill>
-              </a:rPr>
-              <a:t>clean_steam.py — new cell</a:t>
-            </a:r>
-            <a:endParaRPr lang="en-US" sz="1200" dirty="0"/>
-          </a:p>
-        </p:txBody>
-      </p:sp>
-      <p:sp>
-        <p:nvSpPr>
-          <p:cNvPr id="5" name="Code"/>
-          <p:cNvSpPr txBox="1"/>
-          <p:nvPr/>
-        </p:nvSpPr>
-        <p:spPr>
-          <a:xfrm>
-            <a:off x="594360" y="1508760"/>
-            <a:ext cx="3566160" cy="267970"/>
-          </a:xfrm>
-          <a:prstGeom prst="rect">
-            <a:avLst/>
-          </a:prstGeom>
-          <a:noFill/>
-          <a:ln/>
-        </p:spPr>
-        <p:txBody>
           <a:bodyPr wrap="square" lIns="0" tIns="0" rIns="0" bIns="0" rtlCol="0" anchor="t"/>
-          <a:lstStyle/>
-          <a:p>
-            <a:pPr indent="0" marL="0">
-              <a:lnSpc>
-                <a:spcPts val="1750"/>
-              </a:lnSpc>
-              <a:buNone/>
-            </a:pPr>
-            <a:r>
-              <a:rPr lang="en-US" sz="1400" dirty="0">
-                <a:solidFill>
-                  <a:srgbClr val="9C8A80"/>
-                </a:solidFill>
-                <a:latin typeface="Courier New" pitchFamily="34" charset="0"/>
-                <a:ea typeface="Courier New" pitchFamily="34" charset="-122"/>
-                <a:cs typeface="Courier New" pitchFamily="34" charset="-120"/>
-              </a:rPr>
-              <a:t> 1  </a:t>
-            </a:r>
-            <a:r>
-              <a:rPr lang="en-US" sz="1400" dirty="0">
-                <a:solidFill>
-                  <a:srgbClr val="F7EFE6"/>
-                </a:solidFill>
-                <a:latin typeface="Courier New" pitchFamily="34" charset="0"/>
-                <a:ea typeface="Courier New" pitchFamily="34" charset="-122"/>
-                <a:cs typeface="Courier New" pitchFamily="34" charset="-120"/>
-              </a:rPr>
-              <a:t>games.head(sample_size)</a:t>
-            </a:r>
-            <a:endParaRPr lang="en-US" sz="1400" dirty="0"/>
-          </a:p>
-        </p:txBody>
-      </p:sp>
-      <p:sp>
-        <p:nvSpPr>
-          <p:cNvPr id="6" name="Text 4"/>
-          <p:cNvSpPr txBox="1"/>
-          <p:nvPr/>
-        </p:nvSpPr>
-        <p:spPr>
-          <a:xfrm>
-            <a:off x="457200" y="1929765"/>
-            <a:ext cx="3840480" cy="384048"/>
-          </a:xfrm>
-          <a:prstGeom prst="rect">
-            <a:avLst/>
-          </a:prstGeom>
-          <a:noFill/>
-          <a:ln/>
-        </p:spPr>
-        <p:txBody>
-          <a:bodyPr wrap="square" lIns="0" tIns="0" rIns="0" bIns="0" rtlCol="0" anchor="ctr">
-            <a:normAutofit/>
-          </a:bodyPr>
           <a:lstStyle/>
           <a:p>
             <a:pPr indent="0" marL="0">
@@ -9543,349 +9975,22 @@
               <a:buNone/>
             </a:pPr>
             <a:r>
-              <a:rPr lang="en-US" sz="1500" dirty="0">
-                <a:solidFill>
-                  <a:srgbClr val="2B1D19"/>
+              <a:rPr lang="en-US" sz="1800" dirty="0">
+                <a:solidFill>
+                  <a:srgbClr val="F7EFE6"/>
                 </a:solidFill>
               </a:rPr>
               <a:t>​</a:t>
             </a:r>
             <a:r>
-              <a:rPr lang="en-US" sz="1500" dirty="0">
-                <a:solidFill>
-                  <a:srgbClr val="2B1D19"/>
-                </a:solidFill>
-              </a:rPr>
-              <a:t>The </a:t>
-            </a:r>
-            <a:r>
-              <a:rPr lang="en-US" sz="1300" b="1" dirty="0">
-                <a:solidFill>
-                  <a:srgbClr val="B86E1E"/>
-                </a:solidFill>
-                <a:latin typeface="Courier New" pitchFamily="34" charset="0"/>
-                <a:ea typeface="Courier New" pitchFamily="34" charset="-122"/>
-                <a:cs typeface="Courier New" pitchFamily="34" charset="-120"/>
-              </a:rPr>
-              <a:t>head</a:t>
-            </a:r>
-            <a:r>
-              <a:rPr lang="en-US" sz="1500" dirty="0">
-                <a:solidFill>
-                  <a:srgbClr val="2B1D19"/>
-                </a:solidFill>
-              </a:rPr>
-              <a:t> cell re-runs by itself and shows </a:t>
-            </a:r>
-            <a:r>
-              <a:rPr lang="en-US" sz="1500" b="1" dirty="0">
-                <a:solidFill>
-                  <a:srgbClr val="2B1D19"/>
-                </a:solidFill>
-              </a:rPr>
-              <a:t>ten</a:t>
-            </a:r>
-            <a:r>
-              <a:rPr lang="en-US" sz="1500" dirty="0">
-                <a:solidFill>
-                  <a:srgbClr val="2B1D19"/>
-                </a:solidFill>
-              </a:rPr>
-              <a:t> rows.</a:t>
-            </a:r>
-            <a:endParaRPr lang="en-US" sz="1500" dirty="0"/>
-          </a:p>
-        </p:txBody>
-      </p:sp>
-      <p:sp>
-        <p:nvSpPr>
-          <p:cNvPr id="7" name="primm box"/>
-          <p:cNvSpPr/>
-          <p:nvPr/>
-        </p:nvSpPr>
-        <p:spPr>
-          <a:xfrm>
-            <a:off x="457200" y="2432685"/>
-            <a:ext cx="3840480" cy="1285240"/>
-          </a:xfrm>
-          <a:prstGeom prst="roundRect">
-            <a:avLst>
-              <a:gd name="adj" fmla="val 5692"/>
-            </a:avLst>
-          </a:prstGeom>
-          <a:solidFill>
-            <a:srgbClr val="E6F2E6"/>
-          </a:solidFill>
-          <a:ln w="12700">
-            <a:solidFill>
-              <a:srgbClr val="E6F2E6"/>
-            </a:solidFill>
-            <a:prstDash val="solid"/>
-          </a:ln>
-        </p:spPr>
-      </p:sp>
-      <p:sp>
-        <p:nvSpPr>
-          <p:cNvPr id="8" name="Text 6"/>
-          <p:cNvSpPr txBox="1"/>
-          <p:nvPr/>
-        </p:nvSpPr>
-        <p:spPr>
-          <a:xfrm>
-            <a:off x="685800" y="2569845"/>
-            <a:ext cx="3383280" cy="365760"/>
-          </a:xfrm>
-          <a:prstGeom prst="rect">
-            <a:avLst/>
-          </a:prstGeom>
-          <a:noFill/>
-          <a:ln/>
-        </p:spPr>
-        <p:txBody>
-          <a:bodyPr wrap="square" lIns="0" tIns="0" rIns="0" bIns="0" rtlCol="0" anchor="ctr"/>
-          <a:lstStyle/>
-          <a:p>
-            <a:pPr indent="0" marL="0">
-              <a:buNone/>
-            </a:pPr>
-            <a:r>
-              <a:rPr lang="en-US" sz="1600" b="1" dirty="0">
-                <a:solidFill>
-                  <a:srgbClr val="2E6B30"/>
-                </a:solidFill>
-              </a:rPr>
-              <a:t>Predict</a:t>
-            </a:r>
-            <a:endParaRPr lang="en-US" sz="1600" dirty="0"/>
-          </a:p>
-        </p:txBody>
-      </p:sp>
-      <p:sp>
-        <p:nvSpPr>
-          <p:cNvPr id="9" name="Text 7"/>
-          <p:cNvSpPr txBox="1"/>
-          <p:nvPr/>
-        </p:nvSpPr>
-        <p:spPr>
-          <a:xfrm>
-            <a:off x="685800" y="2935605"/>
-            <a:ext cx="3383280" cy="599440"/>
-          </a:xfrm>
-          <a:prstGeom prst="rect">
-            <a:avLst/>
-          </a:prstGeom>
-          <a:noFill/>
-          <a:ln/>
-        </p:spPr>
-        <p:txBody>
-          <a:bodyPr wrap="square" lIns="0" tIns="0" rIns="0" bIns="0" rtlCol="0" anchor="t">
-            <a:normAutofit/>
-          </a:bodyPr>
-          <a:lstStyle/>
-          <a:p>
-            <a:pPr indent="0" marL="0">
-              <a:spcAft>
-                <a:spcPts val="800"/>
-              </a:spcAft>
-              <a:buNone/>
-            </a:pPr>
-            <a:r>
-              <a:rPr lang="en-US" sz="1500" dirty="0">
-                <a:solidFill>
-                  <a:srgbClr val="2B1D19"/>
-                </a:solidFill>
-              </a:rPr>
-              <a:t>​</a:t>
-            </a:r>
-            <a:r>
-              <a:rPr lang="en-US" sz="1500" dirty="0">
-                <a:solidFill>
-                  <a:srgbClr val="2B1D19"/>
-                </a:solidFill>
-              </a:rPr>
-              <a:t>Change </a:t>
-            </a:r>
-            <a:r>
-              <a:rPr lang="en-US" sz="1300" b="1" dirty="0">
-                <a:solidFill>
-                  <a:srgbClr val="B86E1E"/>
-                </a:solidFill>
-                <a:latin typeface="Courier New" pitchFamily="34" charset="0"/>
-                <a:ea typeface="Courier New" pitchFamily="34" charset="-122"/>
-                <a:cs typeface="Courier New" pitchFamily="34" charset="-120"/>
-              </a:rPr>
-              <a:t>sample_size</a:t>
-            </a:r>
-            <a:r>
-              <a:rPr lang="en-US" sz="1500" dirty="0">
-                <a:solidFill>
-                  <a:srgbClr val="2B1D19"/>
-                </a:solidFill>
-              </a:rPr>
-              <a:t> to </a:t>
-            </a:r>
-            <a:r>
-              <a:rPr lang="en-US" sz="1300" b="1" dirty="0">
-                <a:solidFill>
-                  <a:srgbClr val="B86E1E"/>
-                </a:solidFill>
-                <a:latin typeface="Courier New" pitchFamily="34" charset="0"/>
-                <a:ea typeface="Courier New" pitchFamily="34" charset="-122"/>
-                <a:cs typeface="Courier New" pitchFamily="34" charset="-120"/>
-              </a:rPr>
-              <a:t>10</a:t>
-            </a:r>
-            <a:r>
-              <a:rPr lang="en-US" sz="1500" dirty="0">
-                <a:solidFill>
-                  <a:srgbClr val="2B1D19"/>
-                </a:solidFill>
-              </a:rPr>
-              <a:t> and run that cell. What will happen to this cell?</a:t>
-            </a:r>
-            <a:endParaRPr lang="en-US" sz="1500" dirty="0"/>
-          </a:p>
-        </p:txBody>
-      </p:sp>
-      <p:sp>
-        <p:nvSpPr>
-          <p:cNvPr id="10" name="Text 8"/>
-          <p:cNvSpPr txBox="1"/>
-          <p:nvPr/>
-        </p:nvSpPr>
-        <p:spPr>
-          <a:xfrm>
-            <a:off x="4572000" y="1051560"/>
-            <a:ext cx="4114800" cy="320040"/>
-          </a:xfrm>
-          <a:prstGeom prst="rect">
-            <a:avLst/>
-          </a:prstGeom>
-          <a:noFill/>
-          <a:ln/>
-        </p:spPr>
-        <p:txBody>
-          <a:bodyPr wrap="square" lIns="0" tIns="0" rIns="0" bIns="0" rtlCol="0" anchor="ctr"/>
-          <a:lstStyle/>
-          <a:p>
-            <a:pPr indent="0" marL="0">
-              <a:buNone/>
-            </a:pPr>
-            <a:r>
-              <a:rPr lang="en-US" sz="1400" b="1" dirty="0">
-                <a:solidFill>
-                  <a:srgbClr val="B86E1E"/>
-                </a:solidFill>
-              </a:rPr>
-              <a:t>Why</a:t>
-            </a:r>
-            <a:endParaRPr lang="en-US" sz="1400" dirty="0"/>
-          </a:p>
-        </p:txBody>
-      </p:sp>
-      <p:sp>
-        <p:nvSpPr>
-          <p:cNvPr id="11" name="Text 9"/>
-          <p:cNvSpPr txBox="1"/>
-          <p:nvPr/>
-        </p:nvSpPr>
-        <p:spPr>
-          <a:xfrm>
-            <a:off x="4572000" y="1399032"/>
-            <a:ext cx="4114800" cy="3017520"/>
-          </a:xfrm>
-          <a:prstGeom prst="rect">
-            <a:avLst/>
-          </a:prstGeom>
-          <a:noFill/>
-          <a:ln/>
-        </p:spPr>
-        <p:txBody>
-          <a:bodyPr wrap="square" lIns="0" tIns="0" rIns="0" bIns="0" rtlCol="0" anchor="t">
-            <a:normAutofit/>
-          </a:bodyPr>
-          <a:lstStyle/>
-          <a:p>
-            <a:pPr indent="0" marL="0">
-              <a:spcAft>
-                <a:spcPts val="800"/>
-              </a:spcAft>
-              <a:buNone/>
-            </a:pPr>
-            <a:r>
-              <a:rPr lang="en-US" sz="1500" dirty="0">
-                <a:solidFill>
-                  <a:srgbClr val="2B1D19"/>
-                </a:solidFill>
-              </a:rPr>
-              <a:t>​</a:t>
-            </a:r>
-            <a:r>
-              <a:rPr lang="en-US" sz="1500" dirty="0">
-                <a:solidFill>
-                  <a:srgbClr val="2B1D19"/>
-                </a:solidFill>
-              </a:rPr>
-              <a:t>The </a:t>
-            </a:r>
-            <a:r>
-              <a:rPr lang="en-US" sz="1300" b="1" dirty="0">
-                <a:solidFill>
-                  <a:srgbClr val="B86E1E"/>
-                </a:solidFill>
-                <a:latin typeface="Courier New" pitchFamily="34" charset="0"/>
-                <a:ea typeface="Courier New" pitchFamily="34" charset="-122"/>
-                <a:cs typeface="Courier New" pitchFamily="34" charset="-120"/>
-              </a:rPr>
-              <a:t>head</a:t>
-            </a:r>
-            <a:r>
-              <a:rPr lang="en-US" sz="1500" dirty="0">
-                <a:solidFill>
-                  <a:srgbClr val="2B1D19"/>
-                </a:solidFill>
-              </a:rPr>
-              <a:t> method shows the first few rows of a DataFrame. Here it shows the first </a:t>
-            </a:r>
-            <a:r>
-              <a:rPr lang="en-US" sz="1300" b="1" dirty="0">
-                <a:solidFill>
-                  <a:srgbClr val="B86E1E"/>
-                </a:solidFill>
-                <a:latin typeface="Courier New" pitchFamily="34" charset="0"/>
-                <a:ea typeface="Courier New" pitchFamily="34" charset="-122"/>
-                <a:cs typeface="Courier New" pitchFamily="34" charset="-120"/>
-              </a:rPr>
-              <a:t>sample_size</a:t>
-            </a:r>
-            <a:r>
-              <a:rPr lang="en-US" sz="1500" dirty="0">
-                <a:solidFill>
-                  <a:srgbClr val="2B1D19"/>
-                </a:solidFill>
-              </a:rPr>
-              <a:t> rows of </a:t>
-            </a:r>
-            <a:r>
-              <a:rPr lang="en-US" sz="1300" b="1" dirty="0">
-                <a:solidFill>
-                  <a:srgbClr val="B86E1E"/>
-                </a:solidFill>
-                <a:latin typeface="Courier New" pitchFamily="34" charset="0"/>
-                <a:ea typeface="Courier New" pitchFamily="34" charset="-122"/>
-                <a:cs typeface="Courier New" pitchFamily="34" charset="-120"/>
-              </a:rPr>
-              <a:t>games</a:t>
-            </a:r>
-            <a:r>
-              <a:rPr lang="en-US" sz="1500" dirty="0">
-                <a:solidFill>
-                  <a:srgbClr val="2B1D19"/>
-                </a:solidFill>
-              </a:rPr>
-              <a:t>.</a:t>
-            </a:r>
-            <a:endParaRPr lang="en-US" sz="1500" dirty="0"/>
+              <a:rPr lang="en-US" sz="1800" dirty="0">
+                <a:solidFill>
+                  <a:srgbClr val="F7EFE6"/>
+                </a:solidFill>
+              </a:rPr>
+              <a:t>When we change a cell, marimo automatically re-runs every cell that uses its variables.</a:t>
+            </a:r>
+            <a:endParaRPr lang="en-US" sz="1800" dirty="0"/>
           </a:p>
         </p:txBody>
       </p:sp>
@@ -9919,7 +10024,7 @@
             <a:lvl1pPr>
               <a:defRPr sz="1000">
                 <a:solidFill>
-                  <a:srgbClr val="6B6B6B"/>
+                  <a:srgbClr val="F7EFE6"/>
                 </a:solidFill>
               </a:defRPr>
             </a:lvl1pPr>
@@ -9991,58 +10096,34 @@
                   <a:srgbClr val="4E342E"/>
                 </a:solidFill>
               </a:rPr>
-              <a:t>One variable, one cell</a:t>
+              <a:t>Store a number in its own cell</a:t>
             </a:r>
             <a:endParaRPr lang="en-US" sz="2800" dirty="0"/>
           </a:p>
         </p:txBody>
       </p:sp>
-      <p:pic>
-        <p:nvPicPr>
-          <p:cNvPr id="3" name="Image 0" descr="marimo showing CELL NOT RUN under the cell sample_size = 10, with the message This cell redefines variables from other cells, 'sample_size' was also defined by cell-4, and a Fix: Wrap in a function button">    </p:cNvPr>
-          <p:cNvPicPr>
-            <a:picLocks noChangeAspect="1"/>
-          </p:cNvPicPr>
-          <p:nvPr/>
-        </p:nvPicPr>
-        <p:blipFill>
-          <a:blip r:embed="rId1"/>
-          <a:stretch>
-            <a:fillRect/>
-          </a:stretch>
-        </p:blipFill>
-        <p:spPr>
-          <a:xfrm>
-            <a:off x="457200" y="2078553"/>
-            <a:ext cx="5394960" cy="1375014"/>
-          </a:xfrm>
-          <a:prstGeom prst="rect">
-            <a:avLst/>
-          </a:prstGeom>
-        </p:spPr>
-      </p:pic>
-      <p:sp>
-        <p:nvSpPr>
-          <p:cNvPr id="4" name="warning box"/>
+      <p:sp>
+        <p:nvSpPr>
+          <p:cNvPr id="3" name="Code panel"/>
           <p:cNvSpPr/>
           <p:nvPr/>
         </p:nvSpPr>
         <p:spPr>
           <a:xfrm>
-            <a:off x="6035040" y="1051560"/>
-            <a:ext cx="2651760" cy="3429000"/>
+            <a:off x="457200" y="1051560"/>
+            <a:ext cx="3840480" cy="786765"/>
           </a:xfrm>
           <a:prstGeom prst="roundRect">
             <a:avLst>
-              <a:gd name="adj" fmla="val 2759"/>
+              <a:gd name="adj" fmla="val 6973"/>
             </a:avLst>
           </a:prstGeom>
           <a:solidFill>
-            <a:srgbClr val="FDE4EF"/>
+            <a:srgbClr val="2B1D19"/>
           </a:solidFill>
           <a:ln w="12700">
             <a:solidFill>
-              <a:srgbClr val="FDE4EF"/>
+              <a:srgbClr val="2B1D19"/>
             </a:solidFill>
             <a:prstDash val="solid"/>
           </a:ln>
@@ -10050,14 +10131,14 @@
       </p:sp>
       <p:sp>
         <p:nvSpPr>
-          <p:cNvPr id="5" name="Text 2"/>
+          <p:cNvPr id="4" name="Text 2"/>
           <p:cNvSpPr txBox="1"/>
           <p:nvPr/>
         </p:nvSpPr>
         <p:spPr>
           <a:xfrm>
-            <a:off x="6263640" y="1188720"/>
-            <a:ext cx="2194560" cy="365760"/>
+            <a:off x="640080" y="1161288"/>
+            <a:ext cx="3474720" cy="274320"/>
           </a:xfrm>
           <a:prstGeom prst="rect">
             <a:avLst/>
@@ -10073,27 +10154,116 @@
               <a:buNone/>
             </a:pPr>
             <a:r>
-              <a:rPr lang="en-US" sz="1600" b="1" dirty="0">
-                <a:solidFill>
-                  <a:srgbClr val="B0185E"/>
-                </a:solidFill>
-              </a:rPr>
-              <a:t>Reading the error</a:t>
-            </a:r>
-            <a:endParaRPr lang="en-US" sz="1600" dirty="0"/>
-          </a:p>
-        </p:txBody>
-      </p:sp>
-      <p:sp>
-        <p:nvSpPr>
-          <p:cNvPr id="6" name="Text 3"/>
+              <a:rPr lang="en-US" sz="1200" b="1" dirty="0">
+                <a:solidFill>
+                  <a:srgbClr val="E8A55A"/>
+                </a:solidFill>
+              </a:rPr>
+              <a:t>clean_steam.py — new cell</a:t>
+            </a:r>
+            <a:endParaRPr lang="en-US" sz="1200" dirty="0"/>
+          </a:p>
+        </p:txBody>
+      </p:sp>
+      <p:sp>
+        <p:nvSpPr>
+          <p:cNvPr id="5" name="Code"/>
           <p:cNvSpPr txBox="1"/>
           <p:nvPr/>
         </p:nvSpPr>
         <p:spPr>
           <a:xfrm>
-            <a:off x="6263640" y="1600200"/>
-            <a:ext cx="2194560" cy="2743200"/>
+            <a:off x="594360" y="1508760"/>
+            <a:ext cx="3566160" cy="267970"/>
+          </a:xfrm>
+          <a:prstGeom prst="rect">
+            <a:avLst/>
+          </a:prstGeom>
+          <a:noFill/>
+          <a:ln/>
+        </p:spPr>
+        <p:txBody>
+          <a:bodyPr wrap="square" lIns="0" tIns="0" rIns="0" bIns="0" rtlCol="0" anchor="t"/>
+          <a:lstStyle/>
+          <a:p>
+            <a:pPr indent="0" marL="0">
+              <a:lnSpc>
+                <a:spcPts val="1750"/>
+              </a:lnSpc>
+              <a:buNone/>
+            </a:pPr>
+            <a:r>
+              <a:rPr lang="en-US" sz="1400" dirty="0">
+                <a:solidFill>
+                  <a:srgbClr val="9C8A80"/>
+                </a:solidFill>
+                <a:latin typeface="Courier New" pitchFamily="34" charset="0"/>
+                <a:ea typeface="Courier New" pitchFamily="34" charset="-122"/>
+                <a:cs typeface="Courier New" pitchFamily="34" charset="-120"/>
+              </a:rPr>
+              <a:t> 1  </a:t>
+            </a:r>
+            <a:r>
+              <a:rPr lang="en-US" sz="1400" dirty="0">
+                <a:solidFill>
+                  <a:srgbClr val="F7EFE6"/>
+                </a:solidFill>
+                <a:latin typeface="Courier New" pitchFamily="34" charset="0"/>
+                <a:ea typeface="Courier New" pitchFamily="34" charset="-122"/>
+                <a:cs typeface="Courier New" pitchFamily="34" charset="-120"/>
+              </a:rPr>
+              <a:t>sample_size = 5</a:t>
+            </a:r>
+            <a:endParaRPr lang="en-US" sz="1400" dirty="0"/>
+          </a:p>
+        </p:txBody>
+      </p:sp>
+      <p:sp>
+        <p:nvSpPr>
+          <p:cNvPr id="6" name="Text 4"/>
+          <p:cNvSpPr txBox="1"/>
+          <p:nvPr/>
+        </p:nvSpPr>
+        <p:spPr>
+          <a:xfrm>
+            <a:off x="4572000" y="1051560"/>
+            <a:ext cx="4114800" cy="320040"/>
+          </a:xfrm>
+          <a:prstGeom prst="rect">
+            <a:avLst/>
+          </a:prstGeom>
+          <a:noFill/>
+          <a:ln/>
+        </p:spPr>
+        <p:txBody>
+          <a:bodyPr wrap="square" lIns="0" tIns="0" rIns="0" bIns="0" rtlCol="0" anchor="ctr"/>
+          <a:lstStyle/>
+          <a:p>
+            <a:pPr indent="0" marL="0">
+              <a:buNone/>
+            </a:pPr>
+            <a:r>
+              <a:rPr lang="en-US" sz="1400" b="1" dirty="0">
+                <a:solidFill>
+                  <a:srgbClr val="B86E1E"/>
+                </a:solidFill>
+              </a:rPr>
+              <a:t>Why</a:t>
+            </a:r>
+            <a:endParaRPr lang="en-US" sz="1400" dirty="0"/>
+          </a:p>
+        </p:txBody>
+      </p:sp>
+      <p:sp>
+        <p:nvSpPr>
+          <p:cNvPr id="7" name="Text 5"/>
+          <p:cNvSpPr txBox="1"/>
+          <p:nvPr/>
+        </p:nvSpPr>
+        <p:spPr>
+          <a:xfrm>
+            <a:off x="4572000" y="1399032"/>
+            <a:ext cx="4114800" cy="868680"/>
           </a:xfrm>
           <a:prstGeom prst="rect">
             <a:avLst/>
@@ -10107,15 +10277,100 @@
           </a:bodyPr>
           <a:lstStyle/>
           <a:p>
+            <a:pPr indent="0" marL="0">
+              <a:spcAft>
+                <a:spcPts val="800"/>
+              </a:spcAft>
+              <a:buNone/>
+            </a:pPr>
+            <a:r>
+              <a:rPr lang="en-US" sz="1500" dirty="0">
+                <a:solidFill>
+                  <a:srgbClr val="2B1D19"/>
+                </a:solidFill>
+              </a:rPr>
+              <a:t>​</a:t>
+            </a:r>
+            <a:r>
+              <a:rPr lang="en-US" sz="1500" dirty="0">
+                <a:solidFill>
+                  <a:srgbClr val="2B1D19"/>
+                </a:solidFill>
+              </a:rPr>
+              <a:t>We'll store a number in one cell, then use it in another cell to decide how many rows to show.</a:t>
+            </a:r>
+            <a:endParaRPr lang="en-US" sz="1500" dirty="0"/>
+          </a:p>
+        </p:txBody>
+      </p:sp>
+      <p:sp>
+        <p:nvSpPr>
+          <p:cNvPr id="8" name="Text 6"/>
+          <p:cNvSpPr txBox="1"/>
+          <p:nvPr/>
+        </p:nvSpPr>
+        <p:spPr>
+          <a:xfrm>
+            <a:off x="4572000" y="2450592"/>
+            <a:ext cx="4114800" cy="320040"/>
+          </a:xfrm>
+          <a:prstGeom prst="rect">
+            <a:avLst/>
+          </a:prstGeom>
+          <a:noFill/>
+          <a:ln/>
+        </p:spPr>
+        <p:txBody>
+          <a:bodyPr wrap="square" lIns="0" tIns="0" rIns="0" bIns="0" rtlCol="0" anchor="ctr"/>
+          <a:lstStyle/>
+          <a:p>
+            <a:pPr indent="0" marL="0">
+              <a:buNone/>
+            </a:pPr>
+            <a:r>
+              <a:rPr lang="en-US" sz="1400" b="1" dirty="0">
+                <a:solidFill>
+                  <a:srgbClr val="B86E1E"/>
+                </a:solidFill>
+              </a:rPr>
+              <a:t>What it does</a:t>
+            </a:r>
+            <a:endParaRPr lang="en-US" sz="1400" dirty="0"/>
+          </a:p>
+        </p:txBody>
+      </p:sp>
+      <p:sp>
+        <p:nvSpPr>
+          <p:cNvPr id="9" name="Text 7"/>
+          <p:cNvSpPr txBox="1"/>
+          <p:nvPr/>
+        </p:nvSpPr>
+        <p:spPr>
+          <a:xfrm>
+            <a:off x="4572000" y="2798064"/>
+            <a:ext cx="4114800" cy="1728216"/>
+          </a:xfrm>
+          <a:prstGeom prst="rect">
+            <a:avLst/>
+          </a:prstGeom>
+          <a:noFill/>
+          <a:ln/>
+        </p:spPr>
+        <p:txBody>
+          <a:bodyPr wrap="square" lIns="0" tIns="0" rIns="0" bIns="0" rtlCol="0" anchor="t">
+            <a:normAutofit/>
+          </a:bodyPr>
+          <a:lstStyle/>
+          <a:p>
             <a:pPr marL="342900" indent="-342900">
               <a:spcAft>
-                <a:spcPts val="600"/>
+                <a:spcPts val="400"/>
               </a:spcAft>
               <a:buSzPct val="100000"/>
               <a:buChar char="•"/>
             </a:pPr>
             <a:r>
-              <a:rPr lang="en-US" sz="1300" dirty="0">
+              <a:rPr lang="en-US" sz="1400" dirty="0">
                 <a:solidFill>
                   <a:srgbClr val="2B1D19"/>
                 </a:solidFill>
@@ -10123,124 +10378,52 @@
               <a:t>​</a:t>
             </a:r>
             <a:r>
-              <a:rPr lang="en-US" sz="1300" b="1" dirty="0">
-                <a:solidFill>
-                  <a:srgbClr val="2B1D19"/>
-                </a:solidFill>
-              </a:rPr>
-              <a:t>CELL NOT RUN</a:t>
-            </a:r>
-            <a:r>
-              <a:rPr lang="en-US" sz="1300" dirty="0">
-                <a:solidFill>
-                  <a:srgbClr val="2B1D19"/>
-                </a:solidFill>
-              </a:rPr>
-              <a:t> → marimo has refused to run this cell</a:t>
-            </a:r>
-            <a:endParaRPr lang="en-US" sz="1300" dirty="0"/>
-          </a:p>
-          <a:p>
-            <a:pPr marL="342900" indent="-342900">
-              <a:spcAft>
-                <a:spcPts val="600"/>
-              </a:spcAft>
-              <a:buSzPct val="100000"/>
-              <a:buChar char="•"/>
-            </a:pPr>
-            <a:r>
-              <a:rPr lang="en-US" sz="1300" dirty="0">
-                <a:solidFill>
-                  <a:srgbClr val="2B1D19"/>
-                </a:solidFill>
-              </a:rPr>
-              <a:t>​</a:t>
-            </a:r>
-            <a:r>
-              <a:rPr lang="en-US" sz="1300" b="1" dirty="0">
-                <a:solidFill>
-                  <a:srgbClr val="2B1D19"/>
-                </a:solidFill>
-              </a:rPr>
-              <a:t>This cell redefines variables from other cells.</a:t>
-            </a:r>
-            <a:r>
-              <a:rPr lang="en-US" sz="1300" dirty="0">
-                <a:solidFill>
-                  <a:srgbClr val="2B1D19"/>
-                </a:solidFill>
-              </a:rPr>
-              <a:t> → it creates a variable another cell already creates</a:t>
-            </a:r>
-            <a:endParaRPr lang="en-US" sz="1300" dirty="0"/>
-          </a:p>
-          <a:p>
-            <a:pPr marL="342900" indent="-342900">
-              <a:spcAft>
-                <a:spcPts val="600"/>
-              </a:spcAft>
-              <a:buSzPct val="100000"/>
-              <a:buChar char="•"/>
-            </a:pPr>
-            <a:r>
-              <a:rPr lang="en-US" sz="1300" dirty="0">
-                <a:solidFill>
-                  <a:srgbClr val="2B1D19"/>
-                </a:solidFill>
-              </a:rPr>
-              <a:t>​</a:t>
-            </a:r>
-            <a:r>
-              <a:rPr lang="en-US" sz="1300" b="1" dirty="0">
-                <a:solidFill>
-                  <a:srgbClr val="2B1D19"/>
-                </a:solidFill>
-              </a:rPr>
-              <a:t>'sample_size' was also defined by: cell-4</a:t>
-            </a:r>
-            <a:r>
-              <a:rPr lang="en-US" sz="1300" dirty="0">
-                <a:solidFill>
-                  <a:srgbClr val="2B1D19"/>
-                </a:solidFill>
-              </a:rPr>
-              <a:t> → the variable, and the cell that made it first</a:t>
-            </a:r>
-            <a:endParaRPr lang="en-US" sz="1300" dirty="0"/>
-          </a:p>
-          <a:p>
-            <a:pPr marL="342900" indent="-342900">
-              <a:spcAft>
-                <a:spcPts val="600"/>
-              </a:spcAft>
-              <a:buSzPct val="100000"/>
-              <a:buChar char="•"/>
-            </a:pPr>
-            <a:r>
-              <a:rPr lang="en-US" sz="1300" dirty="0">
-                <a:solidFill>
-                  <a:srgbClr val="2B1D19"/>
-                </a:solidFill>
-              </a:rPr>
-              <a:t>​</a:t>
-            </a:r>
-            <a:r>
-              <a:rPr lang="en-US" sz="1300" b="1" dirty="0">
-                <a:solidFill>
-                  <a:srgbClr val="2B1D19"/>
-                </a:solidFill>
-              </a:rPr>
-              <a:t>Fix: Wrap in a function</a:t>
-            </a:r>
-            <a:r>
-              <a:rPr lang="en-US" sz="1300" dirty="0">
-                <a:solidFill>
-                  <a:srgbClr val="2B1D19"/>
-                </a:solidFill>
-              </a:rPr>
-              <a:t> → don't use it: it hides the problem</a:t>
-            </a:r>
-            <a:endParaRPr lang="en-US" sz="1300" dirty="0"/>
+              <a:rPr lang="en-US" sz="1400" b="1" dirty="0">
+                <a:solidFill>
+                  <a:srgbClr val="2B1D19"/>
+                </a:solidFill>
+              </a:rPr>
+              <a:t>line 1</a:t>
+            </a:r>
+            <a:r>
+              <a:rPr lang="en-US" sz="1400" dirty="0">
+                <a:solidFill>
+                  <a:srgbClr val="2B1D19"/>
+                </a:solidFill>
+              </a:rPr>
+              <a:t> → creates a variable called </a:t>
+            </a:r>
+            <a:r>
+              <a:rPr lang="en-US" sz="1200" b="1" dirty="0">
+                <a:solidFill>
+                  <a:srgbClr val="B86E1E"/>
+                </a:solidFill>
+                <a:latin typeface="Courier New" pitchFamily="34" charset="0"/>
+                <a:ea typeface="Courier New" pitchFamily="34" charset="-122"/>
+                <a:cs typeface="Courier New" pitchFamily="34" charset="-120"/>
+              </a:rPr>
+              <a:t>sample_size</a:t>
+            </a:r>
+            <a:r>
+              <a:rPr lang="en-US" sz="1400" dirty="0">
+                <a:solidFill>
+                  <a:srgbClr val="2B1D19"/>
+                </a:solidFill>
+              </a:rPr>
+              <a:t> that holds the number </a:t>
+            </a:r>
+            <a:r>
+              <a:rPr lang="en-US" sz="1200" b="1" dirty="0">
+                <a:solidFill>
+                  <a:srgbClr val="B86E1E"/>
+                </a:solidFill>
+                <a:latin typeface="Courier New" pitchFamily="34" charset="0"/>
+                <a:ea typeface="Courier New" pitchFamily="34" charset="-122"/>
+                <a:cs typeface="Courier New" pitchFamily="34" charset="-120"/>
+              </a:rPr>
+              <a:t>5</a:t>
+            </a:r>
+            <a:endParaRPr lang="en-US" sz="1400" dirty="0"/>
           </a:p>
         </p:txBody>
       </p:sp>
@@ -10346,7 +10529,7 @@
                   <a:srgbClr val="4E342E"/>
                 </a:solidFill>
               </a:rPr>
-              <a:t>Changing a variable in another cell</a:t>
+              <a:t>Use it to show the first rows</a:t>
             </a:r>
             <a:endParaRPr lang="en-US" sz="2800" dirty="0"/>
           </a:p>
@@ -10354,26 +10537,26 @@
       </p:sp>
       <p:sp>
         <p:nvSpPr>
-          <p:cNvPr id="3" name="warning box"/>
+          <p:cNvPr id="3" name="Code panel"/>
           <p:cNvSpPr/>
           <p:nvPr/>
         </p:nvSpPr>
         <p:spPr>
           <a:xfrm>
             <a:off x="457200" y="1051560"/>
-            <a:ext cx="8229600" cy="2214880"/>
+            <a:ext cx="3840480" cy="786765"/>
           </a:xfrm>
           <a:prstGeom prst="roundRect">
             <a:avLst>
-              <a:gd name="adj" fmla="val 3303"/>
+              <a:gd name="adj" fmla="val 6973"/>
             </a:avLst>
           </a:prstGeom>
           <a:solidFill>
-            <a:srgbClr val="FDE4EF"/>
+            <a:srgbClr val="2B1D19"/>
           </a:solidFill>
           <a:ln w="12700">
             <a:solidFill>
-              <a:srgbClr val="FDE4EF"/>
+              <a:srgbClr val="2B1D19"/>
             </a:solidFill>
             <a:prstDash val="solid"/>
           </a:ln>
@@ -10387,8 +10570,8 @@
         </p:nvSpPr>
         <p:spPr>
           <a:xfrm>
-            <a:off x="685800" y="1188720"/>
-            <a:ext cx="7772400" cy="365760"/>
+            <a:off x="640080" y="1161288"/>
+            <a:ext cx="3474720" cy="274320"/>
           </a:xfrm>
           <a:prstGeom prst="rect">
             <a:avLst/>
@@ -10404,27 +10587,27 @@
               <a:buNone/>
             </a:pPr>
             <a:r>
-              <a:rPr lang="en-US" sz="1600" b="1" dirty="0">
-                <a:solidFill>
-                  <a:srgbClr val="B0185E"/>
-                </a:solidFill>
-              </a:rPr>
-              <a:t>Watch out</a:t>
-            </a:r>
-            <a:endParaRPr lang="en-US" sz="1600" dirty="0"/>
-          </a:p>
-        </p:txBody>
-      </p:sp>
-      <p:sp>
-        <p:nvSpPr>
-          <p:cNvPr id="5" name="Text 3"/>
+              <a:rPr lang="en-US" sz="1200" b="1" dirty="0">
+                <a:solidFill>
+                  <a:srgbClr val="E8A55A"/>
+                </a:solidFill>
+              </a:rPr>
+              <a:t>clean_steam.py — new cell</a:t>
+            </a:r>
+            <a:endParaRPr lang="en-US" sz="1200" dirty="0"/>
+          </a:p>
+        </p:txBody>
+      </p:sp>
+      <p:sp>
+        <p:nvSpPr>
+          <p:cNvPr id="5" name="Code"/>
           <p:cNvSpPr txBox="1"/>
           <p:nvPr/>
         </p:nvSpPr>
         <p:spPr>
           <a:xfrm>
-            <a:off x="685800" y="1600200"/>
-            <a:ext cx="7772400" cy="1529080"/>
+            <a:off x="594360" y="1508760"/>
+            <a:ext cx="3566160" cy="267970"/>
           </a:xfrm>
           <a:prstGeom prst="rect">
             <a:avLst/>
@@ -10433,7 +10616,60 @@
           <a:ln/>
         </p:spPr>
         <p:txBody>
-          <a:bodyPr wrap="square" lIns="0" tIns="0" rIns="0" bIns="0" rtlCol="0" anchor="t">
+          <a:bodyPr wrap="square" lIns="0" tIns="0" rIns="0" bIns="0" rtlCol="0" anchor="t"/>
+          <a:lstStyle/>
+          <a:p>
+            <a:pPr indent="0" marL="0">
+              <a:lnSpc>
+                <a:spcPts val="1750"/>
+              </a:lnSpc>
+              <a:buNone/>
+            </a:pPr>
+            <a:r>
+              <a:rPr lang="en-US" sz="1400" dirty="0">
+                <a:solidFill>
+                  <a:srgbClr val="9C8A80"/>
+                </a:solidFill>
+                <a:latin typeface="Courier New" pitchFamily="34" charset="0"/>
+                <a:ea typeface="Courier New" pitchFamily="34" charset="-122"/>
+                <a:cs typeface="Courier New" pitchFamily="34" charset="-120"/>
+              </a:rPr>
+              <a:t> 1  </a:t>
+            </a:r>
+            <a:r>
+              <a:rPr lang="en-US" sz="1400" dirty="0">
+                <a:solidFill>
+                  <a:srgbClr val="F7EFE6"/>
+                </a:solidFill>
+                <a:latin typeface="Courier New" pitchFamily="34" charset="0"/>
+                <a:ea typeface="Courier New" pitchFamily="34" charset="-122"/>
+                <a:cs typeface="Courier New" pitchFamily="34" charset="-120"/>
+              </a:rPr>
+              <a:t>games.head(sample_size)</a:t>
+            </a:r>
+            <a:endParaRPr lang="en-US" sz="1400" dirty="0"/>
+          </a:p>
+        </p:txBody>
+      </p:sp>
+      <p:sp>
+        <p:nvSpPr>
+          <p:cNvPr id="6" name="Text 4"/>
+          <p:cNvSpPr txBox="1"/>
+          <p:nvPr/>
+        </p:nvSpPr>
+        <p:spPr>
+          <a:xfrm>
+            <a:off x="457200" y="1929765"/>
+            <a:ext cx="3840480" cy="384048"/>
+          </a:xfrm>
+          <a:prstGeom prst="rect">
+            <a:avLst/>
+          </a:prstGeom>
+          <a:noFill/>
+          <a:ln/>
+        </p:spPr>
+        <p:txBody>
+          <a:bodyPr wrap="square" lIns="0" tIns="0" rIns="0" bIns="0" rtlCol="0" anchor="ctr">
             <a:normAutofit/>
           </a:bodyPr>
           <a:lstStyle/>
@@ -10445,7 +10681,7 @@
               <a:buNone/>
             </a:pPr>
             <a:r>
-              <a:rPr lang="en-US" sz="2000" dirty="0">
+              <a:rPr lang="en-US" sz="1500" dirty="0">
                 <a:solidFill>
                   <a:srgbClr val="2B1D19"/>
                 </a:solidFill>
@@ -10453,15 +10689,15 @@
               <a:t>​</a:t>
             </a:r>
             <a:r>
-              <a:rPr lang="en-US" sz="2000" dirty="0">
-                <a:solidFill>
-                  <a:srgbClr val="2B1D19"/>
-                </a:solidFill>
-              </a:rPr>
-              <a:t>In a normal Python program we often write </a:t>
-            </a:r>
-            <a:r>
-              <a:rPr lang="en-US" sz="1800" b="1" dirty="0">
+              <a:rPr lang="en-US" sz="1500" dirty="0">
+                <a:solidFill>
+                  <a:srgbClr val="2B1D19"/>
+                </a:solidFill>
+              </a:rPr>
+              <a:t>The </a:t>
+            </a:r>
+            <a:r>
+              <a:rPr lang="en-US" sz="1300" b="1" dirty="0">
                 <a:solidFill>
                   <a:srgbClr val="B86E1E"/>
                 </a:solidFill>
@@ -10469,18 +10705,146 @@
                 <a:ea typeface="Courier New" pitchFamily="34" charset="-122"/>
                 <a:cs typeface="Courier New" pitchFamily="34" charset="-120"/>
               </a:rPr>
-              <a:t>games = games.head()</a:t>
-            </a:r>
-            <a:r>
-              <a:rPr lang="en-US" sz="2000" dirty="0">
-                <a:solidFill>
-                  <a:srgbClr val="2B1D19"/>
-                </a:solidFill>
-              </a:rPr>
-              <a:t>. In marimo that creates </a:t>
-            </a:r>
-            <a:r>
-              <a:rPr lang="en-US" sz="1800" b="1" dirty="0">
+              <a:t>head</a:t>
+            </a:r>
+            <a:r>
+              <a:rPr lang="en-US" sz="1500" dirty="0">
+                <a:solidFill>
+                  <a:srgbClr val="2B1D19"/>
+                </a:solidFill>
+              </a:rPr>
+              <a:t> cell re-runs by itself and shows </a:t>
+            </a:r>
+            <a:r>
+              <a:rPr lang="en-US" sz="1500" b="1" dirty="0">
+                <a:solidFill>
+                  <a:srgbClr val="2B1D19"/>
+                </a:solidFill>
+              </a:rPr>
+              <a:t>ten</a:t>
+            </a:r>
+            <a:r>
+              <a:rPr lang="en-US" sz="1500" dirty="0">
+                <a:solidFill>
+                  <a:srgbClr val="2B1D19"/>
+                </a:solidFill>
+              </a:rPr>
+              <a:t> rows.</a:t>
+            </a:r>
+            <a:endParaRPr lang="en-US" sz="1500" dirty="0"/>
+          </a:p>
+        </p:txBody>
+      </p:sp>
+      <p:sp>
+        <p:nvSpPr>
+          <p:cNvPr id="7" name="primm box"/>
+          <p:cNvSpPr/>
+          <p:nvPr/>
+        </p:nvSpPr>
+        <p:spPr>
+          <a:xfrm>
+            <a:off x="457200" y="2432685"/>
+            <a:ext cx="3840480" cy="1285240"/>
+          </a:xfrm>
+          <a:prstGeom prst="roundRect">
+            <a:avLst>
+              <a:gd name="adj" fmla="val 5692"/>
+            </a:avLst>
+          </a:prstGeom>
+          <a:solidFill>
+            <a:srgbClr val="E6F2E6"/>
+          </a:solidFill>
+          <a:ln w="12700">
+            <a:solidFill>
+              <a:srgbClr val="E6F2E6"/>
+            </a:solidFill>
+            <a:prstDash val="solid"/>
+          </a:ln>
+        </p:spPr>
+      </p:sp>
+      <p:sp>
+        <p:nvSpPr>
+          <p:cNvPr id="8" name="Text 6"/>
+          <p:cNvSpPr txBox="1"/>
+          <p:nvPr/>
+        </p:nvSpPr>
+        <p:spPr>
+          <a:xfrm>
+            <a:off x="685800" y="2569845"/>
+            <a:ext cx="3383280" cy="365760"/>
+          </a:xfrm>
+          <a:prstGeom prst="rect">
+            <a:avLst/>
+          </a:prstGeom>
+          <a:noFill/>
+          <a:ln/>
+        </p:spPr>
+        <p:txBody>
+          <a:bodyPr wrap="square" lIns="0" tIns="0" rIns="0" bIns="0" rtlCol="0" anchor="ctr"/>
+          <a:lstStyle/>
+          <a:p>
+            <a:pPr indent="0" marL="0">
+              <a:buNone/>
+            </a:pPr>
+            <a:r>
+              <a:rPr lang="en-US" sz="1600" b="1" dirty="0">
+                <a:solidFill>
+                  <a:srgbClr val="2E6B30"/>
+                </a:solidFill>
+              </a:rPr>
+              <a:t>Predict</a:t>
+            </a:r>
+            <a:endParaRPr lang="en-US" sz="1600" dirty="0"/>
+          </a:p>
+        </p:txBody>
+      </p:sp>
+      <p:sp>
+        <p:nvSpPr>
+          <p:cNvPr id="9" name="Text 7"/>
+          <p:cNvSpPr txBox="1"/>
+          <p:nvPr/>
+        </p:nvSpPr>
+        <p:spPr>
+          <a:xfrm>
+            <a:off x="685800" y="2935605"/>
+            <a:ext cx="3383280" cy="599440"/>
+          </a:xfrm>
+          <a:prstGeom prst="rect">
+            <a:avLst/>
+          </a:prstGeom>
+          <a:noFill/>
+          <a:ln/>
+        </p:spPr>
+        <p:txBody>
+          <a:bodyPr wrap="square" lIns="0" tIns="0" rIns="0" bIns="0" rtlCol="0" anchor="t">
+            <a:normAutofit/>
+          </a:bodyPr>
+          <a:lstStyle/>
+          <a:p>
+            <a:pPr indent="0" marL="0">
+              <a:spcAft>
+                <a:spcPts val="800"/>
+              </a:spcAft>
+              <a:buNone/>
+            </a:pPr>
+            <a:r>
+              <a:rPr lang="en-US" sz="1500" dirty="0">
+                <a:solidFill>
+                  <a:srgbClr val="2B1D19"/>
+                </a:solidFill>
+              </a:rPr>
+              <a:t>​</a:t>
+            </a:r>
+            <a:r>
+              <a:rPr lang="en-US" sz="1500" dirty="0">
+                <a:solidFill>
+                  <a:srgbClr val="2B1D19"/>
+                </a:solidFill>
+              </a:rPr>
+              <a:t>Change </a:t>
+            </a:r>
+            <a:r>
+              <a:rPr lang="en-US" sz="1300" b="1" dirty="0">
                 <a:solidFill>
                   <a:srgbClr val="B86E1E"/>
                 </a:solidFill>
@@ -10488,18 +10852,18 @@
                 <a:ea typeface="Courier New" pitchFamily="34" charset="-122"/>
                 <a:cs typeface="Courier New" pitchFamily="34" charset="-120"/>
               </a:rPr>
-              <a:t>games</a:t>
-            </a:r>
-            <a:r>
-              <a:rPr lang="en-US" sz="2000" dirty="0">
-                <a:solidFill>
-                  <a:srgbClr val="2B1D19"/>
-                </a:solidFill>
-              </a:rPr>
-              <a:t> in a second cell, which breaks the rule. Instead, we give the new version a new name, such as </a:t>
-            </a:r>
-            <a:r>
-              <a:rPr lang="en-US" sz="1800" b="1" dirty="0">
+              <a:t>sample_size</a:t>
+            </a:r>
+            <a:r>
+              <a:rPr lang="en-US" sz="1500" dirty="0">
+                <a:solidFill>
+                  <a:srgbClr val="2B1D19"/>
+                </a:solidFill>
+              </a:rPr>
+              <a:t> to </a:t>
+            </a:r>
+            <a:r>
+              <a:rPr lang="en-US" sz="1300" b="1" dirty="0">
                 <a:solidFill>
                   <a:srgbClr val="B86E1E"/>
                 </a:solidFill>
@@ -10507,17 +10871,159 @@
                 <a:ea typeface="Courier New" pitchFamily="34" charset="-122"/>
                 <a:cs typeface="Courier New" pitchFamily="34" charset="-120"/>
               </a:rPr>
-              <a:t>first_games = games.head()</a:t>
-            </a:r>
-            <a:r>
-              <a:rPr lang="en-US" sz="2000" dirty="0">
+              <a:t>10</a:t>
+            </a:r>
+            <a:r>
+              <a:rPr lang="en-US" sz="1500" dirty="0">
+                <a:solidFill>
+                  <a:srgbClr val="2B1D19"/>
+                </a:solidFill>
+              </a:rPr>
+              <a:t> and run that cell. What will happen to this cell?</a:t>
+            </a:r>
+            <a:endParaRPr lang="en-US" sz="1500" dirty="0"/>
+          </a:p>
+        </p:txBody>
+      </p:sp>
+      <p:sp>
+        <p:nvSpPr>
+          <p:cNvPr id="10" name="Text 8"/>
+          <p:cNvSpPr txBox="1"/>
+          <p:nvPr/>
+        </p:nvSpPr>
+        <p:spPr>
+          <a:xfrm>
+            <a:off x="4572000" y="1051560"/>
+            <a:ext cx="4114800" cy="320040"/>
+          </a:xfrm>
+          <a:prstGeom prst="rect">
+            <a:avLst/>
+          </a:prstGeom>
+          <a:noFill/>
+          <a:ln/>
+        </p:spPr>
+        <p:txBody>
+          <a:bodyPr wrap="square" lIns="0" tIns="0" rIns="0" bIns="0" rtlCol="0" anchor="ctr"/>
+          <a:lstStyle/>
+          <a:p>
+            <a:pPr indent="0" marL="0">
+              <a:buNone/>
+            </a:pPr>
+            <a:r>
+              <a:rPr lang="en-US" sz="1400" b="1" dirty="0">
+                <a:solidFill>
+                  <a:srgbClr val="B86E1E"/>
+                </a:solidFill>
+              </a:rPr>
+              <a:t>Why</a:t>
+            </a:r>
+            <a:endParaRPr lang="en-US" sz="1400" dirty="0"/>
+          </a:p>
+        </p:txBody>
+      </p:sp>
+      <p:sp>
+        <p:nvSpPr>
+          <p:cNvPr id="11" name="Text 9"/>
+          <p:cNvSpPr txBox="1"/>
+          <p:nvPr/>
+        </p:nvSpPr>
+        <p:spPr>
+          <a:xfrm>
+            <a:off x="4572000" y="1399032"/>
+            <a:ext cx="4114800" cy="3017520"/>
+          </a:xfrm>
+          <a:prstGeom prst="rect">
+            <a:avLst/>
+          </a:prstGeom>
+          <a:noFill/>
+          <a:ln/>
+        </p:spPr>
+        <p:txBody>
+          <a:bodyPr wrap="square" lIns="0" tIns="0" rIns="0" bIns="0" rtlCol="0" anchor="t">
+            <a:normAutofit/>
+          </a:bodyPr>
+          <a:lstStyle/>
+          <a:p>
+            <a:pPr indent="0" marL="0">
+              <a:spcAft>
+                <a:spcPts val="800"/>
+              </a:spcAft>
+              <a:buNone/>
+            </a:pPr>
+            <a:r>
+              <a:rPr lang="en-US" sz="1500" dirty="0">
+                <a:solidFill>
+                  <a:srgbClr val="2B1D19"/>
+                </a:solidFill>
+              </a:rPr>
+              <a:t>​</a:t>
+            </a:r>
+            <a:r>
+              <a:rPr lang="en-US" sz="1500" dirty="0">
+                <a:solidFill>
+                  <a:srgbClr val="2B1D19"/>
+                </a:solidFill>
+              </a:rPr>
+              <a:t>The </a:t>
+            </a:r>
+            <a:r>
+              <a:rPr lang="en-US" sz="1300" b="1" dirty="0">
+                <a:solidFill>
+                  <a:srgbClr val="B86E1E"/>
+                </a:solidFill>
+                <a:latin typeface="Courier New" pitchFamily="34" charset="0"/>
+                <a:ea typeface="Courier New" pitchFamily="34" charset="-122"/>
+                <a:cs typeface="Courier New" pitchFamily="34" charset="-120"/>
+              </a:rPr>
+              <a:t>head</a:t>
+            </a:r>
+            <a:r>
+              <a:rPr lang="en-US" sz="1500" dirty="0">
+                <a:solidFill>
+                  <a:srgbClr val="2B1D19"/>
+                </a:solidFill>
+              </a:rPr>
+              <a:t> method shows the first few rows of a DataFrame. Here it shows the first </a:t>
+            </a:r>
+            <a:r>
+              <a:rPr lang="en-US" sz="1300" b="1" dirty="0">
+                <a:solidFill>
+                  <a:srgbClr val="B86E1E"/>
+                </a:solidFill>
+                <a:latin typeface="Courier New" pitchFamily="34" charset="0"/>
+                <a:ea typeface="Courier New" pitchFamily="34" charset="-122"/>
+                <a:cs typeface="Courier New" pitchFamily="34" charset="-120"/>
+              </a:rPr>
+              <a:t>sample_size</a:t>
+            </a:r>
+            <a:r>
+              <a:rPr lang="en-US" sz="1500" dirty="0">
+                <a:solidFill>
+                  <a:srgbClr val="2B1D19"/>
+                </a:solidFill>
+              </a:rPr>
+              <a:t> rows of </a:t>
+            </a:r>
+            <a:r>
+              <a:rPr lang="en-US" sz="1300" b="1" dirty="0">
+                <a:solidFill>
+                  <a:srgbClr val="B86E1E"/>
+                </a:solidFill>
+                <a:latin typeface="Courier New" pitchFamily="34" charset="0"/>
+                <a:ea typeface="Courier New" pitchFamily="34" charset="-122"/>
+                <a:cs typeface="Courier New" pitchFamily="34" charset="-120"/>
+              </a:rPr>
+              <a:t>games</a:t>
+            </a:r>
+            <a:r>
+              <a:rPr lang="en-US" sz="1500" dirty="0">
                 <a:solidFill>
                   <a:srgbClr val="2B1D19"/>
                 </a:solidFill>
               </a:rPr>
               <a:t>.</a:t>
             </a:r>
-            <a:endParaRPr lang="en-US" sz="2000" dirty="0"/>
+            <a:endParaRPr lang="en-US" sz="1500" dirty="0"/>
           </a:p>
         </p:txBody>
       </p:sp>
@@ -10593,14 +11099,14 @@
       </p:grpSpPr>
       <p:sp>
         <p:nvSpPr>
-          <p:cNvPr id="2" name="Text 0"/>
+          <p:cNvPr id="2" name="Title"/>
           <p:cNvSpPr txBox="1"/>
           <p:nvPr/>
         </p:nvSpPr>
         <p:spPr>
           <a:xfrm>
-            <a:off x="457200" y="1554480"/>
-            <a:ext cx="7498080" cy="914400"/>
+            <a:off x="457200" y="274320"/>
+            <a:ext cx="8229600" cy="640080"/>
           </a:xfrm>
           <a:prstGeom prst="rect">
             <a:avLst/>
@@ -10618,27 +11124,78 @@
               <a:buNone/>
             </a:pPr>
             <a:r>
-              <a:rPr lang="en-US" sz="3600" b="1" dirty="0">
-                <a:solidFill>
-                  <a:srgbClr val="FFFFFF"/>
-                </a:solidFill>
-              </a:rPr>
-              <a:t>Exploring with the table viewer</a:t>
-            </a:r>
-            <a:endParaRPr lang="en-US" sz="3600" dirty="0"/>
-          </a:p>
-        </p:txBody>
-      </p:sp>
-      <p:sp>
-        <p:nvSpPr>
-          <p:cNvPr id="3" name="Text 1"/>
+              <a:rPr lang="en-US" sz="2800" b="1" dirty="0">
+                <a:solidFill>
+                  <a:srgbClr val="4E342E"/>
+                </a:solidFill>
+              </a:rPr>
+              <a:t>One variable, one cell</a:t>
+            </a:r>
+            <a:endParaRPr lang="en-US" sz="2800" dirty="0"/>
+          </a:p>
+        </p:txBody>
+      </p:sp>
+      <p:pic>
+        <p:nvPicPr>
+          <p:cNvPr id="3" name="Image 0" descr="marimo showing CELL NOT RUN under the cell sample_size = 10, with the message This cell redefines variables from other cells, 'sample_size' was also defined by cell-4, and a Fix: Wrap in a function button">    </p:cNvPr>
+          <p:cNvPicPr>
+            <a:picLocks noChangeAspect="1"/>
+          </p:cNvPicPr>
+          <p:nvPr/>
+        </p:nvPicPr>
+        <p:blipFill>
+          <a:blip r:embed="rId1"/>
+          <a:stretch>
+            <a:fillRect/>
+          </a:stretch>
+        </p:blipFill>
+        <p:spPr>
+          <a:xfrm>
+            <a:off x="457200" y="2078553"/>
+            <a:ext cx="5394960" cy="1375014"/>
+          </a:xfrm>
+          <a:prstGeom prst="rect">
+            <a:avLst/>
+          </a:prstGeom>
+        </p:spPr>
+      </p:pic>
+      <p:sp>
+        <p:nvSpPr>
+          <p:cNvPr id="4" name="warning box"/>
+          <p:cNvSpPr/>
+          <p:nvPr/>
+        </p:nvSpPr>
+        <p:spPr>
+          <a:xfrm>
+            <a:off x="6035040" y="1051560"/>
+            <a:ext cx="2651760" cy="3429000"/>
+          </a:xfrm>
+          <a:prstGeom prst="roundRect">
+            <a:avLst>
+              <a:gd name="adj" fmla="val 2759"/>
+            </a:avLst>
+          </a:prstGeom>
+          <a:solidFill>
+            <a:srgbClr val="FDE4EF"/>
+          </a:solidFill>
+          <a:ln w="12700">
+            <a:solidFill>
+              <a:srgbClr val="FDE4EF"/>
+            </a:solidFill>
+            <a:prstDash val="solid"/>
+          </a:ln>
+        </p:spPr>
+      </p:sp>
+      <p:sp>
+        <p:nvSpPr>
+          <p:cNvPr id="5" name="Text 2"/>
           <p:cNvSpPr txBox="1"/>
           <p:nvPr/>
         </p:nvSpPr>
         <p:spPr>
           <a:xfrm>
-            <a:off x="457200" y="2514600"/>
-            <a:ext cx="7132320" cy="1097280"/>
+            <a:off x="6263640" y="1188720"/>
+            <a:ext cx="2194560" cy="365760"/>
           </a:xfrm>
           <a:prstGeom prst="rect">
             <a:avLst/>
@@ -10647,51 +11204,181 @@
           <a:ln/>
         </p:spPr>
         <p:txBody>
-          <a:bodyPr wrap="square" lIns="0" tIns="0" rIns="0" bIns="0" rtlCol="0" anchor="t"/>
+          <a:bodyPr wrap="square" lIns="0" tIns="0" rIns="0" bIns="0" rtlCol="0" anchor="ctr"/>
           <a:lstStyle/>
           <a:p>
             <a:pPr indent="0" marL="0">
+              <a:buNone/>
+            </a:pPr>
+            <a:r>
+              <a:rPr lang="en-US" sz="1600" b="1" dirty="0">
+                <a:solidFill>
+                  <a:srgbClr val="B0185E"/>
+                </a:solidFill>
+              </a:rPr>
+              <a:t>Reading the error</a:t>
+            </a:r>
+            <a:endParaRPr lang="en-US" sz="1600" dirty="0"/>
+          </a:p>
+        </p:txBody>
+      </p:sp>
+      <p:sp>
+        <p:nvSpPr>
+          <p:cNvPr id="6" name="Text 3"/>
+          <p:cNvSpPr txBox="1"/>
+          <p:nvPr/>
+        </p:nvSpPr>
+        <p:spPr>
+          <a:xfrm>
+            <a:off x="6263640" y="1600200"/>
+            <a:ext cx="2194560" cy="2743200"/>
+          </a:xfrm>
+          <a:prstGeom prst="rect">
+            <a:avLst/>
+          </a:prstGeom>
+          <a:noFill/>
+          <a:ln/>
+        </p:spPr>
+        <p:txBody>
+          <a:bodyPr wrap="square" lIns="0" tIns="0" rIns="0" bIns="0" rtlCol="0" anchor="t">
+            <a:normAutofit/>
+          </a:bodyPr>
+          <a:lstStyle/>
+          <a:p>
+            <a:pPr marL="342900" indent="-342900">
               <a:spcAft>
-                <a:spcPts val="800"/>
+                <a:spcPts val="600"/>
               </a:spcAft>
-              <a:buNone/>
-            </a:pPr>
-            <a:r>
-              <a:rPr lang="en-US" sz="1800" dirty="0">
-                <a:solidFill>
-                  <a:srgbClr val="F7EFE6"/>
+              <a:buSzPct val="100000"/>
+              <a:buChar char="•"/>
+            </a:pPr>
+            <a:r>
+              <a:rPr lang="en-US" sz="1300" dirty="0">
+                <a:solidFill>
+                  <a:srgbClr val="2B1D19"/>
                 </a:solidFill>
               </a:rPr>
               <a:t>​</a:t>
             </a:r>
             <a:r>
-              <a:rPr lang="en-US" sz="1800" dirty="0">
-                <a:solidFill>
-                  <a:srgbClr val="F7EFE6"/>
-                </a:solidFill>
-              </a:rPr>
-              <a:t>The table marimo shows for </a:t>
-            </a:r>
-            <a:r>
-              <a:rPr lang="en-US" sz="1600" b="1" dirty="0">
-                <a:solidFill>
-                  <a:srgbClr val="E8A55A"/>
-                </a:solidFill>
-                <a:latin typeface="Courier New" pitchFamily="34" charset="0"/>
-                <a:ea typeface="Courier New" pitchFamily="34" charset="-122"/>
-                <a:cs typeface="Courier New" pitchFamily="34" charset="-120"/>
-              </a:rPr>
-              <a:t>games</a:t>
-            </a:r>
-            <a:r>
-              <a:rPr lang="en-US" sz="1800" dirty="0">
-                <a:solidFill>
-                  <a:srgbClr val="F7EFE6"/>
-                </a:solidFill>
-              </a:rPr>
-              <a:t> isn't just a picture: it's a tool for exploring.</a:t>
-            </a:r>
-            <a:endParaRPr lang="en-US" sz="1800" dirty="0"/>
+              <a:rPr lang="en-US" sz="1300" b="1" dirty="0">
+                <a:solidFill>
+                  <a:srgbClr val="2B1D19"/>
+                </a:solidFill>
+              </a:rPr>
+              <a:t>CELL NOT RUN</a:t>
+            </a:r>
+            <a:r>
+              <a:rPr lang="en-US" sz="1300" dirty="0">
+                <a:solidFill>
+                  <a:srgbClr val="2B1D19"/>
+                </a:solidFill>
+              </a:rPr>
+              <a:t> → marimo has refused to run this cell</a:t>
+            </a:r>
+            <a:endParaRPr lang="en-US" sz="1300" dirty="0"/>
+          </a:p>
+          <a:p>
+            <a:pPr marL="342900" indent="-342900">
+              <a:spcAft>
+                <a:spcPts val="600"/>
+              </a:spcAft>
+              <a:buSzPct val="100000"/>
+              <a:buChar char="•"/>
+            </a:pPr>
+            <a:r>
+              <a:rPr lang="en-US" sz="1300" dirty="0">
+                <a:solidFill>
+                  <a:srgbClr val="2B1D19"/>
+                </a:solidFill>
+              </a:rPr>
+              <a:t>​</a:t>
+            </a:r>
+            <a:r>
+              <a:rPr lang="en-US" sz="1300" b="1" dirty="0">
+                <a:solidFill>
+                  <a:srgbClr val="2B1D19"/>
+                </a:solidFill>
+              </a:rPr>
+              <a:t>This cell redefines variables from other cells.</a:t>
+            </a:r>
+            <a:r>
+              <a:rPr lang="en-US" sz="1300" dirty="0">
+                <a:solidFill>
+                  <a:srgbClr val="2B1D19"/>
+                </a:solidFill>
+              </a:rPr>
+              <a:t> → it creates a variable another cell already creates</a:t>
+            </a:r>
+            <a:endParaRPr lang="en-US" sz="1300" dirty="0"/>
+          </a:p>
+          <a:p>
+            <a:pPr marL="342900" indent="-342900">
+              <a:spcAft>
+                <a:spcPts val="600"/>
+              </a:spcAft>
+              <a:buSzPct val="100000"/>
+              <a:buChar char="•"/>
+            </a:pPr>
+            <a:r>
+              <a:rPr lang="en-US" sz="1300" dirty="0">
+                <a:solidFill>
+                  <a:srgbClr val="2B1D19"/>
+                </a:solidFill>
+              </a:rPr>
+              <a:t>​</a:t>
+            </a:r>
+            <a:r>
+              <a:rPr lang="en-US" sz="1300" b="1" dirty="0">
+                <a:solidFill>
+                  <a:srgbClr val="2B1D19"/>
+                </a:solidFill>
+              </a:rPr>
+              <a:t>'sample_size' was also defined by: cell-4</a:t>
+            </a:r>
+            <a:r>
+              <a:rPr lang="en-US" sz="1300" dirty="0">
+                <a:solidFill>
+                  <a:srgbClr val="2B1D19"/>
+                </a:solidFill>
+              </a:rPr>
+              <a:t> → the variable, and the cell that made it first</a:t>
+            </a:r>
+            <a:endParaRPr lang="en-US" sz="1300" dirty="0"/>
+          </a:p>
+          <a:p>
+            <a:pPr marL="342900" indent="-342900">
+              <a:spcAft>
+                <a:spcPts val="600"/>
+              </a:spcAft>
+              <a:buSzPct val="100000"/>
+              <a:buChar char="•"/>
+            </a:pPr>
+            <a:r>
+              <a:rPr lang="en-US" sz="1300" dirty="0">
+                <a:solidFill>
+                  <a:srgbClr val="2B1D19"/>
+                </a:solidFill>
+              </a:rPr>
+              <a:t>​</a:t>
+            </a:r>
+            <a:r>
+              <a:rPr lang="en-US" sz="1300" b="1" dirty="0">
+                <a:solidFill>
+                  <a:srgbClr val="2B1D19"/>
+                </a:solidFill>
+              </a:rPr>
+              <a:t>Fix: Wrap in a function</a:t>
+            </a:r>
+            <a:r>
+              <a:rPr lang="en-US" sz="1300" dirty="0">
+                <a:solidFill>
+                  <a:srgbClr val="2B1D19"/>
+                </a:solidFill>
+              </a:rPr>
+              <a:t> → don't use it: it hides the problem</a:t>
+            </a:r>
+            <a:endParaRPr lang="en-US" sz="1300" dirty="0"/>
           </a:p>
         </p:txBody>
       </p:sp>
@@ -10725,7 +11412,7 @@
             <a:lvl1pPr>
               <a:defRPr sz="1000">
                 <a:solidFill>
-                  <a:srgbClr val="F7EFE6"/>
+                  <a:srgbClr val="6B6B6B"/>
                 </a:solidFill>
               </a:defRPr>
             </a:lvl1pPr>
@@ -10797,7 +11484,7 @@
                   <a:srgbClr val="4E342E"/>
                 </a:solidFill>
               </a:rPr>
-              <a:t>What the table viewer can do</a:t>
+              <a:t>Changing a variable in another cell</a:t>
             </a:r>
             <a:endParaRPr lang="en-US" sz="2800" dirty="0"/>
           </a:p>
@@ -10805,14 +11492,77 @@
       </p:sp>
       <p:sp>
         <p:nvSpPr>
-          <p:cNvPr id="3" name="Text 1"/>
+          <p:cNvPr id="3" name="warning box"/>
+          <p:cNvSpPr/>
+          <p:nvPr/>
+        </p:nvSpPr>
+        <p:spPr>
+          <a:xfrm>
+            <a:off x="457200" y="1051560"/>
+            <a:ext cx="8229600" cy="2214880"/>
+          </a:xfrm>
+          <a:prstGeom prst="roundRect">
+            <a:avLst>
+              <a:gd name="adj" fmla="val 3303"/>
+            </a:avLst>
+          </a:prstGeom>
+          <a:solidFill>
+            <a:srgbClr val="FDE4EF"/>
+          </a:solidFill>
+          <a:ln w="12700">
+            <a:solidFill>
+              <a:srgbClr val="FDE4EF"/>
+            </a:solidFill>
+            <a:prstDash val="solid"/>
+          </a:ln>
+        </p:spPr>
+      </p:sp>
+      <p:sp>
+        <p:nvSpPr>
+          <p:cNvPr id="4" name="Text 2"/>
           <p:cNvSpPr txBox="1"/>
           <p:nvPr/>
         </p:nvSpPr>
         <p:spPr>
           <a:xfrm>
-            <a:off x="457200" y="1097280"/>
-            <a:ext cx="8229600" cy="3383280"/>
+            <a:off x="685800" y="1188720"/>
+            <a:ext cx="7772400" cy="365760"/>
+          </a:xfrm>
+          <a:prstGeom prst="rect">
+            <a:avLst/>
+          </a:prstGeom>
+          <a:noFill/>
+          <a:ln/>
+        </p:spPr>
+        <p:txBody>
+          <a:bodyPr wrap="square" lIns="0" tIns="0" rIns="0" bIns="0" rtlCol="0" anchor="ctr"/>
+          <a:lstStyle/>
+          <a:p>
+            <a:pPr indent="0" marL="0">
+              <a:buNone/>
+            </a:pPr>
+            <a:r>
+              <a:rPr lang="en-US" sz="1600" b="1" dirty="0">
+                <a:solidFill>
+                  <a:srgbClr val="B0185E"/>
+                </a:solidFill>
+              </a:rPr>
+              <a:t>Watch out</a:t>
+            </a:r>
+            <a:endParaRPr lang="en-US" sz="1600" dirty="0"/>
+          </a:p>
+        </p:txBody>
+      </p:sp>
+      <p:sp>
+        <p:nvSpPr>
+          <p:cNvPr id="5" name="Text 3"/>
+          <p:cNvSpPr txBox="1"/>
+          <p:nvPr/>
+        </p:nvSpPr>
+        <p:spPr>
+          <a:xfrm>
+            <a:off x="685800" y="1600200"/>
+            <a:ext cx="7772400" cy="1529080"/>
           </a:xfrm>
           <a:prstGeom prst="rect">
             <a:avLst/>
@@ -10826,15 +11576,14 @@
           </a:bodyPr>
           <a:lstStyle/>
           <a:p>
-            <a:pPr marL="342900" indent="-342900">
+            <a:pPr indent="0" marL="0">
               <a:spcAft>
                 <a:spcPts val="800"/>
               </a:spcAft>
-              <a:buSzPct val="100000"/>
-              <a:buChar char="•"/>
-            </a:pPr>
-            <a:r>
-              <a:rPr lang="en-US" sz="1700" dirty="0">
+              <a:buNone/>
+            </a:pPr>
+            <a:r>
+              <a:rPr lang="en-US" sz="2000" dirty="0">
                 <a:solidFill>
                   <a:srgbClr val="2B1D19"/>
                 </a:solidFill>
@@ -10842,124 +11591,71 @@
               <a:t>​</a:t>
             </a:r>
             <a:r>
-              <a:rPr lang="en-US" sz="1700" b="1" dirty="0">
-                <a:solidFill>
-                  <a:srgbClr val="2B1D19"/>
-                </a:solidFill>
-              </a:rPr>
-              <a:t>scroll</a:t>
-            </a:r>
-            <a:r>
-              <a:rPr lang="en-US" sz="1700" dirty="0">
-                <a:solidFill>
-                  <a:srgbClr val="2B1D19"/>
-                </a:solidFill>
-              </a:rPr>
-              <a:t> across all 13 columns; page buttons move through the rows</a:t>
-            </a:r>
-            <a:endParaRPr lang="en-US" sz="1700" dirty="0"/>
-          </a:p>
-          <a:p>
-            <a:pPr marL="342900" indent="-342900">
-              <a:spcAft>
-                <a:spcPts val="800"/>
-              </a:spcAft>
-              <a:buSzPct val="100000"/>
-              <a:buChar char="•"/>
-            </a:pPr>
-            <a:r>
-              <a:rPr lang="en-US" sz="1700" dirty="0">
-                <a:solidFill>
-                  <a:srgbClr val="2B1D19"/>
-                </a:solidFill>
-              </a:rPr>
-              <a:t>​</a:t>
-            </a:r>
-            <a:r>
-              <a:rPr lang="en-US" sz="1700" b="1" dirty="0">
-                <a:solidFill>
-                  <a:srgbClr val="2B1D19"/>
-                </a:solidFill>
-              </a:rPr>
-              <a:t>sort</a:t>
-            </a:r>
-            <a:r>
-              <a:rPr lang="en-US" sz="1700" dirty="0">
-                <a:solidFill>
-                  <a:srgbClr val="2B1D19"/>
-                </a:solidFill>
-              </a:rPr>
-              <a:t> by a column, by clicking its heading</a:t>
-            </a:r>
-            <a:endParaRPr lang="en-US" sz="1700" dirty="0"/>
-          </a:p>
-          <a:p>
-            <a:pPr marL="342900" indent="-342900">
-              <a:spcAft>
-                <a:spcPts val="800"/>
-              </a:spcAft>
-              <a:buSzPct val="100000"/>
-              <a:buChar char="•"/>
-            </a:pPr>
-            <a:r>
-              <a:rPr lang="en-US" sz="1700" dirty="0">
-                <a:solidFill>
-                  <a:srgbClr val="2B1D19"/>
-                </a:solidFill>
-              </a:rPr>
-              <a:t>​</a:t>
-            </a:r>
-            <a:r>
-              <a:rPr lang="en-US" sz="1700" b="1" dirty="0">
-                <a:solidFill>
-                  <a:srgbClr val="2B1D19"/>
-                </a:solidFill>
-              </a:rPr>
-              <a:t>search</a:t>
-            </a:r>
-            <a:r>
-              <a:rPr lang="en-US" sz="1700" dirty="0">
-                <a:solidFill>
-                  <a:srgbClr val="2B1D19"/>
-                </a:solidFill>
-              </a:rPr>
-              <a:t> for a value, using the search box above the table</a:t>
-            </a:r>
-            <a:endParaRPr lang="en-US" sz="1700" dirty="0"/>
-          </a:p>
-          <a:p>
-            <a:pPr marL="342900" indent="-342900">
-              <a:spcAft>
-                <a:spcPts val="800"/>
-              </a:spcAft>
-              <a:buSzPct val="100000"/>
-              <a:buChar char="•"/>
-            </a:pPr>
-            <a:r>
-              <a:rPr lang="en-US" sz="1700" dirty="0">
-                <a:solidFill>
-                  <a:srgbClr val="2B1D19"/>
-                </a:solidFill>
-              </a:rPr>
-              <a:t>​</a:t>
-            </a:r>
-            <a:r>
-              <a:rPr lang="en-US" sz="1700" b="1" dirty="0">
-                <a:solidFill>
-                  <a:srgbClr val="2B1D19"/>
-                </a:solidFill>
-              </a:rPr>
-              <a:t>see a summary</a:t>
-            </a:r>
-            <a:r>
-              <a:rPr lang="en-US" sz="1700" dirty="0">
-                <a:solidFill>
-                  <a:srgbClr val="2B1D19"/>
-                </a:solidFill>
-              </a:rPr>
-              <a:t> of a column, such as its smallest and largest values</a:t>
-            </a:r>
-            <a:endParaRPr lang="en-US" sz="1700" dirty="0"/>
+              <a:rPr lang="en-US" sz="2000" dirty="0">
+                <a:solidFill>
+                  <a:srgbClr val="2B1D19"/>
+                </a:solidFill>
+              </a:rPr>
+              <a:t>In a normal Python program we often write </a:t>
+            </a:r>
+            <a:r>
+              <a:rPr lang="en-US" sz="1800" b="1" dirty="0">
+                <a:solidFill>
+                  <a:srgbClr val="B86E1E"/>
+                </a:solidFill>
+                <a:latin typeface="Courier New" pitchFamily="34" charset="0"/>
+                <a:ea typeface="Courier New" pitchFamily="34" charset="-122"/>
+                <a:cs typeface="Courier New" pitchFamily="34" charset="-120"/>
+              </a:rPr>
+              <a:t>games = games.head()</a:t>
+            </a:r>
+            <a:r>
+              <a:rPr lang="en-US" sz="2000" dirty="0">
+                <a:solidFill>
+                  <a:srgbClr val="2B1D19"/>
+                </a:solidFill>
+              </a:rPr>
+              <a:t>. In marimo that creates </a:t>
+            </a:r>
+            <a:r>
+              <a:rPr lang="en-US" sz="1800" b="1" dirty="0">
+                <a:solidFill>
+                  <a:srgbClr val="B86E1E"/>
+                </a:solidFill>
+                <a:latin typeface="Courier New" pitchFamily="34" charset="0"/>
+                <a:ea typeface="Courier New" pitchFamily="34" charset="-122"/>
+                <a:cs typeface="Courier New" pitchFamily="34" charset="-120"/>
+              </a:rPr>
+              <a:t>games</a:t>
+            </a:r>
+            <a:r>
+              <a:rPr lang="en-US" sz="2000" dirty="0">
+                <a:solidFill>
+                  <a:srgbClr val="2B1D19"/>
+                </a:solidFill>
+              </a:rPr>
+              <a:t> in a second cell, which breaks the rule. Instead, we give the new version a new name, such as </a:t>
+            </a:r>
+            <a:r>
+              <a:rPr lang="en-US" sz="1800" b="1" dirty="0">
+                <a:solidFill>
+                  <a:srgbClr val="B86E1E"/>
+                </a:solidFill>
+                <a:latin typeface="Courier New" pitchFamily="34" charset="0"/>
+                <a:ea typeface="Courier New" pitchFamily="34" charset="-122"/>
+                <a:cs typeface="Courier New" pitchFamily="34" charset="-120"/>
+              </a:rPr>
+              <a:t>first_games = games.head()</a:t>
+            </a:r>
+            <a:r>
+              <a:rPr lang="en-US" sz="2000" dirty="0">
+                <a:solidFill>
+                  <a:srgbClr val="2B1D19"/>
+                </a:solidFill>
+              </a:rPr>
+              <a:t>.</a:t>
+            </a:r>
+            <a:endParaRPr lang="en-US" sz="2000" dirty="0"/>
           </a:p>
         </p:txBody>
       </p:sp>
@@ -11035,14 +11731,14 @@
       </p:grpSpPr>
       <p:sp>
         <p:nvSpPr>
-          <p:cNvPr id="2" name="Title"/>
+          <p:cNvPr id="2" name="Text 0"/>
           <p:cNvSpPr txBox="1"/>
           <p:nvPr/>
         </p:nvSpPr>
         <p:spPr>
           <a:xfrm>
-            <a:off x="457200" y="274320"/>
-            <a:ext cx="8229600" cy="640080"/>
+            <a:off x="457200" y="1554480"/>
+            <a:ext cx="7498080" cy="914400"/>
           </a:xfrm>
           <a:prstGeom prst="rect">
             <a:avLst/>
@@ -11060,54 +11756,27 @@
               <a:buNone/>
             </a:pPr>
             <a:r>
-              <a:rPr lang="en-US" sz="2800" b="1" dirty="0">
-                <a:solidFill>
-                  <a:srgbClr val="4E342E"/>
-                </a:solidFill>
-              </a:rPr>
-              <a:t>Explore with the table viewer</a:t>
-            </a:r>
-            <a:endParaRPr lang="en-US" sz="2800" dirty="0"/>
-          </a:p>
-        </p:txBody>
-      </p:sp>
-      <p:sp>
-        <p:nvSpPr>
-          <p:cNvPr id="3" name="primm box"/>
-          <p:cNvSpPr/>
-          <p:nvPr/>
-        </p:nvSpPr>
-        <p:spPr>
-          <a:xfrm>
-            <a:off x="457200" y="1051560"/>
-            <a:ext cx="8229600" cy="3078480"/>
-          </a:xfrm>
-          <a:prstGeom prst="roundRect">
-            <a:avLst>
-              <a:gd name="adj" fmla="val 2376"/>
-            </a:avLst>
-          </a:prstGeom>
-          <a:solidFill>
-            <a:srgbClr val="E6F2E6"/>
-          </a:solidFill>
-          <a:ln w="12700">
-            <a:solidFill>
-              <a:srgbClr val="E6F2E6"/>
-            </a:solidFill>
-            <a:prstDash val="solid"/>
-          </a:ln>
-        </p:spPr>
-      </p:sp>
-      <p:sp>
-        <p:nvSpPr>
-          <p:cNvPr id="4" name="Text 2"/>
+              <a:rPr lang="en-US" sz="3600" b="1" dirty="0">
+                <a:solidFill>
+                  <a:srgbClr val="FFFFFF"/>
+                </a:solidFill>
+              </a:rPr>
+              <a:t>Exploring with the table viewer</a:t>
+            </a:r>
+            <a:endParaRPr lang="en-US" sz="3600" dirty="0"/>
+          </a:p>
+        </p:txBody>
+      </p:sp>
+      <p:sp>
+        <p:nvSpPr>
+          <p:cNvPr id="3" name="Text 1"/>
           <p:cNvSpPr txBox="1"/>
           <p:nvPr/>
         </p:nvSpPr>
         <p:spPr>
           <a:xfrm>
-            <a:off x="685800" y="1188720"/>
-            <a:ext cx="7772400" cy="365760"/>
+            <a:off x="457200" y="2514600"/>
+            <a:ext cx="7132320" cy="1097280"/>
           </a:xfrm>
           <a:prstGeom prst="rect">
             <a:avLst/>
@@ -11116,183 +11785,51 @@
           <a:ln/>
         </p:spPr>
         <p:txBody>
-          <a:bodyPr wrap="square" lIns="0" tIns="0" rIns="0" bIns="0" rtlCol="0" anchor="ctr"/>
+          <a:bodyPr wrap="square" lIns="0" tIns="0" rIns="0" bIns="0" rtlCol="0" anchor="t"/>
           <a:lstStyle/>
           <a:p>
             <a:pPr indent="0" marL="0">
+              <a:spcAft>
+                <a:spcPts val="800"/>
+              </a:spcAft>
               <a:buNone/>
             </a:pPr>
             <a:r>
+              <a:rPr lang="en-US" sz="1800" dirty="0">
+                <a:solidFill>
+                  <a:srgbClr val="F7EFE6"/>
+                </a:solidFill>
+              </a:rPr>
+              <a:t>​</a:t>
+            </a:r>
+            <a:r>
+              <a:rPr lang="en-US" sz="1800" dirty="0">
+                <a:solidFill>
+                  <a:srgbClr val="F7EFE6"/>
+                </a:solidFill>
+              </a:rPr>
+              <a:t>The table marimo shows for </a:t>
+            </a:r>
+            <a:r>
               <a:rPr lang="en-US" sz="1600" b="1" dirty="0">
                 <a:solidFill>
-                  <a:srgbClr val="2E6B30"/>
-                </a:solidFill>
-              </a:rPr>
-              <a:t>PRIMM</a:t>
-            </a:r>
-            <a:endParaRPr lang="en-US" sz="1600" dirty="0"/>
-          </a:p>
-        </p:txBody>
-      </p:sp>
-      <p:sp>
-        <p:nvSpPr>
-          <p:cNvPr id="5" name="Text 3"/>
-          <p:cNvSpPr txBox="1"/>
-          <p:nvPr/>
-        </p:nvSpPr>
-        <p:spPr>
-          <a:xfrm>
-            <a:off x="685800" y="1600200"/>
-            <a:ext cx="7772400" cy="2392680"/>
-          </a:xfrm>
-          <a:prstGeom prst="rect">
-            <a:avLst/>
-          </a:prstGeom>
-          <a:noFill/>
-          <a:ln/>
-        </p:spPr>
-        <p:txBody>
-          <a:bodyPr wrap="square" lIns="0" tIns="0" rIns="0" bIns="0" rtlCol="0" anchor="t">
-            <a:normAutofit/>
-          </a:bodyPr>
-          <a:lstStyle/>
-          <a:p>
-            <a:pPr marL="342900" indent="-342900">
-              <a:spcAft>
-                <a:spcPts val="1000"/>
-              </a:spcAft>
-              <a:buSzPct val="100000"/>
-              <a:buFont typeface="+mj-lt"/>
-              <a:buAutoNum type="arabicPeriod" startAt="1"/>
-            </a:pPr>
-            <a:r>
-              <a:rPr lang="en-US" sz="2000" dirty="0">
-                <a:solidFill>
-                  <a:srgbClr val="2B1D19"/>
-                </a:solidFill>
-              </a:rPr>
-              <a:t>​</a:t>
-            </a:r>
-            <a:r>
-              <a:rPr lang="en-US" sz="2000" dirty="0">
-                <a:solidFill>
-                  <a:srgbClr val="2B1D19"/>
-                </a:solidFill>
-              </a:rPr>
-              <a:t>Sort by </a:t>
-            </a:r>
-            <a:r>
-              <a:rPr lang="en-US" sz="1800" b="1" dirty="0">
-                <a:solidFill>
-                  <a:srgbClr val="B86E1E"/>
+                  <a:srgbClr val="E8A55A"/>
                 </a:solidFill>
                 <a:latin typeface="Courier New" pitchFamily="34" charset="0"/>
                 <a:ea typeface="Courier New" pitchFamily="34" charset="-122"/>
                 <a:cs typeface="Courier New" pitchFamily="34" charset="-120"/>
               </a:rPr>
-              <a:t>Price</a:t>
-            </a:r>
-            <a:r>
-              <a:rPr lang="en-US" sz="2000" dirty="0">
-                <a:solidFill>
-                  <a:srgbClr val="2B1D19"/>
-                </a:solidFill>
-              </a:rPr>
-              <a:t>, highest then lowest. What do the games that cost 0 have in common?</a:t>
-            </a:r>
-            <a:endParaRPr lang="en-US" sz="2000" dirty="0"/>
-          </a:p>
-          <a:p>
-            <a:pPr marL="342900" indent="-342900">
-              <a:spcAft>
-                <a:spcPts val="1000"/>
-              </a:spcAft>
-              <a:buSzPct val="100000"/>
-              <a:buFont typeface="+mj-lt"/>
-              <a:buAutoNum type="arabicPeriod" startAt="1"/>
-            </a:pPr>
-            <a:r>
-              <a:rPr lang="en-US" sz="2000" dirty="0">
-                <a:solidFill>
-                  <a:srgbClr val="2B1D19"/>
-                </a:solidFill>
-              </a:rPr>
-              <a:t>​</a:t>
-            </a:r>
-            <a:r>
-              <a:rPr lang="en-US" sz="2000" dirty="0">
-                <a:solidFill>
-                  <a:srgbClr val="2B1D19"/>
-                </a:solidFill>
-              </a:rPr>
-              <a:t>Search for </a:t>
-            </a:r>
-            <a:r>
-              <a:rPr lang="en-US" sz="1800" b="1" dirty="0">
-                <a:solidFill>
-                  <a:srgbClr val="B86E1E"/>
-                </a:solidFill>
-                <a:latin typeface="Courier New" pitchFamily="34" charset="0"/>
-                <a:ea typeface="Courier New" pitchFamily="34" charset="-122"/>
-                <a:cs typeface="Courier New" pitchFamily="34" charset="-120"/>
-              </a:rPr>
-              <a:t>Hollow Knight</a:t>
-            </a:r>
-            <a:r>
-              <a:rPr lang="en-US" sz="2000" dirty="0">
-                <a:solidFill>
-                  <a:srgbClr val="2B1D19"/>
-                </a:solidFill>
-              </a:rPr>
-              <a:t>. How would we work out what share of its reviews are positive?</a:t>
-            </a:r>
-            <a:endParaRPr lang="en-US" sz="2000" dirty="0"/>
-          </a:p>
-          <a:p>
-            <a:pPr marL="342900" indent="-342900">
-              <a:spcAft>
-                <a:spcPts val="1000"/>
-              </a:spcAft>
-              <a:buSzPct val="100000"/>
-              <a:buFont typeface="+mj-lt"/>
-              <a:buAutoNum type="arabicPeriod" startAt="1"/>
-            </a:pPr>
-            <a:r>
-              <a:rPr lang="en-US" sz="2000" dirty="0">
-                <a:solidFill>
-                  <a:srgbClr val="2B1D19"/>
-                </a:solidFill>
-              </a:rPr>
-              <a:t>​</a:t>
-            </a:r>
-            <a:r>
-              <a:rPr lang="en-US" sz="2000" dirty="0">
-                <a:solidFill>
-                  <a:srgbClr val="2B1D19"/>
-                </a:solidFill>
-              </a:rPr>
-              <a:t>Sort by </a:t>
-            </a:r>
-            <a:r>
-              <a:rPr lang="en-US" sz="1800" b="1" dirty="0">
-                <a:solidFill>
-                  <a:srgbClr val="B86E1E"/>
-                </a:solidFill>
-                <a:latin typeface="Courier New" pitchFamily="34" charset="0"/>
-                <a:ea typeface="Courier New" pitchFamily="34" charset="-122"/>
-                <a:cs typeface="Courier New" pitchFamily="34" charset="-120"/>
-              </a:rPr>
-              <a:t>Metacritic score</a:t>
-            </a:r>
-            <a:r>
-              <a:rPr lang="en-US" sz="2000" dirty="0">
-                <a:solidFill>
-                  <a:srgbClr val="2B1D19"/>
-                </a:solidFill>
-              </a:rPr>
-              <a:t>. Are the games scoring 0 really that bad?</a:t>
-            </a:r>
-            <a:endParaRPr lang="en-US" sz="2000" dirty="0"/>
+              <a:t>games</a:t>
+            </a:r>
+            <a:r>
+              <a:rPr lang="en-US" sz="1800" dirty="0">
+                <a:solidFill>
+                  <a:srgbClr val="F7EFE6"/>
+                </a:solidFill>
+              </a:rPr>
+              <a:t> isn't just a picture: it's a tool for exploring.</a:t>
+            </a:r>
+            <a:endParaRPr lang="en-US" sz="1800" dirty="0"/>
           </a:p>
         </p:txBody>
       </p:sp>
@@ -11326,7 +11863,7 @@
             <a:lvl1pPr>
               <a:defRPr sz="1000">
                 <a:solidFill>
-                  <a:srgbClr val="6B6B6B"/>
+                  <a:srgbClr val="F7EFE6"/>
                 </a:solidFill>
               </a:defRPr>
             </a:lvl1pPr>
@@ -11368,14 +11905,14 @@
       </p:grpSpPr>
       <p:sp>
         <p:nvSpPr>
-          <p:cNvPr id="2" name="Text 0"/>
+          <p:cNvPr id="2" name="Title"/>
           <p:cNvSpPr txBox="1"/>
           <p:nvPr/>
         </p:nvSpPr>
         <p:spPr>
           <a:xfrm>
-            <a:off x="457200" y="457200"/>
-            <a:ext cx="7772400" cy="365760"/>
+            <a:off x="457200" y="274320"/>
+            <a:ext cx="8229600" cy="640080"/>
           </a:xfrm>
           <a:prstGeom prst="rect">
             <a:avLst/>
@@ -11384,21 +11921,23 @@
           <a:ln/>
         </p:spPr>
         <p:txBody>
-          <a:bodyPr wrap="square" lIns="0" tIns="0" rIns="0" bIns="0" rtlCol="0" anchor="ctr"/>
+          <a:bodyPr wrap="square" lIns="0" tIns="0" rIns="0" bIns="0" rtlCol="0" anchor="ctr">
+            <a:normAutofit/>
+          </a:bodyPr>
           <a:lstStyle/>
           <a:p>
             <a:pPr indent="0" marL="0">
               <a:buNone/>
             </a:pPr>
             <a:r>
-              <a:rPr lang="en-US" sz="1400" b="1" spc="200" kern="0" dirty="0">
-                <a:solidFill>
-                  <a:srgbClr val="E8A55A"/>
-                </a:solidFill>
-              </a:rPr>
-              <a:t>CHECK YOUR UNDERSTANDING</a:t>
-            </a:r>
-            <a:endParaRPr lang="en-US" sz="1400" dirty="0"/>
+              <a:rPr lang="en-US" sz="2800" b="1" dirty="0">
+                <a:solidFill>
+                  <a:srgbClr val="4E342E"/>
+                </a:solidFill>
+              </a:rPr>
+              <a:t>What the table viewer can do</a:t>
+            </a:r>
+            <a:endParaRPr lang="en-US" sz="2800" dirty="0"/>
           </a:p>
         </p:txBody>
       </p:sp>
@@ -11410,8 +11949,8 @@
         </p:nvSpPr>
         <p:spPr>
           <a:xfrm>
-            <a:off x="457200" y="1005840"/>
-            <a:ext cx="7498080" cy="3108960"/>
+            <a:off x="457200" y="1097280"/>
+            <a:ext cx="8229600" cy="3383280"/>
           </a:xfrm>
           <a:prstGeom prst="rect">
             <a:avLst/>
@@ -11427,194 +11966,138 @@
           <a:p>
             <a:pPr marL="342900" indent="-342900">
               <a:spcAft>
-                <a:spcPts val="1400"/>
+                <a:spcPts val="800"/>
               </a:spcAft>
               <a:buSzPct val="100000"/>
-              <a:buFont typeface="+mj-lt"/>
-              <a:buAutoNum type="arabicPeriod" startAt="1"/>
-            </a:pPr>
-            <a:r>
-              <a:rPr lang="en-US" sz="2000" dirty="0">
-                <a:solidFill>
-                  <a:srgbClr val="FFFFFF"/>
+              <a:buChar char="•"/>
+            </a:pPr>
+            <a:r>
+              <a:rPr lang="en-US" sz="1700" dirty="0">
+                <a:solidFill>
+                  <a:srgbClr val="2B1D19"/>
                 </a:solidFill>
               </a:rPr>
               <a:t>​</a:t>
             </a:r>
             <a:r>
-              <a:rPr lang="en-US" sz="2000" dirty="0">
-                <a:solidFill>
-                  <a:srgbClr val="FFFFFF"/>
-                </a:solidFill>
-              </a:rPr>
-              <a:t>Where does a marimo cell's output appear?</a:t>
-            </a:r>
-            <a:endParaRPr lang="en-US" sz="2000" dirty="0"/>
+              <a:rPr lang="en-US" sz="1700" b="1" dirty="0">
+                <a:solidFill>
+                  <a:srgbClr val="2B1D19"/>
+                </a:solidFill>
+              </a:rPr>
+              <a:t>scroll</a:t>
+            </a:r>
+            <a:r>
+              <a:rPr lang="en-US" sz="1700" dirty="0">
+                <a:solidFill>
+                  <a:srgbClr val="2B1D19"/>
+                </a:solidFill>
+              </a:rPr>
+              <a:t> across all 13 columns; page buttons move through the rows</a:t>
+            </a:r>
+            <a:endParaRPr lang="en-US" sz="1700" dirty="0"/>
           </a:p>
           <a:p>
             <a:pPr marL="342900" indent="-342900">
               <a:spcAft>
-                <a:spcPts val="1400"/>
+                <a:spcPts val="800"/>
               </a:spcAft>
               <a:buSzPct val="100000"/>
-              <a:buFont typeface="+mj-lt"/>
-              <a:buAutoNum type="arabicPeriod" startAt="1"/>
-            </a:pPr>
-            <a:r>
-              <a:rPr lang="en-US" sz="2000" dirty="0">
-                <a:solidFill>
-                  <a:srgbClr val="FFFFFF"/>
+              <a:buChar char="•"/>
+            </a:pPr>
+            <a:r>
+              <a:rPr lang="en-US" sz="1700" dirty="0">
+                <a:solidFill>
+                  <a:srgbClr val="2B1D19"/>
                 </a:solidFill>
               </a:rPr>
               <a:t>​</a:t>
             </a:r>
             <a:r>
-              <a:rPr lang="en-US" sz="2000" dirty="0">
-                <a:solidFill>
-                  <a:srgbClr val="FFFFFF"/>
-                </a:solidFill>
-              </a:rPr>
-              <a:t>What does </a:t>
-            </a:r>
-            <a:r>
-              <a:rPr lang="en-US" sz="1800" b="1" dirty="0">
-                <a:solidFill>
-                  <a:srgbClr val="E8A55A"/>
-                </a:solidFill>
-                <a:latin typeface="Courier New" pitchFamily="34" charset="0"/>
-                <a:ea typeface="Courier New" pitchFamily="34" charset="-122"/>
-                <a:cs typeface="Courier New" pitchFamily="34" charset="-120"/>
-              </a:rPr>
-              <a:t>games.shape</a:t>
-            </a:r>
-            <a:r>
-              <a:rPr lang="en-US" sz="2000" dirty="0">
-                <a:solidFill>
-                  <a:srgbClr val="FFFFFF"/>
-                </a:solidFill>
-              </a:rPr>
-              <a:t> tell us about our data?</a:t>
-            </a:r>
-            <a:endParaRPr lang="en-US" sz="2000" dirty="0"/>
+              <a:rPr lang="en-US" sz="1700" b="1" dirty="0">
+                <a:solidFill>
+                  <a:srgbClr val="2B1D19"/>
+                </a:solidFill>
+              </a:rPr>
+              <a:t>sort</a:t>
+            </a:r>
+            <a:r>
+              <a:rPr lang="en-US" sz="1700" dirty="0">
+                <a:solidFill>
+                  <a:srgbClr val="2B1D19"/>
+                </a:solidFill>
+              </a:rPr>
+              <a:t> by a column, by clicking its heading</a:t>
+            </a:r>
+            <a:endParaRPr lang="en-US" sz="1700" dirty="0"/>
           </a:p>
           <a:p>
             <a:pPr marL="342900" indent="-342900">
               <a:spcAft>
-                <a:spcPts val="1400"/>
+                <a:spcPts val="800"/>
               </a:spcAft>
               <a:buSzPct val="100000"/>
-              <a:buFont typeface="+mj-lt"/>
-              <a:buAutoNum type="arabicPeriod" startAt="1"/>
-            </a:pPr>
-            <a:r>
-              <a:rPr lang="en-US" sz="2000" dirty="0">
-                <a:solidFill>
-                  <a:srgbClr val="FFFFFF"/>
+              <a:buChar char="•"/>
+            </a:pPr>
+            <a:r>
+              <a:rPr lang="en-US" sz="1700" dirty="0">
+                <a:solidFill>
+                  <a:srgbClr val="2B1D19"/>
                 </a:solidFill>
               </a:rPr>
               <a:t>​</a:t>
             </a:r>
             <a:r>
-              <a:rPr lang="en-US" sz="2000" dirty="0">
-                <a:solidFill>
-                  <a:srgbClr val="FFFFFF"/>
-                </a:solidFill>
-              </a:rPr>
-              <a:t>Why is it a problem that </a:t>
-            </a:r>
-            <a:r>
-              <a:rPr lang="en-US" sz="1800" b="1" dirty="0">
-                <a:solidFill>
-                  <a:srgbClr val="E8A55A"/>
-                </a:solidFill>
-                <a:latin typeface="Courier New" pitchFamily="34" charset="0"/>
-                <a:ea typeface="Courier New" pitchFamily="34" charset="-122"/>
-                <a:cs typeface="Courier New" pitchFamily="34" charset="-120"/>
-              </a:rPr>
-              <a:t>Release date</a:t>
-            </a:r>
-            <a:r>
-              <a:rPr lang="en-US" sz="2000" dirty="0">
-                <a:solidFill>
-                  <a:srgbClr val="FFFFFF"/>
-                </a:solidFill>
-              </a:rPr>
-              <a:t> is a String?</a:t>
-            </a:r>
-            <a:endParaRPr lang="en-US" sz="2000" dirty="0"/>
+              <a:rPr lang="en-US" sz="1700" b="1" dirty="0">
+                <a:solidFill>
+                  <a:srgbClr val="2B1D19"/>
+                </a:solidFill>
+              </a:rPr>
+              <a:t>search</a:t>
+            </a:r>
+            <a:r>
+              <a:rPr lang="en-US" sz="1700" dirty="0">
+                <a:solidFill>
+                  <a:srgbClr val="2B1D19"/>
+                </a:solidFill>
+              </a:rPr>
+              <a:t> for a value, using the search box above the table</a:t>
+            </a:r>
+            <a:endParaRPr lang="en-US" sz="1700" dirty="0"/>
           </a:p>
           <a:p>
             <a:pPr marL="342900" indent="-342900">
               <a:spcAft>
-                <a:spcPts val="1400"/>
+                <a:spcPts val="800"/>
               </a:spcAft>
               <a:buSzPct val="100000"/>
-              <a:buFont typeface="+mj-lt"/>
-              <a:buAutoNum type="arabicPeriod" startAt="1"/>
-            </a:pPr>
-            <a:r>
-              <a:rPr lang="en-US" sz="2000" dirty="0">
-                <a:solidFill>
-                  <a:srgbClr val="FFFFFF"/>
+              <a:buChar char="•"/>
+            </a:pPr>
+            <a:r>
+              <a:rPr lang="en-US" sz="1700" dirty="0">
+                <a:solidFill>
+                  <a:srgbClr val="2B1D19"/>
                 </a:solidFill>
               </a:rPr>
               <a:t>​</a:t>
             </a:r>
             <a:r>
-              <a:rPr lang="en-US" sz="2000" dirty="0">
-                <a:solidFill>
-                  <a:srgbClr val="FFFFFF"/>
-                </a:solidFill>
-              </a:rPr>
-              <a:t>What does it mean that marimo is reactive?</a:t>
-            </a:r>
-            <a:endParaRPr lang="en-US" sz="2000" dirty="0"/>
-          </a:p>
-          <a:p>
-            <a:pPr marL="342900" indent="-342900">
-              <a:spcAft>
-                <a:spcPts val="1400"/>
-              </a:spcAft>
-              <a:buSzPct val="100000"/>
-              <a:buFont typeface="+mj-lt"/>
-              <a:buAutoNum type="arabicPeriod" startAt="1"/>
-            </a:pPr>
-            <a:r>
-              <a:rPr lang="en-US" sz="2000" dirty="0">
-                <a:solidFill>
-                  <a:srgbClr val="FFFFFF"/>
-                </a:solidFill>
-              </a:rPr>
-              <a:t>​</a:t>
-            </a:r>
-            <a:r>
-              <a:rPr lang="en-US" sz="2000" dirty="0">
-                <a:solidFill>
-                  <a:srgbClr val="FFFFFF"/>
-                </a:solidFill>
-              </a:rPr>
-              <a:t>Why does marimo refuse to run a second cell that creates </a:t>
-            </a:r>
-            <a:r>
-              <a:rPr lang="en-US" sz="1800" b="1" dirty="0">
-                <a:solidFill>
-                  <a:srgbClr val="E8A55A"/>
-                </a:solidFill>
-                <a:latin typeface="Courier New" pitchFamily="34" charset="0"/>
-                <a:ea typeface="Courier New" pitchFamily="34" charset="-122"/>
-                <a:cs typeface="Courier New" pitchFamily="34" charset="-120"/>
-              </a:rPr>
-              <a:t>sample_size</a:t>
-            </a:r>
-            <a:r>
-              <a:rPr lang="en-US" sz="2000" dirty="0">
-                <a:solidFill>
-                  <a:srgbClr val="FFFFFF"/>
-                </a:solidFill>
-              </a:rPr>
-              <a:t>?</a:t>
-            </a:r>
-            <a:endParaRPr lang="en-US" sz="2000" dirty="0"/>
+              <a:rPr lang="en-US" sz="1700" b="1" dirty="0">
+                <a:solidFill>
+                  <a:srgbClr val="2B1D19"/>
+                </a:solidFill>
+              </a:rPr>
+              <a:t>see a summary</a:t>
+            </a:r>
+            <a:r>
+              <a:rPr lang="en-US" sz="1700" dirty="0">
+                <a:solidFill>
+                  <a:srgbClr val="2B1D19"/>
+                </a:solidFill>
+              </a:rPr>
+              <a:t> of a column, such as its smallest and largest values</a:t>
+            </a:r>
+            <a:endParaRPr lang="en-US" sz="1700" dirty="0"/>
           </a:p>
         </p:txBody>
       </p:sp>
@@ -11648,7 +12131,7 @@
             <a:lvl1pPr>
               <a:defRPr sz="1000">
                 <a:solidFill>
-                  <a:srgbClr val="F7EFE6"/>
+                  <a:srgbClr val="6B6B6B"/>
                 </a:solidFill>
               </a:defRPr>
             </a:lvl1pPr>
@@ -12051,6 +12534,661 @@
                   <a:srgbClr val="4E342E"/>
                 </a:solidFill>
               </a:rPr>
+              <a:t>Explore with the table viewer</a:t>
+            </a:r>
+            <a:endParaRPr lang="en-US" sz="2800" dirty="0"/>
+          </a:p>
+        </p:txBody>
+      </p:sp>
+      <p:sp>
+        <p:nvSpPr>
+          <p:cNvPr id="3" name="primm box"/>
+          <p:cNvSpPr/>
+          <p:nvPr/>
+        </p:nvSpPr>
+        <p:spPr>
+          <a:xfrm>
+            <a:off x="457200" y="1051560"/>
+            <a:ext cx="8229600" cy="3078480"/>
+          </a:xfrm>
+          <a:prstGeom prst="roundRect">
+            <a:avLst>
+              <a:gd name="adj" fmla="val 2376"/>
+            </a:avLst>
+          </a:prstGeom>
+          <a:solidFill>
+            <a:srgbClr val="E6F2E6"/>
+          </a:solidFill>
+          <a:ln w="12700">
+            <a:solidFill>
+              <a:srgbClr val="E6F2E6"/>
+            </a:solidFill>
+            <a:prstDash val="solid"/>
+          </a:ln>
+        </p:spPr>
+      </p:sp>
+      <p:sp>
+        <p:nvSpPr>
+          <p:cNvPr id="4" name="Text 2"/>
+          <p:cNvSpPr txBox="1"/>
+          <p:nvPr/>
+        </p:nvSpPr>
+        <p:spPr>
+          <a:xfrm>
+            <a:off x="685800" y="1188720"/>
+            <a:ext cx="7772400" cy="365760"/>
+          </a:xfrm>
+          <a:prstGeom prst="rect">
+            <a:avLst/>
+          </a:prstGeom>
+          <a:noFill/>
+          <a:ln/>
+        </p:spPr>
+        <p:txBody>
+          <a:bodyPr wrap="square" lIns="0" tIns="0" rIns="0" bIns="0" rtlCol="0" anchor="ctr"/>
+          <a:lstStyle/>
+          <a:p>
+            <a:pPr indent="0" marL="0">
+              <a:buNone/>
+            </a:pPr>
+            <a:r>
+              <a:rPr lang="en-US" sz="1600" b="1" dirty="0">
+                <a:solidFill>
+                  <a:srgbClr val="2E6B30"/>
+                </a:solidFill>
+              </a:rPr>
+              <a:t>PRIMM</a:t>
+            </a:r>
+            <a:endParaRPr lang="en-US" sz="1600" dirty="0"/>
+          </a:p>
+        </p:txBody>
+      </p:sp>
+      <p:sp>
+        <p:nvSpPr>
+          <p:cNvPr id="5" name="Text 3"/>
+          <p:cNvSpPr txBox="1"/>
+          <p:nvPr/>
+        </p:nvSpPr>
+        <p:spPr>
+          <a:xfrm>
+            <a:off x="685800" y="1600200"/>
+            <a:ext cx="7772400" cy="2392680"/>
+          </a:xfrm>
+          <a:prstGeom prst="rect">
+            <a:avLst/>
+          </a:prstGeom>
+          <a:noFill/>
+          <a:ln/>
+        </p:spPr>
+        <p:txBody>
+          <a:bodyPr wrap="square" lIns="0" tIns="0" rIns="0" bIns="0" rtlCol="0" anchor="t">
+            <a:normAutofit/>
+          </a:bodyPr>
+          <a:lstStyle/>
+          <a:p>
+            <a:pPr marL="342900" indent="-342900">
+              <a:spcAft>
+                <a:spcPts val="1000"/>
+              </a:spcAft>
+              <a:buSzPct val="100000"/>
+              <a:buFont typeface="+mj-lt"/>
+              <a:buAutoNum type="arabicPeriod" startAt="1"/>
+            </a:pPr>
+            <a:r>
+              <a:rPr lang="en-US" sz="2000" dirty="0">
+                <a:solidFill>
+                  <a:srgbClr val="2B1D19"/>
+                </a:solidFill>
+              </a:rPr>
+              <a:t>​</a:t>
+            </a:r>
+            <a:r>
+              <a:rPr lang="en-US" sz="2000" dirty="0">
+                <a:solidFill>
+                  <a:srgbClr val="2B1D19"/>
+                </a:solidFill>
+              </a:rPr>
+              <a:t>Sort by </a:t>
+            </a:r>
+            <a:r>
+              <a:rPr lang="en-US" sz="1800" b="1" dirty="0">
+                <a:solidFill>
+                  <a:srgbClr val="B86E1E"/>
+                </a:solidFill>
+                <a:latin typeface="Courier New" pitchFamily="34" charset="0"/>
+                <a:ea typeface="Courier New" pitchFamily="34" charset="-122"/>
+                <a:cs typeface="Courier New" pitchFamily="34" charset="-120"/>
+              </a:rPr>
+              <a:t>Price</a:t>
+            </a:r>
+            <a:r>
+              <a:rPr lang="en-US" sz="2000" dirty="0">
+                <a:solidFill>
+                  <a:srgbClr val="2B1D19"/>
+                </a:solidFill>
+              </a:rPr>
+              <a:t>, highest then lowest. What do the games that cost 0 have in common?</a:t>
+            </a:r>
+            <a:endParaRPr lang="en-US" sz="2000" dirty="0"/>
+          </a:p>
+          <a:p>
+            <a:pPr marL="342900" indent="-342900">
+              <a:spcAft>
+                <a:spcPts val="1000"/>
+              </a:spcAft>
+              <a:buSzPct val="100000"/>
+              <a:buFont typeface="+mj-lt"/>
+              <a:buAutoNum type="arabicPeriod" startAt="1"/>
+            </a:pPr>
+            <a:r>
+              <a:rPr lang="en-US" sz="2000" dirty="0">
+                <a:solidFill>
+                  <a:srgbClr val="2B1D19"/>
+                </a:solidFill>
+              </a:rPr>
+              <a:t>​</a:t>
+            </a:r>
+            <a:r>
+              <a:rPr lang="en-US" sz="2000" dirty="0">
+                <a:solidFill>
+                  <a:srgbClr val="2B1D19"/>
+                </a:solidFill>
+              </a:rPr>
+              <a:t>Search for </a:t>
+            </a:r>
+            <a:r>
+              <a:rPr lang="en-US" sz="1800" b="1" dirty="0">
+                <a:solidFill>
+                  <a:srgbClr val="B86E1E"/>
+                </a:solidFill>
+                <a:latin typeface="Courier New" pitchFamily="34" charset="0"/>
+                <a:ea typeface="Courier New" pitchFamily="34" charset="-122"/>
+                <a:cs typeface="Courier New" pitchFamily="34" charset="-120"/>
+              </a:rPr>
+              <a:t>Hollow Knight</a:t>
+            </a:r>
+            <a:r>
+              <a:rPr lang="en-US" sz="2000" dirty="0">
+                <a:solidFill>
+                  <a:srgbClr val="2B1D19"/>
+                </a:solidFill>
+              </a:rPr>
+              <a:t>. How would we work out what share of its reviews are positive?</a:t>
+            </a:r>
+            <a:endParaRPr lang="en-US" sz="2000" dirty="0"/>
+          </a:p>
+          <a:p>
+            <a:pPr marL="342900" indent="-342900">
+              <a:spcAft>
+                <a:spcPts val="1000"/>
+              </a:spcAft>
+              <a:buSzPct val="100000"/>
+              <a:buFont typeface="+mj-lt"/>
+              <a:buAutoNum type="arabicPeriod" startAt="1"/>
+            </a:pPr>
+            <a:r>
+              <a:rPr lang="en-US" sz="2000" dirty="0">
+                <a:solidFill>
+                  <a:srgbClr val="2B1D19"/>
+                </a:solidFill>
+              </a:rPr>
+              <a:t>​</a:t>
+            </a:r>
+            <a:r>
+              <a:rPr lang="en-US" sz="2000" dirty="0">
+                <a:solidFill>
+                  <a:srgbClr val="2B1D19"/>
+                </a:solidFill>
+              </a:rPr>
+              <a:t>Sort by </a:t>
+            </a:r>
+            <a:r>
+              <a:rPr lang="en-US" sz="1800" b="1" dirty="0">
+                <a:solidFill>
+                  <a:srgbClr val="B86E1E"/>
+                </a:solidFill>
+                <a:latin typeface="Courier New" pitchFamily="34" charset="0"/>
+                <a:ea typeface="Courier New" pitchFamily="34" charset="-122"/>
+                <a:cs typeface="Courier New" pitchFamily="34" charset="-120"/>
+              </a:rPr>
+              <a:t>Metacritic score</a:t>
+            </a:r>
+            <a:r>
+              <a:rPr lang="en-US" sz="2000" dirty="0">
+                <a:solidFill>
+                  <a:srgbClr val="2B1D19"/>
+                </a:solidFill>
+              </a:rPr>
+              <a:t>. Are the games scoring 0 really that bad?</a:t>
+            </a:r>
+            <a:endParaRPr lang="en-US" sz="2000" dirty="0"/>
+          </a:p>
+        </p:txBody>
+      </p:sp>
+      <p:sp>
+        <p:nvSpPr>
+          <p:cNvPr id="25" name="Slide Number Placeholder 0"/>
+          <p:cNvSpPr>
+            <a:spLocks noGrp="1"/>
+          </p:cNvSpPr>
+          <p:nvPr>
+            <p:ph type="sldNum" sz="quarter" idx="4294967295"/>
+          </p:nvPr>
+        </p:nvSpPr>
+        <p:spPr>
+          <a:xfrm>
+            <a:off x="365760" y="4709160"/>
+            <a:ext cx="548640" cy="274320"/>
+          </a:xfrm>
+          <a:prstGeom prst="rect">
+            <a:avLst/>
+          </a:prstGeom>
+          <a:extLst>
+            <a:ext uri="{C572A759-6A51-4108-AA02-DFA0A04FC94B}">
+              <ma14:wrappingTextBoxFlag xmlns:ma14="http://schemas.microsoft.com/office/mac/drawingml/2011/main" val="0"/>
+            </a:ext>
+          </a:extLst>
+        </p:spPr>
+        <p:txBody>
+          <a:bodyPr/>
+          <a:lstStyle>
+            <a:lvl1pPr>
+              <a:defRPr sz="1000">
+                <a:solidFill>
+                  <a:srgbClr val="6B6B6B"/>
+                </a:solidFill>
+              </a:defRPr>
+            </a:lvl1pPr>
+          </a:lstStyle>
+          <a:p>
+            <a:pPr algn="l"/>
+            <a:fld id="{F7021451-1387-4CA6-816F-3879F97B5CBC}" type="slidenum">
+              <a:rPr b="0" lang="en-US"/>
+              <a:t>30</a:t>
+            </a:fld>
+            <a:endParaRPr lang="en-US"/>
+          </a:p>
+        </p:txBody>
+      </p:sp>
+    </p:spTree>
+  </p:cSld>
+  <p:clrMapOvr>
+    <a:masterClrMapping/>
+  </p:clrMapOvr>
+</p:sld>
+</file>
+
+<file path=ppt/slides/slide31.xml><?xml version="1.0" encoding="utf-8"?>
+<p:sld xmlns:a="http://schemas.openxmlformats.org/drawingml/2006/main" xmlns:r="http://schemas.openxmlformats.org/officeDocument/2006/relationships" xmlns:p="http://schemas.openxmlformats.org/presentationml/2006/main">
+  <p:cSld name="Slide 31">
+    <p:spTree>
+      <p:nvGrpSpPr>
+        <p:cNvPr id="1" name=""/>
+        <p:cNvGrpSpPr/>
+        <p:nvPr/>
+      </p:nvGrpSpPr>
+      <p:grpSpPr>
+        <a:xfrm>
+          <a:off x="0" y="0"/>
+          <a:ext cx="0" cy="0"/>
+          <a:chOff x="0" y="0"/>
+          <a:chExt cx="0" cy="0"/>
+        </a:xfrm>
+      </p:grpSpPr>
+      <p:sp>
+        <p:nvSpPr>
+          <p:cNvPr id="2" name="Text 0"/>
+          <p:cNvSpPr txBox="1"/>
+          <p:nvPr/>
+        </p:nvSpPr>
+        <p:spPr>
+          <a:xfrm>
+            <a:off x="457200" y="457200"/>
+            <a:ext cx="7772400" cy="365760"/>
+          </a:xfrm>
+          <a:prstGeom prst="rect">
+            <a:avLst/>
+          </a:prstGeom>
+          <a:noFill/>
+          <a:ln/>
+        </p:spPr>
+        <p:txBody>
+          <a:bodyPr wrap="square" lIns="0" tIns="0" rIns="0" bIns="0" rtlCol="0" anchor="ctr"/>
+          <a:lstStyle/>
+          <a:p>
+            <a:pPr indent="0" marL="0">
+              <a:buNone/>
+            </a:pPr>
+            <a:r>
+              <a:rPr lang="en-US" sz="1400" b="1" spc="200" kern="0" dirty="0">
+                <a:solidFill>
+                  <a:srgbClr val="E8A55A"/>
+                </a:solidFill>
+              </a:rPr>
+              <a:t>CHECK YOUR UNDERSTANDING</a:t>
+            </a:r>
+            <a:endParaRPr lang="en-US" sz="1400" dirty="0"/>
+          </a:p>
+        </p:txBody>
+      </p:sp>
+      <p:sp>
+        <p:nvSpPr>
+          <p:cNvPr id="3" name="Text 1"/>
+          <p:cNvSpPr txBox="1"/>
+          <p:nvPr/>
+        </p:nvSpPr>
+        <p:spPr>
+          <a:xfrm>
+            <a:off x="457200" y="1005840"/>
+            <a:ext cx="7498080" cy="3108960"/>
+          </a:xfrm>
+          <a:prstGeom prst="rect">
+            <a:avLst/>
+          </a:prstGeom>
+          <a:noFill/>
+          <a:ln/>
+        </p:spPr>
+        <p:txBody>
+          <a:bodyPr wrap="square" lIns="0" tIns="0" rIns="0" bIns="0" rtlCol="0" anchor="t">
+            <a:normAutofit/>
+          </a:bodyPr>
+          <a:lstStyle/>
+          <a:p>
+            <a:pPr marL="342900" indent="-342900">
+              <a:spcAft>
+                <a:spcPts val="1400"/>
+              </a:spcAft>
+              <a:buSzPct val="100000"/>
+              <a:buFont typeface="+mj-lt"/>
+              <a:buAutoNum type="arabicPeriod" startAt="1"/>
+            </a:pPr>
+            <a:r>
+              <a:rPr lang="en-US" sz="2000" dirty="0">
+                <a:solidFill>
+                  <a:srgbClr val="FFFFFF"/>
+                </a:solidFill>
+              </a:rPr>
+              <a:t>​</a:t>
+            </a:r>
+            <a:r>
+              <a:rPr lang="en-US" sz="2000" dirty="0">
+                <a:solidFill>
+                  <a:srgbClr val="FFFFFF"/>
+                </a:solidFill>
+              </a:rPr>
+              <a:t>Where does a marimo cell's output appear?</a:t>
+            </a:r>
+            <a:endParaRPr lang="en-US" sz="2000" dirty="0"/>
+          </a:p>
+          <a:p>
+            <a:pPr marL="342900" indent="-342900">
+              <a:spcAft>
+                <a:spcPts val="1400"/>
+              </a:spcAft>
+              <a:buSzPct val="100000"/>
+              <a:buFont typeface="+mj-lt"/>
+              <a:buAutoNum type="arabicPeriod" startAt="1"/>
+            </a:pPr>
+            <a:r>
+              <a:rPr lang="en-US" sz="2000" dirty="0">
+                <a:solidFill>
+                  <a:srgbClr val="FFFFFF"/>
+                </a:solidFill>
+              </a:rPr>
+              <a:t>​</a:t>
+            </a:r>
+            <a:r>
+              <a:rPr lang="en-US" sz="2000" dirty="0">
+                <a:solidFill>
+                  <a:srgbClr val="FFFFFF"/>
+                </a:solidFill>
+              </a:rPr>
+              <a:t>What does </a:t>
+            </a:r>
+            <a:r>
+              <a:rPr lang="en-US" sz="1800" b="1" dirty="0">
+                <a:solidFill>
+                  <a:srgbClr val="E8A55A"/>
+                </a:solidFill>
+                <a:latin typeface="Courier New" pitchFamily="34" charset="0"/>
+                <a:ea typeface="Courier New" pitchFamily="34" charset="-122"/>
+                <a:cs typeface="Courier New" pitchFamily="34" charset="-120"/>
+              </a:rPr>
+              <a:t>games.shape</a:t>
+            </a:r>
+            <a:r>
+              <a:rPr lang="en-US" sz="2000" dirty="0">
+                <a:solidFill>
+                  <a:srgbClr val="FFFFFF"/>
+                </a:solidFill>
+              </a:rPr>
+              <a:t> tell us about our data?</a:t>
+            </a:r>
+            <a:endParaRPr lang="en-US" sz="2000" dirty="0"/>
+          </a:p>
+          <a:p>
+            <a:pPr marL="342900" indent="-342900">
+              <a:spcAft>
+                <a:spcPts val="1400"/>
+              </a:spcAft>
+              <a:buSzPct val="100000"/>
+              <a:buFont typeface="+mj-lt"/>
+              <a:buAutoNum type="arabicPeriod" startAt="1"/>
+            </a:pPr>
+            <a:r>
+              <a:rPr lang="en-US" sz="2000" dirty="0">
+                <a:solidFill>
+                  <a:srgbClr val="FFFFFF"/>
+                </a:solidFill>
+              </a:rPr>
+              <a:t>​</a:t>
+            </a:r>
+            <a:r>
+              <a:rPr lang="en-US" sz="2000" dirty="0">
+                <a:solidFill>
+                  <a:srgbClr val="FFFFFF"/>
+                </a:solidFill>
+              </a:rPr>
+              <a:t>Why is it a problem that </a:t>
+            </a:r>
+            <a:r>
+              <a:rPr lang="en-US" sz="1800" b="1" dirty="0">
+                <a:solidFill>
+                  <a:srgbClr val="E8A55A"/>
+                </a:solidFill>
+                <a:latin typeface="Courier New" pitchFamily="34" charset="0"/>
+                <a:ea typeface="Courier New" pitchFamily="34" charset="-122"/>
+                <a:cs typeface="Courier New" pitchFamily="34" charset="-120"/>
+              </a:rPr>
+              <a:t>Release date</a:t>
+            </a:r>
+            <a:r>
+              <a:rPr lang="en-US" sz="2000" dirty="0">
+                <a:solidFill>
+                  <a:srgbClr val="FFFFFF"/>
+                </a:solidFill>
+              </a:rPr>
+              <a:t> is a String?</a:t>
+            </a:r>
+            <a:endParaRPr lang="en-US" sz="2000" dirty="0"/>
+          </a:p>
+          <a:p>
+            <a:pPr marL="342900" indent="-342900">
+              <a:spcAft>
+                <a:spcPts val="1400"/>
+              </a:spcAft>
+              <a:buSzPct val="100000"/>
+              <a:buFont typeface="+mj-lt"/>
+              <a:buAutoNum type="arabicPeriod" startAt="1"/>
+            </a:pPr>
+            <a:r>
+              <a:rPr lang="en-US" sz="2000" dirty="0">
+                <a:solidFill>
+                  <a:srgbClr val="FFFFFF"/>
+                </a:solidFill>
+              </a:rPr>
+              <a:t>​</a:t>
+            </a:r>
+            <a:r>
+              <a:rPr lang="en-US" sz="2000" dirty="0">
+                <a:solidFill>
+                  <a:srgbClr val="FFFFFF"/>
+                </a:solidFill>
+              </a:rPr>
+              <a:t>What does it mean that marimo is reactive?</a:t>
+            </a:r>
+            <a:endParaRPr lang="en-US" sz="2000" dirty="0"/>
+          </a:p>
+          <a:p>
+            <a:pPr marL="342900" indent="-342900">
+              <a:spcAft>
+                <a:spcPts val="1400"/>
+              </a:spcAft>
+              <a:buSzPct val="100000"/>
+              <a:buFont typeface="+mj-lt"/>
+              <a:buAutoNum type="arabicPeriod" startAt="1"/>
+            </a:pPr>
+            <a:r>
+              <a:rPr lang="en-US" sz="2000" dirty="0">
+                <a:solidFill>
+                  <a:srgbClr val="FFFFFF"/>
+                </a:solidFill>
+              </a:rPr>
+              <a:t>​</a:t>
+            </a:r>
+            <a:r>
+              <a:rPr lang="en-US" sz="2000" dirty="0">
+                <a:solidFill>
+                  <a:srgbClr val="FFFFFF"/>
+                </a:solidFill>
+              </a:rPr>
+              <a:t>Why does marimo refuse to run a second cell that creates </a:t>
+            </a:r>
+            <a:r>
+              <a:rPr lang="en-US" sz="1800" b="1" dirty="0">
+                <a:solidFill>
+                  <a:srgbClr val="E8A55A"/>
+                </a:solidFill>
+                <a:latin typeface="Courier New" pitchFamily="34" charset="0"/>
+                <a:ea typeface="Courier New" pitchFamily="34" charset="-122"/>
+                <a:cs typeface="Courier New" pitchFamily="34" charset="-120"/>
+              </a:rPr>
+              <a:t>sample_size</a:t>
+            </a:r>
+            <a:r>
+              <a:rPr lang="en-US" sz="2000" dirty="0">
+                <a:solidFill>
+                  <a:srgbClr val="FFFFFF"/>
+                </a:solidFill>
+              </a:rPr>
+              <a:t>?</a:t>
+            </a:r>
+            <a:endParaRPr lang="en-US" sz="2000" dirty="0"/>
+          </a:p>
+        </p:txBody>
+      </p:sp>
+      <p:sp>
+        <p:nvSpPr>
+          <p:cNvPr id="25" name="Slide Number Placeholder 0"/>
+          <p:cNvSpPr>
+            <a:spLocks noGrp="1"/>
+          </p:cNvSpPr>
+          <p:nvPr>
+            <p:ph type="sldNum" sz="quarter" idx="4294967295"/>
+          </p:nvPr>
+        </p:nvSpPr>
+        <p:spPr>
+          <a:xfrm>
+            <a:off x="365760" y="4709160"/>
+            <a:ext cx="548640" cy="274320"/>
+          </a:xfrm>
+          <a:prstGeom prst="rect">
+            <a:avLst/>
+          </a:prstGeom>
+          <a:extLst>
+            <a:ext uri="{C572A759-6A51-4108-AA02-DFA0A04FC94B}">
+              <ma14:wrappingTextBoxFlag xmlns:ma14="http://schemas.microsoft.com/office/mac/drawingml/2011/main" val="0"/>
+            </a:ext>
+          </a:extLst>
+        </p:spPr>
+        <p:txBody>
+          <a:bodyPr/>
+          <a:lstStyle>
+            <a:lvl1pPr>
+              <a:defRPr sz="1000">
+                <a:solidFill>
+                  <a:srgbClr val="F7EFE6"/>
+                </a:solidFill>
+              </a:defRPr>
+            </a:lvl1pPr>
+          </a:lstStyle>
+          <a:p>
+            <a:pPr algn="l"/>
+            <a:fld id="{F7021451-1387-4CA6-816F-3879F97B5CBC}" type="slidenum">
+              <a:rPr b="0" lang="en-US"/>
+              <a:t>31</a:t>
+            </a:fld>
+            <a:endParaRPr lang="en-US"/>
+          </a:p>
+        </p:txBody>
+      </p:sp>
+    </p:spTree>
+  </p:cSld>
+  <p:clrMapOvr>
+    <a:masterClrMapping/>
+  </p:clrMapOvr>
+</p:sld>
+</file>
+
+<file path=ppt/slides/slide32.xml><?xml version="1.0" encoding="utf-8"?>
+<p:sld xmlns:a="http://schemas.openxmlformats.org/drawingml/2006/main" xmlns:r="http://schemas.openxmlformats.org/officeDocument/2006/relationships" xmlns:p="http://schemas.openxmlformats.org/presentationml/2006/main">
+  <p:cSld name="Slide 32">
+    <p:spTree>
+      <p:nvGrpSpPr>
+        <p:cNvPr id="1" name=""/>
+        <p:cNvGrpSpPr/>
+        <p:nvPr/>
+      </p:nvGrpSpPr>
+      <p:grpSpPr>
+        <a:xfrm>
+          <a:off x="0" y="0"/>
+          <a:ext cx="0" cy="0"/>
+          <a:chOff x="0" y="0"/>
+          <a:chExt cx="0" cy="0"/>
+        </a:xfrm>
+      </p:grpSpPr>
+      <p:sp>
+        <p:nvSpPr>
+          <p:cNvPr id="2" name="Title"/>
+          <p:cNvSpPr txBox="1"/>
+          <p:nvPr/>
+        </p:nvSpPr>
+        <p:spPr>
+          <a:xfrm>
+            <a:off x="457200" y="274320"/>
+            <a:ext cx="8229600" cy="640080"/>
+          </a:xfrm>
+          <a:prstGeom prst="rect">
+            <a:avLst/>
+          </a:prstGeom>
+          <a:noFill/>
+          <a:ln/>
+        </p:spPr>
+        <p:txBody>
+          <a:bodyPr wrap="square" lIns="0" tIns="0" rIns="0" bIns="0" rtlCol="0" anchor="ctr">
+            <a:normAutofit/>
+          </a:bodyPr>
+          <a:lstStyle/>
+          <a:p>
+            <a:pPr indent="0" marL="0">
+              <a:buNone/>
+            </a:pPr>
+            <a:r>
+              <a:rPr lang="en-US" sz="2800" b="1" dirty="0">
+                <a:solidFill>
+                  <a:srgbClr val="4E342E"/>
+                </a:solidFill>
+              </a:rPr>
               <a:t>Your data story</a:t>
             </a:r>
             <a:endParaRPr lang="en-US" sz="2800" dirty="0"/>
@@ -12305,7 +13443,7 @@
             <a:pPr algn="l"/>
             <a:fld id="{F7021451-1387-4CA6-816F-3879F97B5CBC}" type="slidenum">
               <a:rPr b="0" lang="en-US"/>
-              <a:t>30</a:t>
+              <a:t>32</a:t>
             </a:fld>
             <a:endParaRPr lang="en-US"/>
           </a:p>
@@ -13798,7 +14936,7 @@
                   <a:srgbClr val="2B1D19"/>
                 </a:solidFill>
               </a:rPr>
-              <a:t>above</a:t>
+              <a:t>below</a:t>
             </a:r>
             <a:r>
               <a:rPr lang="en-US" sz="1500" dirty="0">

--- a/slides/02_Exploring_Our_Data.pptx
+++ b/slides/02_Exploring_Our_Data.pptx
@@ -37,9 +37,10 @@
     <p:sldId id="285" r:id="rId31"/>
     <p:sldId id="286" r:id="rId32"/>
     <p:sldId id="287" r:id="rId33"/>
+    <p:sldId id="288" r:id="rId34"/>
   </p:sldIdLst>
   <p:notesMasterIdLst>
-    <p:notesMasterId r:id="rId34"/>
+    <p:notesMasterId r:id="rId35"/>
   </p:notesMasterIdLst>
   <p:sldSz cx="9144000" cy="5143500"/>
   <p:notesSz cx="5143500" cy="9144000"/>
@@ -138,7 +139,7 @@
   <p:extLst>
     <p:ext uri="{521415D9-36F7-43E2-AB2F-B90AF26B5E84}">
       <p14:sectionLst xmlns:p14="http://schemas.microsoft.com/office/powerpoint/2010/main">
-        <p14:section name="Introduction" id="{04e42105-5e48-8f3b-40be-28853d7fdc93}">
+        <p14:section name="Introduction" id="{d37e50e1-c286-5066-d605-e1d589b93c28}">
           <p14:sldIdLst>
             <p14:sldId id="256"/>
             <p14:sldId id="257"/>
@@ -147,7 +148,7 @@
             <p14:sldId id="260"/>
           </p14:sldIdLst>
         </p14:section>
-        <p14:section name="Notebooks and cells" id="{ce8a7632-711e-ff44-1bdb-0764a3879c29}">
+        <p14:section name="Notebooks and cells" id="{284a81c6-adfd-fff3-d8ba-2b2fabd2fa17}">
           <p14:sldIdLst>
             <p14:sldId id="261"/>
             <p14:sldId id="262"/>
@@ -155,26 +156,26 @@
             <p14:sldId id="264"/>
           </p14:sldIdLst>
         </p14:section>
-        <p14:section name="Import Polars" id="{03b8ccea-c216-11f9-69d3-141fa5361b0c}">
+        <p14:section name="Import Polars" id="{5855ee4d-93bb-20c1-c36c-cef24c30460a}">
           <p14:sldIdLst>
             <p14:sldId id="265"/>
             <p14:sldId id="266"/>
           </p14:sldIdLst>
         </p14:section>
-        <p14:section name="Load the data" id="{5fd0a0a4-2043-99b6-38a2-21705fb413d6}">
+        <p14:section name="Load the data" id="{bc61788b-970f-b4e0-810f-f2bac39f2637}">
           <p14:sldIdLst>
             <p14:sldId id="267"/>
             <p14:sldId id="268"/>
             <p14:sldId id="269"/>
           </p14:sldIdLst>
         </p14:section>
-        <p14:section name="How big is our data?" id="{16fcd5c4-9c8c-5e9d-166a-dd1252392d24}">
+        <p14:section name="How big is our data?" id="{6891dde6-777b-8665-231e-d99339fa3c02}">
           <p14:sldIdLst>
             <p14:sldId id="270"/>
             <p14:sldId id="271"/>
           </p14:sldIdLst>
         </p14:section>
-        <p14:section name="What kind of data is in each column?" id="{5d36351a-08ed-1c9e-2356-4147c11b066b}">
+        <p14:section name="What kind of data is in each column?" id="{240d5517-917e-1154-a471-0852410e0b98}">
           <p14:sldIdLst>
             <p14:sldId id="272"/>
             <p14:sldId id="273"/>
@@ -184,7 +185,7 @@
             <p14:sldId id="277"/>
           </p14:sldIdLst>
         </p14:section>
-        <p14:section name="Reactive cells" id="{5fa6632d-43b4-54b0-9412-98b97b4f8a96}">
+        <p14:section name="Reactive cells" id="{a21a4935-abed-81e4-2b5f-e5bb4e02803c}">
           <p14:sldIdLst>
             <p14:sldId id="278"/>
             <p14:sldId id="279"/>
@@ -193,17 +194,18 @@
             <p14:sldId id="282"/>
           </p14:sldIdLst>
         </p14:section>
-        <p14:section name="Exploring with the table viewer" id="{88472f26-46a1-bed6-e332-fa37e93a48a7}">
+        <p14:section name="Exploring with the table viewer" id="{49fef23b-a406-ee23-4224-93444fa163a5}">
           <p14:sldIdLst>
             <p14:sldId id="283"/>
             <p14:sldId id="284"/>
             <p14:sldId id="285"/>
+            <p14:sldId id="286"/>
           </p14:sldIdLst>
         </p14:section>
-        <p14:section name="Wrap up" id="{ee61534c-22b8-dc40-8d33-79550d126d52}">
+        <p14:section name="Wrap up" id="{7d9f2520-65b2-7dc9-529f-79d45a9ba55c}">
           <p14:sldIdLst>
-            <p14:sldId id="286"/>
             <p14:sldId id="287"/>
+            <p14:sldId id="288"/>
           </p14:sldIdLst>
         </p14:section>
       </p14:sectionLst>
@@ -2370,7 +2372,7 @@
           <a:p>
             <a:r>
               <a:rPr lang="en-US" dirty="0"/>
-              <a:t>Scroll back up to the games cell.</a:t>
+              <a:t>The table from loading games is now far up the notebook, and head only shows a few rows.</a:t>
             </a:r>
             <a:endParaRPr lang="en-US" dirty="0"/>
           </a:p>
@@ -2458,7 +2460,7 @@
           <a:p>
             <a:r>
               <a:rPr lang="en-US" dirty="0"/>
-              <a:t>Demonstrate each feature on the projector before students try the modify tasks.</a:t>
+              <a:t>Some students worry this breaks the one variable, one cell rule. It doesn't: showing a variable isn't creating it.</a:t>
             </a:r>
             <a:endParaRPr lang="en-US" dirty="0"/>
           </a:p>
@@ -2634,7 +2636,7 @@
           <a:p>
             <a:r>
               <a:rPr lang="en-US" dirty="0"/>
-              <a:t>Hollow Knight has 403,641 positive and 12,305 negative reviews. For task 3, don't give the answer yet: we look into those 0 scores next lesson. Free games really do cost 0.</a:t>
+              <a:t>Demonstrate each feature on the projector before students try the modify tasks.</a:t>
             </a:r>
             <a:endParaRPr lang="en-US" dirty="0"/>
           </a:p>
@@ -2722,13 +2724,7 @@
           <a:p>
             <a:r>
               <a:rPr lang="en-US" dirty="0"/>
-              <a:t>Cold-call or use mini whiteboards.
-Answers:
-1. Below its code.
-2. The number of rows (10,250 games) and columns (13).
-3. We can't sort text dates into the right order or work out which year a game came out.
-4. Changing a cell automatically re-runs every cell that uses its variables.
-5. Each variable can only be created in one cell, otherwise marimo can't tell which value it should have.</a:t>
+              <a:t>Hollow Knight has 403,641 positive and 12,305 negative reviews. For task 3, don't give the answer yet: we look into those 0 scores next lesson. Free games really do cost 0.</a:t>
             </a:r>
             <a:endParaRPr lang="en-US" dirty="0"/>
           </a:p>
@@ -2816,7 +2812,13 @@
           <a:p>
             <a:r>
               <a:rPr lang="en-US" dirty="0"/>
-              <a:t>Students use the table viewer for this. The strange things they note are clues for Behind the Scenes.</a:t>
+              <a:t>Cold-call or use mini whiteboards.
+Answers:
+1. Below its code.
+2. The number of rows (10,250 games) and columns (13).
+3. We can't sort text dates into the right order or work out which year a game came out.
+4. Changing a cell automatically re-runs every cell that uses its variables.
+5. Each variable can only be created in one cell, otherwise marimo can't tell which value it should have.</a:t>
             </a:r>
             <a:endParaRPr lang="en-US" dirty="0"/>
           </a:p>
@@ -2840,6 +2842,94 @@
             <a:fld id="{F7021451-1387-4CA6-816F-3879F97B5CBC}" type="slidenum">
               <a:rPr lang="en-US"/>
               <a:t>32</a:t>
+            </a:fld>
+            <a:endParaRPr lang="en-US"/>
+          </a:p>
+        </p:txBody>
+      </p:sp>
+    </p:spTree>
+    <p:extLst>
+      <p:ext uri="{BB962C8B-B14F-4D97-AF65-F5344CB8AC3E}">
+        <p14:creationId xmlns:p14="http://schemas.microsoft.com/office/powerpoint/2010/main" val="1024086991"/>
+      </p:ext>
+    </p:extLst>
+  </p:cSld>
+  <p:clrMapOvr>
+    <a:masterClrMapping/>
+  </p:clrMapOvr>
+</p:notes>
+</file>
+
+<file path=ppt/notesSlides/notesSlide33.xml><?xml version="1.0" encoding="utf-8"?>
+<p:notes xmlns:a="http://schemas.openxmlformats.org/drawingml/2006/main" xmlns:r="http://schemas.openxmlformats.org/officeDocument/2006/relationships" xmlns:p="http://schemas.openxmlformats.org/presentationml/2006/main">
+  <p:cSld>
+    <p:spTree>
+      <p:nvGrpSpPr>
+        <p:cNvPr id="1" name=""/>
+        <p:cNvGrpSpPr/>
+        <p:nvPr/>
+      </p:nvGrpSpPr>
+      <p:grpSpPr>
+        <a:xfrm>
+          <a:off x="0" y="0"/>
+          <a:ext cx="0" cy="0"/>
+          <a:chOff x="0" y="0"/>
+          <a:chExt cx="0" cy="0"/>
+        </a:xfrm>
+      </p:grpSpPr>
+      <p:sp>
+        <p:nvSpPr>
+          <p:cNvPr id="2" name="Slide Image Placeholder 1"/>
+          <p:cNvSpPr>
+            <a:spLocks noGrp="1" noRot="1" noChangeAspect="1"/>
+          </p:cNvSpPr>
+          <p:nvPr>
+            <p:ph type="sldImg"/>
+          </p:nvPr>
+        </p:nvSpPr>
+        <p:spPr/>
+      </p:sp>
+      <p:sp>
+        <p:nvSpPr>
+          <p:cNvPr id="3" name="Notes Placeholder 2"/>
+          <p:cNvSpPr>
+            <a:spLocks noGrp="1"/>
+          </p:cNvSpPr>
+          <p:nvPr>
+            <p:ph type="body" idx="1"/>
+          </p:nvPr>
+        </p:nvSpPr>
+        <p:spPr/>
+        <p:txBody>
+          <a:bodyPr/>
+          <a:lstStyle/>
+          <a:p>
+            <a:r>
+              <a:rPr lang="en-US" dirty="0"/>
+              <a:t>Students use the table viewer for this. The strange things they note are clues for Behind the Scenes.</a:t>
+            </a:r>
+            <a:endParaRPr lang="en-US" dirty="0"/>
+          </a:p>
+        </p:txBody>
+      </p:sp>
+      <p:sp>
+        <p:nvSpPr>
+          <p:cNvPr id="4" name="Slide Number Placeholder 3"/>
+          <p:cNvSpPr>
+            <a:spLocks noGrp="1"/>
+          </p:cNvSpPr>
+          <p:nvPr>
+            <p:ph type="sldNum" sz="quarter" idx="10"/>
+          </p:nvPr>
+        </p:nvSpPr>
+        <p:spPr/>
+        <p:txBody>
+          <a:bodyPr/>
+          <a:lstStyle/>
+          <a:p>
+            <a:fld id="{F7021451-1387-4CA6-816F-3879F97B5CBC}" type="slidenum">
+              <a:rPr lang="en-US"/>
+              <a:t>33</a:t>
             </a:fld>
             <a:endParaRPr lang="en-US"/>
           </a:p>
@@ -11808,7 +11898,7 @@
                   <a:srgbClr val="F7EFE6"/>
                 </a:solidFill>
               </a:rPr>
-              <a:t>The table marimo shows for </a:t>
+              <a:t>To explore the whole dataset, we bring the full </a:t>
             </a:r>
             <a:r>
               <a:rPr lang="en-US" sz="1600" b="1" dirty="0">
@@ -11827,7 +11917,7 @@
                   <a:srgbClr val="F7EFE6"/>
                 </a:solidFill>
               </a:rPr>
-              <a:t> isn't just a picture: it's a tool for exploring.</a:t>
+              <a:t> table back right here.</a:t>
             </a:r>
             <a:endParaRPr lang="en-US" sz="1800" dirty="0"/>
           </a:p>
@@ -11935,7 +12025,7 @@
                   <a:srgbClr val="4E342E"/>
                 </a:solidFill>
               </a:rPr>
-              <a:t>What the table viewer can do</a:t>
+              <a:t>Show the whole table again</a:t>
             </a:r>
             <a:endParaRPr lang="en-US" sz="2800" dirty="0"/>
           </a:p>
@@ -11943,14 +12033,215 @@
       </p:sp>
       <p:sp>
         <p:nvSpPr>
-          <p:cNvPr id="3" name="Text 1"/>
+          <p:cNvPr id="3" name="Code panel"/>
+          <p:cNvSpPr/>
+          <p:nvPr/>
+        </p:nvSpPr>
+        <p:spPr>
+          <a:xfrm>
+            <a:off x="457200" y="1051560"/>
+            <a:ext cx="3840480" cy="786765"/>
+          </a:xfrm>
+          <a:prstGeom prst="roundRect">
+            <a:avLst>
+              <a:gd name="adj" fmla="val 6973"/>
+            </a:avLst>
+          </a:prstGeom>
+          <a:solidFill>
+            <a:srgbClr val="2B1D19"/>
+          </a:solidFill>
+          <a:ln w="12700">
+            <a:solidFill>
+              <a:srgbClr val="2B1D19"/>
+            </a:solidFill>
+            <a:prstDash val="solid"/>
+          </a:ln>
+        </p:spPr>
+      </p:sp>
+      <p:sp>
+        <p:nvSpPr>
+          <p:cNvPr id="4" name="Text 2"/>
           <p:cNvSpPr txBox="1"/>
           <p:nvPr/>
         </p:nvSpPr>
         <p:spPr>
           <a:xfrm>
-            <a:off x="457200" y="1097280"/>
-            <a:ext cx="8229600" cy="3383280"/>
+            <a:off x="640080" y="1161288"/>
+            <a:ext cx="3474720" cy="274320"/>
+          </a:xfrm>
+          <a:prstGeom prst="rect">
+            <a:avLst/>
+          </a:prstGeom>
+          <a:noFill/>
+          <a:ln/>
+        </p:spPr>
+        <p:txBody>
+          <a:bodyPr wrap="square" lIns="0" tIns="0" rIns="0" bIns="0" rtlCol="0" anchor="ctr"/>
+          <a:lstStyle/>
+          <a:p>
+            <a:pPr indent="0" marL="0">
+              <a:buNone/>
+            </a:pPr>
+            <a:r>
+              <a:rPr lang="en-US" sz="1200" b="1" dirty="0">
+                <a:solidFill>
+                  <a:srgbClr val="E8A55A"/>
+                </a:solidFill>
+              </a:rPr>
+              <a:t>clean_steam.py — new cell</a:t>
+            </a:r>
+            <a:endParaRPr lang="en-US" sz="1200" dirty="0"/>
+          </a:p>
+        </p:txBody>
+      </p:sp>
+      <p:sp>
+        <p:nvSpPr>
+          <p:cNvPr id="5" name="Code"/>
+          <p:cNvSpPr txBox="1"/>
+          <p:nvPr/>
+        </p:nvSpPr>
+        <p:spPr>
+          <a:xfrm>
+            <a:off x="594360" y="1508760"/>
+            <a:ext cx="3566160" cy="267970"/>
+          </a:xfrm>
+          <a:prstGeom prst="rect">
+            <a:avLst/>
+          </a:prstGeom>
+          <a:noFill/>
+          <a:ln/>
+        </p:spPr>
+        <p:txBody>
+          <a:bodyPr wrap="square" lIns="0" tIns="0" rIns="0" bIns="0" rtlCol="0" anchor="t"/>
+          <a:lstStyle/>
+          <a:p>
+            <a:pPr indent="0" marL="0">
+              <a:lnSpc>
+                <a:spcPts val="1750"/>
+              </a:lnSpc>
+              <a:buNone/>
+            </a:pPr>
+            <a:r>
+              <a:rPr lang="en-US" sz="1400" dirty="0">
+                <a:solidFill>
+                  <a:srgbClr val="9C8A80"/>
+                </a:solidFill>
+                <a:latin typeface="Courier New" pitchFamily="34" charset="0"/>
+                <a:ea typeface="Courier New" pitchFamily="34" charset="-122"/>
+                <a:cs typeface="Courier New" pitchFamily="34" charset="-120"/>
+              </a:rPr>
+              <a:t> 1  </a:t>
+            </a:r>
+            <a:r>
+              <a:rPr lang="en-US" sz="1400" dirty="0">
+                <a:solidFill>
+                  <a:srgbClr val="F7EFE6"/>
+                </a:solidFill>
+                <a:latin typeface="Courier New" pitchFamily="34" charset="0"/>
+                <a:ea typeface="Courier New" pitchFamily="34" charset="-122"/>
+                <a:cs typeface="Courier New" pitchFamily="34" charset="-120"/>
+              </a:rPr>
+              <a:t>games</a:t>
+            </a:r>
+            <a:endParaRPr lang="en-US" sz="1400" dirty="0"/>
+          </a:p>
+        </p:txBody>
+      </p:sp>
+      <p:sp>
+        <p:nvSpPr>
+          <p:cNvPr id="6" name="Text 4"/>
+          <p:cNvSpPr txBox="1"/>
+          <p:nvPr/>
+        </p:nvSpPr>
+        <p:spPr>
+          <a:xfrm>
+            <a:off x="457200" y="1929765"/>
+            <a:ext cx="3840480" cy="384048"/>
+          </a:xfrm>
+          <a:prstGeom prst="rect">
+            <a:avLst/>
+          </a:prstGeom>
+          <a:noFill/>
+          <a:ln/>
+        </p:spPr>
+        <p:txBody>
+          <a:bodyPr wrap="square" lIns="0" tIns="0" rIns="0" bIns="0" rtlCol="0" anchor="ctr">
+            <a:normAutofit/>
+          </a:bodyPr>
+          <a:lstStyle/>
+          <a:p>
+            <a:pPr indent="0" marL="0">
+              <a:spcAft>
+                <a:spcPts val="800"/>
+              </a:spcAft>
+              <a:buNone/>
+            </a:pPr>
+            <a:r>
+              <a:rPr lang="en-US" sz="1500" dirty="0">
+                <a:solidFill>
+                  <a:srgbClr val="2B1D19"/>
+                </a:solidFill>
+              </a:rPr>
+              <a:t>​</a:t>
+            </a:r>
+            <a:r>
+              <a:rPr lang="en-US" sz="1500" dirty="0">
+                <a:solidFill>
+                  <a:srgbClr val="2B1D19"/>
+                </a:solidFill>
+              </a:rPr>
+              <a:t>All 10,250 games appear in the table viewer below the cell.</a:t>
+            </a:r>
+            <a:endParaRPr lang="en-US" sz="1500" dirty="0"/>
+          </a:p>
+        </p:txBody>
+      </p:sp>
+      <p:sp>
+        <p:nvSpPr>
+          <p:cNvPr id="7" name="Text 5"/>
+          <p:cNvSpPr txBox="1"/>
+          <p:nvPr/>
+        </p:nvSpPr>
+        <p:spPr>
+          <a:xfrm>
+            <a:off x="4572000" y="1051560"/>
+            <a:ext cx="4114800" cy="320040"/>
+          </a:xfrm>
+          <a:prstGeom prst="rect">
+            <a:avLst/>
+          </a:prstGeom>
+          <a:noFill/>
+          <a:ln/>
+        </p:spPr>
+        <p:txBody>
+          <a:bodyPr wrap="square" lIns="0" tIns="0" rIns="0" bIns="0" rtlCol="0" anchor="ctr"/>
+          <a:lstStyle/>
+          <a:p>
+            <a:pPr indent="0" marL="0">
+              <a:buNone/>
+            </a:pPr>
+            <a:r>
+              <a:rPr lang="en-US" sz="1400" b="1" dirty="0">
+                <a:solidFill>
+                  <a:srgbClr val="B86E1E"/>
+                </a:solidFill>
+              </a:rPr>
+              <a:t>Why</a:t>
+            </a:r>
+            <a:endParaRPr lang="en-US" sz="1400" dirty="0"/>
+          </a:p>
+        </p:txBody>
+      </p:sp>
+      <p:sp>
+        <p:nvSpPr>
+          <p:cNvPr id="8" name="Text 6"/>
+          <p:cNvSpPr txBox="1"/>
+          <p:nvPr/>
+        </p:nvSpPr>
+        <p:spPr>
+          <a:xfrm>
+            <a:off x="4572000" y="1399032"/>
+            <a:ext cx="4114800" cy="3017520"/>
           </a:xfrm>
           <a:prstGeom prst="rect">
             <a:avLst/>
@@ -11964,15 +12255,14 @@
           </a:bodyPr>
           <a:lstStyle/>
           <a:p>
-            <a:pPr marL="342900" indent="-342900">
+            <a:pPr indent="0" marL="0">
               <a:spcAft>
                 <a:spcPts val="800"/>
               </a:spcAft>
-              <a:buSzPct val="100000"/>
-              <a:buChar char="•"/>
-            </a:pPr>
-            <a:r>
-              <a:rPr lang="en-US" sz="1700" dirty="0">
+              <a:buNone/>
+            </a:pPr>
+            <a:r>
+              <a:rPr lang="en-US" sz="1500" dirty="0">
                 <a:solidFill>
                   <a:srgbClr val="2B1D19"/>
                 </a:solidFill>
@@ -11980,124 +12270,33 @@
               <a:t>​</a:t>
             </a:r>
             <a:r>
-              <a:rPr lang="en-US" sz="1700" b="1" dirty="0">
-                <a:solidFill>
-                  <a:srgbClr val="2B1D19"/>
-                </a:solidFill>
-              </a:rPr>
-              <a:t>scroll</a:t>
-            </a:r>
-            <a:r>
-              <a:rPr lang="en-US" sz="1700" dirty="0">
-                <a:solidFill>
-                  <a:srgbClr val="2B1D19"/>
-                </a:solidFill>
-              </a:rPr>
-              <a:t> across all 13 columns; page buttons move through the rows</a:t>
-            </a:r>
-            <a:endParaRPr lang="en-US" sz="1700" dirty="0"/>
-          </a:p>
-          <a:p>
-            <a:pPr marL="342900" indent="-342900">
-              <a:spcAft>
-                <a:spcPts val="800"/>
-              </a:spcAft>
-              <a:buSzPct val="100000"/>
-              <a:buChar char="•"/>
-            </a:pPr>
-            <a:r>
-              <a:rPr lang="en-US" sz="1700" dirty="0">
-                <a:solidFill>
-                  <a:srgbClr val="2B1D19"/>
-                </a:solidFill>
-              </a:rPr>
-              <a:t>​</a:t>
-            </a:r>
-            <a:r>
-              <a:rPr lang="en-US" sz="1700" b="1" dirty="0">
-                <a:solidFill>
-                  <a:srgbClr val="2B1D19"/>
-                </a:solidFill>
-              </a:rPr>
-              <a:t>sort</a:t>
-            </a:r>
-            <a:r>
-              <a:rPr lang="en-US" sz="1700" dirty="0">
-                <a:solidFill>
-                  <a:srgbClr val="2B1D19"/>
-                </a:solidFill>
-              </a:rPr>
-              <a:t> by a column, by clicking its heading</a:t>
-            </a:r>
-            <a:endParaRPr lang="en-US" sz="1700" dirty="0"/>
-          </a:p>
-          <a:p>
-            <a:pPr marL="342900" indent="-342900">
-              <a:spcAft>
-                <a:spcPts val="800"/>
-              </a:spcAft>
-              <a:buSzPct val="100000"/>
-              <a:buChar char="•"/>
-            </a:pPr>
-            <a:r>
-              <a:rPr lang="en-US" sz="1700" dirty="0">
-                <a:solidFill>
-                  <a:srgbClr val="2B1D19"/>
-                </a:solidFill>
-              </a:rPr>
-              <a:t>​</a:t>
-            </a:r>
-            <a:r>
-              <a:rPr lang="en-US" sz="1700" b="1" dirty="0">
-                <a:solidFill>
-                  <a:srgbClr val="2B1D19"/>
-                </a:solidFill>
-              </a:rPr>
-              <a:t>search</a:t>
-            </a:r>
-            <a:r>
-              <a:rPr lang="en-US" sz="1700" dirty="0">
-                <a:solidFill>
-                  <a:srgbClr val="2B1D19"/>
-                </a:solidFill>
-              </a:rPr>
-              <a:t> for a value, using the search box above the table</a:t>
-            </a:r>
-            <a:endParaRPr lang="en-US" sz="1700" dirty="0"/>
-          </a:p>
-          <a:p>
-            <a:pPr marL="342900" indent="-342900">
-              <a:spcAft>
-                <a:spcPts val="800"/>
-              </a:spcAft>
-              <a:buSzPct val="100000"/>
-              <a:buChar char="•"/>
-            </a:pPr>
-            <a:r>
-              <a:rPr lang="en-US" sz="1700" dirty="0">
-                <a:solidFill>
-                  <a:srgbClr val="2B1D19"/>
-                </a:solidFill>
-              </a:rPr>
-              <a:t>​</a:t>
-            </a:r>
-            <a:r>
-              <a:rPr lang="en-US" sz="1700" b="1" dirty="0">
-                <a:solidFill>
-                  <a:srgbClr val="2B1D19"/>
-                </a:solidFill>
-              </a:rPr>
-              <a:t>see a summary</a:t>
-            </a:r>
-            <a:r>
-              <a:rPr lang="en-US" sz="1700" dirty="0">
-                <a:solidFill>
-                  <a:srgbClr val="2B1D19"/>
-                </a:solidFill>
-              </a:rPr>
-              <a:t> of a column, such as its smallest and largest values</a:t>
-            </a:r>
-            <a:endParaRPr lang="en-US" sz="1700" dirty="0"/>
+              <a:rPr lang="en-US" sz="1500" dirty="0">
+                <a:solidFill>
+                  <a:srgbClr val="2B1D19"/>
+                </a:solidFill>
+              </a:rPr>
+              <a:t>A cell's output is the value of its last line, so a cell holding just </a:t>
+            </a:r>
+            <a:r>
+              <a:rPr lang="en-US" sz="1300" b="1" dirty="0">
+                <a:solidFill>
+                  <a:srgbClr val="B86E1E"/>
+                </a:solidFill>
+                <a:latin typeface="Courier New" pitchFamily="34" charset="0"/>
+                <a:ea typeface="Courier New" pitchFamily="34" charset="-122"/>
+                <a:cs typeface="Courier New" pitchFamily="34" charset="-120"/>
+              </a:rPr>
+              <a:t>games</a:t>
+            </a:r>
+            <a:r>
+              <a:rPr lang="en-US" sz="1500" dirty="0">
+                <a:solidFill>
+                  <a:srgbClr val="2B1D19"/>
+                </a:solidFill>
+              </a:rPr>
+              <a:t> shows the whole DataFrame. It doesn't create a variable, so marimo is happy for it to be in another cell.</a:t>
+            </a:r>
+            <a:endParaRPr lang="en-US" sz="1500" dirty="0"/>
           </a:p>
         </p:txBody>
       </p:sp>
@@ -12534,7 +12733,7 @@
                   <a:srgbClr val="4E342E"/>
                 </a:solidFill>
               </a:rPr>
-              <a:t>Explore with the table viewer</a:t>
+              <a:t>What the table viewer can do</a:t>
             </a:r>
             <a:endParaRPr lang="en-US" sz="2800" dirty="0"/>
           </a:p>
@@ -12542,77 +12741,14 @@
       </p:sp>
       <p:sp>
         <p:nvSpPr>
-          <p:cNvPr id="3" name="primm box"/>
-          <p:cNvSpPr/>
-          <p:nvPr/>
-        </p:nvSpPr>
-        <p:spPr>
-          <a:xfrm>
-            <a:off x="457200" y="1051560"/>
-            <a:ext cx="8229600" cy="3078480"/>
-          </a:xfrm>
-          <a:prstGeom prst="roundRect">
-            <a:avLst>
-              <a:gd name="adj" fmla="val 2376"/>
-            </a:avLst>
-          </a:prstGeom>
-          <a:solidFill>
-            <a:srgbClr val="E6F2E6"/>
-          </a:solidFill>
-          <a:ln w="12700">
-            <a:solidFill>
-              <a:srgbClr val="E6F2E6"/>
-            </a:solidFill>
-            <a:prstDash val="solid"/>
-          </a:ln>
-        </p:spPr>
-      </p:sp>
-      <p:sp>
-        <p:nvSpPr>
-          <p:cNvPr id="4" name="Text 2"/>
+          <p:cNvPr id="3" name="Text 1"/>
           <p:cNvSpPr txBox="1"/>
           <p:nvPr/>
         </p:nvSpPr>
         <p:spPr>
           <a:xfrm>
-            <a:off x="685800" y="1188720"/>
-            <a:ext cx="7772400" cy="365760"/>
-          </a:xfrm>
-          <a:prstGeom prst="rect">
-            <a:avLst/>
-          </a:prstGeom>
-          <a:noFill/>
-          <a:ln/>
-        </p:spPr>
-        <p:txBody>
-          <a:bodyPr wrap="square" lIns="0" tIns="0" rIns="0" bIns="0" rtlCol="0" anchor="ctr"/>
-          <a:lstStyle/>
-          <a:p>
-            <a:pPr indent="0" marL="0">
-              <a:buNone/>
-            </a:pPr>
-            <a:r>
-              <a:rPr lang="en-US" sz="1600" b="1" dirty="0">
-                <a:solidFill>
-                  <a:srgbClr val="2E6B30"/>
-                </a:solidFill>
-              </a:rPr>
-              <a:t>PRIMM</a:t>
-            </a:r>
-            <a:endParaRPr lang="en-US" sz="1600" dirty="0"/>
-          </a:p>
-        </p:txBody>
-      </p:sp>
-      <p:sp>
-        <p:nvSpPr>
-          <p:cNvPr id="5" name="Text 3"/>
-          <p:cNvSpPr txBox="1"/>
-          <p:nvPr/>
-        </p:nvSpPr>
-        <p:spPr>
-          <a:xfrm>
-            <a:off x="685800" y="1600200"/>
-            <a:ext cx="7772400" cy="2392680"/>
+            <a:off x="457200" y="1097280"/>
+            <a:ext cx="8229600" cy="3383280"/>
           </a:xfrm>
           <a:prstGeom prst="rect">
             <a:avLst/>
@@ -12628,14 +12764,13 @@
           <a:p>
             <a:pPr marL="342900" indent="-342900">
               <a:spcAft>
-                <a:spcPts val="1000"/>
+                <a:spcPts val="800"/>
               </a:spcAft>
               <a:buSzPct val="100000"/>
-              <a:buFont typeface="+mj-lt"/>
-              <a:buAutoNum type="arabicPeriod" startAt="1"/>
-            </a:pPr>
-            <a:r>
-              <a:rPr lang="en-US" sz="2000" dirty="0">
+              <a:buChar char="•"/>
+            </a:pPr>
+            <a:r>
+              <a:rPr lang="en-US" sz="1700" dirty="0">
                 <a:solidFill>
                   <a:srgbClr val="2B1D19"/>
                 </a:solidFill>
@@ -12643,45 +12778,33 @@
               <a:t>​</a:t>
             </a:r>
             <a:r>
-              <a:rPr lang="en-US" sz="2000" dirty="0">
-                <a:solidFill>
-                  <a:srgbClr val="2B1D19"/>
-                </a:solidFill>
-              </a:rPr>
-              <a:t>Sort by </a:t>
-            </a:r>
-            <a:r>
-              <a:rPr lang="en-US" sz="1800" b="1" dirty="0">
-                <a:solidFill>
-                  <a:srgbClr val="B86E1E"/>
-                </a:solidFill>
-                <a:latin typeface="Courier New" pitchFamily="34" charset="0"/>
-                <a:ea typeface="Courier New" pitchFamily="34" charset="-122"/>
-                <a:cs typeface="Courier New" pitchFamily="34" charset="-120"/>
-              </a:rPr>
-              <a:t>Price</a:t>
-            </a:r>
-            <a:r>
-              <a:rPr lang="en-US" sz="2000" dirty="0">
-                <a:solidFill>
-                  <a:srgbClr val="2B1D19"/>
-                </a:solidFill>
-              </a:rPr>
-              <a:t>, highest then lowest. What do the games that cost 0 have in common?</a:t>
-            </a:r>
-            <a:endParaRPr lang="en-US" sz="2000" dirty="0"/>
+              <a:rPr lang="en-US" sz="1700" b="1" dirty="0">
+                <a:solidFill>
+                  <a:srgbClr val="2B1D19"/>
+                </a:solidFill>
+              </a:rPr>
+              <a:t>scroll</a:t>
+            </a:r>
+            <a:r>
+              <a:rPr lang="en-US" sz="1700" dirty="0">
+                <a:solidFill>
+                  <a:srgbClr val="2B1D19"/>
+                </a:solidFill>
+              </a:rPr>
+              <a:t> across all 13 columns; page buttons move through the rows</a:t>
+            </a:r>
+            <a:endParaRPr lang="en-US" sz="1700" dirty="0"/>
           </a:p>
           <a:p>
             <a:pPr marL="342900" indent="-342900">
               <a:spcAft>
-                <a:spcPts val="1000"/>
+                <a:spcPts val="800"/>
               </a:spcAft>
               <a:buSzPct val="100000"/>
-              <a:buFont typeface="+mj-lt"/>
-              <a:buAutoNum type="arabicPeriod" startAt="1"/>
-            </a:pPr>
-            <a:r>
-              <a:rPr lang="en-US" sz="2000" dirty="0">
+              <a:buChar char="•"/>
+            </a:pPr>
+            <a:r>
+              <a:rPr lang="en-US" sz="1700" dirty="0">
                 <a:solidFill>
                   <a:srgbClr val="2B1D19"/>
                 </a:solidFill>
@@ -12689,45 +12812,33 @@
               <a:t>​</a:t>
             </a:r>
             <a:r>
-              <a:rPr lang="en-US" sz="2000" dirty="0">
-                <a:solidFill>
-                  <a:srgbClr val="2B1D19"/>
-                </a:solidFill>
-              </a:rPr>
-              <a:t>Search for </a:t>
-            </a:r>
-            <a:r>
-              <a:rPr lang="en-US" sz="1800" b="1" dirty="0">
-                <a:solidFill>
-                  <a:srgbClr val="B86E1E"/>
-                </a:solidFill>
-                <a:latin typeface="Courier New" pitchFamily="34" charset="0"/>
-                <a:ea typeface="Courier New" pitchFamily="34" charset="-122"/>
-                <a:cs typeface="Courier New" pitchFamily="34" charset="-120"/>
-              </a:rPr>
-              <a:t>Hollow Knight</a:t>
-            </a:r>
-            <a:r>
-              <a:rPr lang="en-US" sz="2000" dirty="0">
-                <a:solidFill>
-                  <a:srgbClr val="2B1D19"/>
-                </a:solidFill>
-              </a:rPr>
-              <a:t>. How would we work out what share of its reviews are positive?</a:t>
-            </a:r>
-            <a:endParaRPr lang="en-US" sz="2000" dirty="0"/>
+              <a:rPr lang="en-US" sz="1700" b="1" dirty="0">
+                <a:solidFill>
+                  <a:srgbClr val="2B1D19"/>
+                </a:solidFill>
+              </a:rPr>
+              <a:t>sort</a:t>
+            </a:r>
+            <a:r>
+              <a:rPr lang="en-US" sz="1700" dirty="0">
+                <a:solidFill>
+                  <a:srgbClr val="2B1D19"/>
+                </a:solidFill>
+              </a:rPr>
+              <a:t> by a column, by clicking its heading</a:t>
+            </a:r>
+            <a:endParaRPr lang="en-US" sz="1700" dirty="0"/>
           </a:p>
           <a:p>
             <a:pPr marL="342900" indent="-342900">
               <a:spcAft>
-                <a:spcPts val="1000"/>
+                <a:spcPts val="800"/>
               </a:spcAft>
               <a:buSzPct val="100000"/>
-              <a:buFont typeface="+mj-lt"/>
-              <a:buAutoNum type="arabicPeriod" startAt="1"/>
-            </a:pPr>
-            <a:r>
-              <a:rPr lang="en-US" sz="2000" dirty="0">
+              <a:buChar char="•"/>
+            </a:pPr>
+            <a:r>
+              <a:rPr lang="en-US" sz="1700" dirty="0">
                 <a:solidFill>
                   <a:srgbClr val="2B1D19"/>
                 </a:solidFill>
@@ -12735,33 +12846,56 @@
               <a:t>​</a:t>
             </a:r>
             <a:r>
-              <a:rPr lang="en-US" sz="2000" dirty="0">
-                <a:solidFill>
-                  <a:srgbClr val="2B1D19"/>
-                </a:solidFill>
-              </a:rPr>
-              <a:t>Sort by </a:t>
-            </a:r>
-            <a:r>
-              <a:rPr lang="en-US" sz="1800" b="1" dirty="0">
-                <a:solidFill>
-                  <a:srgbClr val="B86E1E"/>
-                </a:solidFill>
-                <a:latin typeface="Courier New" pitchFamily="34" charset="0"/>
-                <a:ea typeface="Courier New" pitchFamily="34" charset="-122"/>
-                <a:cs typeface="Courier New" pitchFamily="34" charset="-120"/>
-              </a:rPr>
-              <a:t>Metacritic score</a:t>
-            </a:r>
-            <a:r>
-              <a:rPr lang="en-US" sz="2000" dirty="0">
-                <a:solidFill>
-                  <a:srgbClr val="2B1D19"/>
-                </a:solidFill>
-              </a:rPr>
-              <a:t>. Are the games scoring 0 really that bad?</a:t>
-            </a:r>
-            <a:endParaRPr lang="en-US" sz="2000" dirty="0"/>
+              <a:rPr lang="en-US" sz="1700" b="1" dirty="0">
+                <a:solidFill>
+                  <a:srgbClr val="2B1D19"/>
+                </a:solidFill>
+              </a:rPr>
+              <a:t>search</a:t>
+            </a:r>
+            <a:r>
+              <a:rPr lang="en-US" sz="1700" dirty="0">
+                <a:solidFill>
+                  <a:srgbClr val="2B1D19"/>
+                </a:solidFill>
+              </a:rPr>
+              <a:t> for a value, using the search box above the table</a:t>
+            </a:r>
+            <a:endParaRPr lang="en-US" sz="1700" dirty="0"/>
+          </a:p>
+          <a:p>
+            <a:pPr marL="342900" indent="-342900">
+              <a:spcAft>
+                <a:spcPts val="800"/>
+              </a:spcAft>
+              <a:buSzPct val="100000"/>
+              <a:buChar char="•"/>
+            </a:pPr>
+            <a:r>
+              <a:rPr lang="en-US" sz="1700" dirty="0">
+                <a:solidFill>
+                  <a:srgbClr val="2B1D19"/>
+                </a:solidFill>
+              </a:rPr>
+              <a:t>​</a:t>
+            </a:r>
+            <a:r>
+              <a:rPr lang="en-US" sz="1700" b="1" dirty="0">
+                <a:solidFill>
+                  <a:srgbClr val="2B1D19"/>
+                </a:solidFill>
+              </a:rPr>
+              <a:t>see a summary</a:t>
+            </a:r>
+            <a:r>
+              <a:rPr lang="en-US" sz="1700" dirty="0">
+                <a:solidFill>
+                  <a:srgbClr val="2B1D19"/>
+                </a:solidFill>
+              </a:rPr>
+              <a:t> of a column, such as its smallest and largest values</a:t>
+            </a:r>
+            <a:endParaRPr lang="en-US" sz="1700" dirty="0"/>
           </a:p>
         </p:txBody>
       </p:sp>
@@ -12837,14 +12971,14 @@
       </p:grpSpPr>
       <p:sp>
         <p:nvSpPr>
-          <p:cNvPr id="2" name="Text 0"/>
+          <p:cNvPr id="2" name="Title"/>
           <p:cNvSpPr txBox="1"/>
           <p:nvPr/>
         </p:nvSpPr>
         <p:spPr>
           <a:xfrm>
-            <a:off x="457200" y="457200"/>
-            <a:ext cx="7772400" cy="365760"/>
+            <a:off x="457200" y="274320"/>
+            <a:ext cx="8229600" cy="640080"/>
           </a:xfrm>
           <a:prstGeom prst="rect">
             <a:avLst/>
@@ -12853,34 +12987,99 @@
           <a:ln/>
         </p:spPr>
         <p:txBody>
-          <a:bodyPr wrap="square" lIns="0" tIns="0" rIns="0" bIns="0" rtlCol="0" anchor="ctr"/>
+          <a:bodyPr wrap="square" lIns="0" tIns="0" rIns="0" bIns="0" rtlCol="0" anchor="ctr">
+            <a:normAutofit/>
+          </a:bodyPr>
           <a:lstStyle/>
           <a:p>
             <a:pPr indent="0" marL="0">
               <a:buNone/>
             </a:pPr>
             <a:r>
-              <a:rPr lang="en-US" sz="1400" b="1" spc="200" kern="0" dirty="0">
-                <a:solidFill>
-                  <a:srgbClr val="E8A55A"/>
-                </a:solidFill>
-              </a:rPr>
-              <a:t>CHECK YOUR UNDERSTANDING</a:t>
-            </a:r>
-            <a:endParaRPr lang="en-US" sz="1400" dirty="0"/>
-          </a:p>
-        </p:txBody>
-      </p:sp>
-      <p:sp>
-        <p:nvSpPr>
-          <p:cNvPr id="3" name="Text 1"/>
+              <a:rPr lang="en-US" sz="2800" b="1" dirty="0">
+                <a:solidFill>
+                  <a:srgbClr val="4E342E"/>
+                </a:solidFill>
+              </a:rPr>
+              <a:t>Explore with the table viewer</a:t>
+            </a:r>
+            <a:endParaRPr lang="en-US" sz="2800" dirty="0"/>
+          </a:p>
+        </p:txBody>
+      </p:sp>
+      <p:sp>
+        <p:nvSpPr>
+          <p:cNvPr id="3" name="primm box"/>
+          <p:cNvSpPr/>
+          <p:nvPr/>
+        </p:nvSpPr>
+        <p:spPr>
+          <a:xfrm>
+            <a:off x="457200" y="1051560"/>
+            <a:ext cx="8229600" cy="3078480"/>
+          </a:xfrm>
+          <a:prstGeom prst="roundRect">
+            <a:avLst>
+              <a:gd name="adj" fmla="val 2376"/>
+            </a:avLst>
+          </a:prstGeom>
+          <a:solidFill>
+            <a:srgbClr val="E6F2E6"/>
+          </a:solidFill>
+          <a:ln w="12700">
+            <a:solidFill>
+              <a:srgbClr val="E6F2E6"/>
+            </a:solidFill>
+            <a:prstDash val="solid"/>
+          </a:ln>
+        </p:spPr>
+      </p:sp>
+      <p:sp>
+        <p:nvSpPr>
+          <p:cNvPr id="4" name="Text 2"/>
           <p:cNvSpPr txBox="1"/>
           <p:nvPr/>
         </p:nvSpPr>
         <p:spPr>
           <a:xfrm>
-            <a:off x="457200" y="1005840"/>
-            <a:ext cx="7498080" cy="3108960"/>
+            <a:off x="685800" y="1188720"/>
+            <a:ext cx="7772400" cy="365760"/>
+          </a:xfrm>
+          <a:prstGeom prst="rect">
+            <a:avLst/>
+          </a:prstGeom>
+          <a:noFill/>
+          <a:ln/>
+        </p:spPr>
+        <p:txBody>
+          <a:bodyPr wrap="square" lIns="0" tIns="0" rIns="0" bIns="0" rtlCol="0" anchor="ctr"/>
+          <a:lstStyle/>
+          <a:p>
+            <a:pPr indent="0" marL="0">
+              <a:buNone/>
+            </a:pPr>
+            <a:r>
+              <a:rPr lang="en-US" sz="1600" b="1" dirty="0">
+                <a:solidFill>
+                  <a:srgbClr val="2E6B30"/>
+                </a:solidFill>
+              </a:rPr>
+              <a:t>PRIMM</a:t>
+            </a:r>
+            <a:endParaRPr lang="en-US" sz="1600" dirty="0"/>
+          </a:p>
+        </p:txBody>
+      </p:sp>
+      <p:sp>
+        <p:nvSpPr>
+          <p:cNvPr id="5" name="Text 3"/>
+          <p:cNvSpPr txBox="1"/>
+          <p:nvPr/>
+        </p:nvSpPr>
+        <p:spPr>
+          <a:xfrm>
+            <a:off x="685800" y="1600200"/>
+            <a:ext cx="7772400" cy="2392680"/>
           </a:xfrm>
           <a:prstGeom prst="rect">
             <a:avLst/>
@@ -12896,7 +13095,7 @@
           <a:p>
             <a:pPr marL="342900" indent="-342900">
               <a:spcAft>
-                <a:spcPts val="1400"/>
+                <a:spcPts val="1000"/>
               </a:spcAft>
               <a:buSzPct val="100000"/>
               <a:buFont typeface="+mj-lt"/>
@@ -12905,7 +13104,7 @@
             <a:r>
               <a:rPr lang="en-US" sz="2000" dirty="0">
                 <a:solidFill>
-                  <a:srgbClr val="FFFFFF"/>
+                  <a:srgbClr val="2B1D19"/>
                 </a:solidFill>
               </a:rPr>
               <a:t>​</a:t>
@@ -12913,17 +13112,36 @@
             <a:r>
               <a:rPr lang="en-US" sz="2000" dirty="0">
                 <a:solidFill>
-                  <a:srgbClr val="FFFFFF"/>
-                </a:solidFill>
-              </a:rPr>
-              <a:t>Where does a marimo cell's output appear?</a:t>
+                  <a:srgbClr val="2B1D19"/>
+                </a:solidFill>
+              </a:rPr>
+              <a:t>Sort by </a:t>
+            </a:r>
+            <a:r>
+              <a:rPr lang="en-US" sz="1800" b="1" dirty="0">
+                <a:solidFill>
+                  <a:srgbClr val="B86E1E"/>
+                </a:solidFill>
+                <a:latin typeface="Courier New" pitchFamily="34" charset="0"/>
+                <a:ea typeface="Courier New" pitchFamily="34" charset="-122"/>
+                <a:cs typeface="Courier New" pitchFamily="34" charset="-120"/>
+              </a:rPr>
+              <a:t>Price</a:t>
+            </a:r>
+            <a:r>
+              <a:rPr lang="en-US" sz="2000" dirty="0">
+                <a:solidFill>
+                  <a:srgbClr val="2B1D19"/>
+                </a:solidFill>
+              </a:rPr>
+              <a:t>, highest then lowest. What do the games that cost 0 have in common?</a:t>
             </a:r>
             <a:endParaRPr lang="en-US" sz="2000" dirty="0"/>
           </a:p>
           <a:p>
             <a:pPr marL="342900" indent="-342900">
               <a:spcAft>
-                <a:spcPts val="1400"/>
+                <a:spcPts val="1000"/>
               </a:spcAft>
               <a:buSzPct val="100000"/>
               <a:buFont typeface="+mj-lt"/>
@@ -12932,7 +13150,7 @@
             <a:r>
               <a:rPr lang="en-US" sz="2000" dirty="0">
                 <a:solidFill>
-                  <a:srgbClr val="FFFFFF"/>
+                  <a:srgbClr val="2B1D19"/>
                 </a:solidFill>
               </a:rPr>
               <a:t>​</a:t>
@@ -12940,36 +13158,36 @@
             <a:r>
               <a:rPr lang="en-US" sz="2000" dirty="0">
                 <a:solidFill>
-                  <a:srgbClr val="FFFFFF"/>
-                </a:solidFill>
-              </a:rPr>
-              <a:t>What does </a:t>
+                  <a:srgbClr val="2B1D19"/>
+                </a:solidFill>
+              </a:rPr>
+              <a:t>Search for </a:t>
             </a:r>
             <a:r>
               <a:rPr lang="en-US" sz="1800" b="1" dirty="0">
                 <a:solidFill>
-                  <a:srgbClr val="E8A55A"/>
+                  <a:srgbClr val="B86E1E"/>
                 </a:solidFill>
                 <a:latin typeface="Courier New" pitchFamily="34" charset="0"/>
                 <a:ea typeface="Courier New" pitchFamily="34" charset="-122"/>
                 <a:cs typeface="Courier New" pitchFamily="34" charset="-120"/>
               </a:rPr>
-              <a:t>games.shape</a:t>
+              <a:t>Hollow Knight</a:t>
             </a:r>
             <a:r>
               <a:rPr lang="en-US" sz="2000" dirty="0">
                 <a:solidFill>
-                  <a:srgbClr val="FFFFFF"/>
-                </a:solidFill>
-              </a:rPr>
-              <a:t> tell us about our data?</a:t>
+                  <a:srgbClr val="2B1D19"/>
+                </a:solidFill>
+              </a:rPr>
+              <a:t>. How would we work out what share of its reviews are positive?</a:t>
             </a:r>
             <a:endParaRPr lang="en-US" sz="2000" dirty="0"/>
           </a:p>
           <a:p>
             <a:pPr marL="342900" indent="-342900">
               <a:spcAft>
-                <a:spcPts val="1400"/>
+                <a:spcPts val="1000"/>
               </a:spcAft>
               <a:buSzPct val="100000"/>
               <a:buFont typeface="+mj-lt"/>
@@ -12978,7 +13196,7 @@
             <a:r>
               <a:rPr lang="en-US" sz="2000" dirty="0">
                 <a:solidFill>
-                  <a:srgbClr val="FFFFFF"/>
+                  <a:srgbClr val="2B1D19"/>
                 </a:solidFill>
               </a:rPr>
               <a:t>​</a:t>
@@ -12986,102 +13204,29 @@
             <a:r>
               <a:rPr lang="en-US" sz="2000" dirty="0">
                 <a:solidFill>
-                  <a:srgbClr val="FFFFFF"/>
-                </a:solidFill>
-              </a:rPr>
-              <a:t>Why is it a problem that </a:t>
+                  <a:srgbClr val="2B1D19"/>
+                </a:solidFill>
+              </a:rPr>
+              <a:t>Sort by </a:t>
             </a:r>
             <a:r>
               <a:rPr lang="en-US" sz="1800" b="1" dirty="0">
                 <a:solidFill>
-                  <a:srgbClr val="E8A55A"/>
+                  <a:srgbClr val="B86E1E"/>
                 </a:solidFill>
                 <a:latin typeface="Courier New" pitchFamily="34" charset="0"/>
                 <a:ea typeface="Courier New" pitchFamily="34" charset="-122"/>
                 <a:cs typeface="Courier New" pitchFamily="34" charset="-120"/>
               </a:rPr>
-              <a:t>Release date</a:t>
+              <a:t>Metacritic score</a:t>
             </a:r>
             <a:r>
               <a:rPr lang="en-US" sz="2000" dirty="0">
                 <a:solidFill>
-                  <a:srgbClr val="FFFFFF"/>
-                </a:solidFill>
-              </a:rPr>
-              <a:t> is a String?</a:t>
-            </a:r>
-            <a:endParaRPr lang="en-US" sz="2000" dirty="0"/>
-          </a:p>
-          <a:p>
-            <a:pPr marL="342900" indent="-342900">
-              <a:spcAft>
-                <a:spcPts val="1400"/>
-              </a:spcAft>
-              <a:buSzPct val="100000"/>
-              <a:buFont typeface="+mj-lt"/>
-              <a:buAutoNum type="arabicPeriod" startAt="1"/>
-            </a:pPr>
-            <a:r>
-              <a:rPr lang="en-US" sz="2000" dirty="0">
-                <a:solidFill>
-                  <a:srgbClr val="FFFFFF"/>
-                </a:solidFill>
-              </a:rPr>
-              <a:t>​</a:t>
-            </a:r>
-            <a:r>
-              <a:rPr lang="en-US" sz="2000" dirty="0">
-                <a:solidFill>
-                  <a:srgbClr val="FFFFFF"/>
-                </a:solidFill>
-              </a:rPr>
-              <a:t>What does it mean that marimo is reactive?</a:t>
-            </a:r>
-            <a:endParaRPr lang="en-US" sz="2000" dirty="0"/>
-          </a:p>
-          <a:p>
-            <a:pPr marL="342900" indent="-342900">
-              <a:spcAft>
-                <a:spcPts val="1400"/>
-              </a:spcAft>
-              <a:buSzPct val="100000"/>
-              <a:buFont typeface="+mj-lt"/>
-              <a:buAutoNum type="arabicPeriod" startAt="1"/>
-            </a:pPr>
-            <a:r>
-              <a:rPr lang="en-US" sz="2000" dirty="0">
-                <a:solidFill>
-                  <a:srgbClr val="FFFFFF"/>
-                </a:solidFill>
-              </a:rPr>
-              <a:t>​</a:t>
-            </a:r>
-            <a:r>
-              <a:rPr lang="en-US" sz="2000" dirty="0">
-                <a:solidFill>
-                  <a:srgbClr val="FFFFFF"/>
-                </a:solidFill>
-              </a:rPr>
-              <a:t>Why does marimo refuse to run a second cell that creates </a:t>
-            </a:r>
-            <a:r>
-              <a:rPr lang="en-US" sz="1800" b="1" dirty="0">
-                <a:solidFill>
-                  <a:srgbClr val="E8A55A"/>
-                </a:solidFill>
-                <a:latin typeface="Courier New" pitchFamily="34" charset="0"/>
-                <a:ea typeface="Courier New" pitchFamily="34" charset="-122"/>
-                <a:cs typeface="Courier New" pitchFamily="34" charset="-120"/>
-              </a:rPr>
-              <a:t>sample_size</a:t>
-            </a:r>
-            <a:r>
-              <a:rPr lang="en-US" sz="2000" dirty="0">
-                <a:solidFill>
-                  <a:srgbClr val="FFFFFF"/>
-                </a:solidFill>
-              </a:rPr>
-              <a:t>?</a:t>
+                  <a:srgbClr val="2B1D19"/>
+                </a:solidFill>
+              </a:rPr>
+              <a:t>. Are the games scoring 0 really that bad?</a:t>
             </a:r>
             <a:endParaRPr lang="en-US" sz="2000" dirty="0"/>
           </a:p>
@@ -13117,7 +13262,7 @@
             <a:lvl1pPr>
               <a:defRPr sz="1000">
                 <a:solidFill>
-                  <a:srgbClr val="F7EFE6"/>
+                  <a:srgbClr val="6B6B6B"/>
                 </a:solidFill>
               </a:defRPr>
             </a:lvl1pPr>
@@ -13159,6 +13304,328 @@
       </p:grpSpPr>
       <p:sp>
         <p:nvSpPr>
+          <p:cNvPr id="2" name="Text 0"/>
+          <p:cNvSpPr txBox="1"/>
+          <p:nvPr/>
+        </p:nvSpPr>
+        <p:spPr>
+          <a:xfrm>
+            <a:off x="457200" y="457200"/>
+            <a:ext cx="7772400" cy="365760"/>
+          </a:xfrm>
+          <a:prstGeom prst="rect">
+            <a:avLst/>
+          </a:prstGeom>
+          <a:noFill/>
+          <a:ln/>
+        </p:spPr>
+        <p:txBody>
+          <a:bodyPr wrap="square" lIns="0" tIns="0" rIns="0" bIns="0" rtlCol="0" anchor="ctr"/>
+          <a:lstStyle/>
+          <a:p>
+            <a:pPr indent="0" marL="0">
+              <a:buNone/>
+            </a:pPr>
+            <a:r>
+              <a:rPr lang="en-US" sz="1400" b="1" spc="200" kern="0" dirty="0">
+                <a:solidFill>
+                  <a:srgbClr val="E8A55A"/>
+                </a:solidFill>
+              </a:rPr>
+              <a:t>CHECK YOUR UNDERSTANDING</a:t>
+            </a:r>
+            <a:endParaRPr lang="en-US" sz="1400" dirty="0"/>
+          </a:p>
+        </p:txBody>
+      </p:sp>
+      <p:sp>
+        <p:nvSpPr>
+          <p:cNvPr id="3" name="Text 1"/>
+          <p:cNvSpPr txBox="1"/>
+          <p:nvPr/>
+        </p:nvSpPr>
+        <p:spPr>
+          <a:xfrm>
+            <a:off x="457200" y="1005840"/>
+            <a:ext cx="7498080" cy="3108960"/>
+          </a:xfrm>
+          <a:prstGeom prst="rect">
+            <a:avLst/>
+          </a:prstGeom>
+          <a:noFill/>
+          <a:ln/>
+        </p:spPr>
+        <p:txBody>
+          <a:bodyPr wrap="square" lIns="0" tIns="0" rIns="0" bIns="0" rtlCol="0" anchor="t">
+            <a:normAutofit/>
+          </a:bodyPr>
+          <a:lstStyle/>
+          <a:p>
+            <a:pPr marL="342900" indent="-342900">
+              <a:spcAft>
+                <a:spcPts val="1400"/>
+              </a:spcAft>
+              <a:buSzPct val="100000"/>
+              <a:buFont typeface="+mj-lt"/>
+              <a:buAutoNum type="arabicPeriod" startAt="1"/>
+            </a:pPr>
+            <a:r>
+              <a:rPr lang="en-US" sz="2000" dirty="0">
+                <a:solidFill>
+                  <a:srgbClr val="FFFFFF"/>
+                </a:solidFill>
+              </a:rPr>
+              <a:t>​</a:t>
+            </a:r>
+            <a:r>
+              <a:rPr lang="en-US" sz="2000" dirty="0">
+                <a:solidFill>
+                  <a:srgbClr val="FFFFFF"/>
+                </a:solidFill>
+              </a:rPr>
+              <a:t>Where does a marimo cell's output appear?</a:t>
+            </a:r>
+            <a:endParaRPr lang="en-US" sz="2000" dirty="0"/>
+          </a:p>
+          <a:p>
+            <a:pPr marL="342900" indent="-342900">
+              <a:spcAft>
+                <a:spcPts val="1400"/>
+              </a:spcAft>
+              <a:buSzPct val="100000"/>
+              <a:buFont typeface="+mj-lt"/>
+              <a:buAutoNum type="arabicPeriod" startAt="1"/>
+            </a:pPr>
+            <a:r>
+              <a:rPr lang="en-US" sz="2000" dirty="0">
+                <a:solidFill>
+                  <a:srgbClr val="FFFFFF"/>
+                </a:solidFill>
+              </a:rPr>
+              <a:t>​</a:t>
+            </a:r>
+            <a:r>
+              <a:rPr lang="en-US" sz="2000" dirty="0">
+                <a:solidFill>
+                  <a:srgbClr val="FFFFFF"/>
+                </a:solidFill>
+              </a:rPr>
+              <a:t>What does </a:t>
+            </a:r>
+            <a:r>
+              <a:rPr lang="en-US" sz="1800" b="1" dirty="0">
+                <a:solidFill>
+                  <a:srgbClr val="E8A55A"/>
+                </a:solidFill>
+                <a:latin typeface="Courier New" pitchFamily="34" charset="0"/>
+                <a:ea typeface="Courier New" pitchFamily="34" charset="-122"/>
+                <a:cs typeface="Courier New" pitchFamily="34" charset="-120"/>
+              </a:rPr>
+              <a:t>games.shape</a:t>
+            </a:r>
+            <a:r>
+              <a:rPr lang="en-US" sz="2000" dirty="0">
+                <a:solidFill>
+                  <a:srgbClr val="FFFFFF"/>
+                </a:solidFill>
+              </a:rPr>
+              <a:t> tell us about our data?</a:t>
+            </a:r>
+            <a:endParaRPr lang="en-US" sz="2000" dirty="0"/>
+          </a:p>
+          <a:p>
+            <a:pPr marL="342900" indent="-342900">
+              <a:spcAft>
+                <a:spcPts val="1400"/>
+              </a:spcAft>
+              <a:buSzPct val="100000"/>
+              <a:buFont typeface="+mj-lt"/>
+              <a:buAutoNum type="arabicPeriod" startAt="1"/>
+            </a:pPr>
+            <a:r>
+              <a:rPr lang="en-US" sz="2000" dirty="0">
+                <a:solidFill>
+                  <a:srgbClr val="FFFFFF"/>
+                </a:solidFill>
+              </a:rPr>
+              <a:t>​</a:t>
+            </a:r>
+            <a:r>
+              <a:rPr lang="en-US" sz="2000" dirty="0">
+                <a:solidFill>
+                  <a:srgbClr val="FFFFFF"/>
+                </a:solidFill>
+              </a:rPr>
+              <a:t>Why is it a problem that </a:t>
+            </a:r>
+            <a:r>
+              <a:rPr lang="en-US" sz="1800" b="1" dirty="0">
+                <a:solidFill>
+                  <a:srgbClr val="E8A55A"/>
+                </a:solidFill>
+                <a:latin typeface="Courier New" pitchFamily="34" charset="0"/>
+                <a:ea typeface="Courier New" pitchFamily="34" charset="-122"/>
+                <a:cs typeface="Courier New" pitchFamily="34" charset="-120"/>
+              </a:rPr>
+              <a:t>Release date</a:t>
+            </a:r>
+            <a:r>
+              <a:rPr lang="en-US" sz="2000" dirty="0">
+                <a:solidFill>
+                  <a:srgbClr val="FFFFFF"/>
+                </a:solidFill>
+              </a:rPr>
+              <a:t> is a String?</a:t>
+            </a:r>
+            <a:endParaRPr lang="en-US" sz="2000" dirty="0"/>
+          </a:p>
+          <a:p>
+            <a:pPr marL="342900" indent="-342900">
+              <a:spcAft>
+                <a:spcPts val="1400"/>
+              </a:spcAft>
+              <a:buSzPct val="100000"/>
+              <a:buFont typeface="+mj-lt"/>
+              <a:buAutoNum type="arabicPeriod" startAt="1"/>
+            </a:pPr>
+            <a:r>
+              <a:rPr lang="en-US" sz="2000" dirty="0">
+                <a:solidFill>
+                  <a:srgbClr val="FFFFFF"/>
+                </a:solidFill>
+              </a:rPr>
+              <a:t>​</a:t>
+            </a:r>
+            <a:r>
+              <a:rPr lang="en-US" sz="2000" dirty="0">
+                <a:solidFill>
+                  <a:srgbClr val="FFFFFF"/>
+                </a:solidFill>
+              </a:rPr>
+              <a:t>What does it mean that marimo is reactive?</a:t>
+            </a:r>
+            <a:endParaRPr lang="en-US" sz="2000" dirty="0"/>
+          </a:p>
+          <a:p>
+            <a:pPr marL="342900" indent="-342900">
+              <a:spcAft>
+                <a:spcPts val="1400"/>
+              </a:spcAft>
+              <a:buSzPct val="100000"/>
+              <a:buFont typeface="+mj-lt"/>
+              <a:buAutoNum type="arabicPeriod" startAt="1"/>
+            </a:pPr>
+            <a:r>
+              <a:rPr lang="en-US" sz="2000" dirty="0">
+                <a:solidFill>
+                  <a:srgbClr val="FFFFFF"/>
+                </a:solidFill>
+              </a:rPr>
+              <a:t>​</a:t>
+            </a:r>
+            <a:r>
+              <a:rPr lang="en-US" sz="2000" dirty="0">
+                <a:solidFill>
+                  <a:srgbClr val="FFFFFF"/>
+                </a:solidFill>
+              </a:rPr>
+              <a:t>Why does marimo refuse to run a second cell that creates </a:t>
+            </a:r>
+            <a:r>
+              <a:rPr lang="en-US" sz="1800" b="1" dirty="0">
+                <a:solidFill>
+                  <a:srgbClr val="E8A55A"/>
+                </a:solidFill>
+                <a:latin typeface="Courier New" pitchFamily="34" charset="0"/>
+                <a:ea typeface="Courier New" pitchFamily="34" charset="-122"/>
+                <a:cs typeface="Courier New" pitchFamily="34" charset="-120"/>
+              </a:rPr>
+              <a:t>sample_size</a:t>
+            </a:r>
+            <a:r>
+              <a:rPr lang="en-US" sz="2000" dirty="0">
+                <a:solidFill>
+                  <a:srgbClr val="FFFFFF"/>
+                </a:solidFill>
+              </a:rPr>
+              <a:t>?</a:t>
+            </a:r>
+            <a:endParaRPr lang="en-US" sz="2000" dirty="0"/>
+          </a:p>
+        </p:txBody>
+      </p:sp>
+      <p:sp>
+        <p:nvSpPr>
+          <p:cNvPr id="25" name="Slide Number Placeholder 0"/>
+          <p:cNvSpPr>
+            <a:spLocks noGrp="1"/>
+          </p:cNvSpPr>
+          <p:nvPr>
+            <p:ph type="sldNum" sz="quarter" idx="4294967295"/>
+          </p:nvPr>
+        </p:nvSpPr>
+        <p:spPr>
+          <a:xfrm>
+            <a:off x="365760" y="4709160"/>
+            <a:ext cx="548640" cy="274320"/>
+          </a:xfrm>
+          <a:prstGeom prst="rect">
+            <a:avLst/>
+          </a:prstGeom>
+          <a:extLst>
+            <a:ext uri="{C572A759-6A51-4108-AA02-DFA0A04FC94B}">
+              <ma14:wrappingTextBoxFlag xmlns:ma14="http://schemas.microsoft.com/office/mac/drawingml/2011/main" val="0"/>
+            </a:ext>
+          </a:extLst>
+        </p:spPr>
+        <p:txBody>
+          <a:bodyPr/>
+          <a:lstStyle>
+            <a:lvl1pPr>
+              <a:defRPr sz="1000">
+                <a:solidFill>
+                  <a:srgbClr val="F7EFE6"/>
+                </a:solidFill>
+              </a:defRPr>
+            </a:lvl1pPr>
+          </a:lstStyle>
+          <a:p>
+            <a:pPr algn="l"/>
+            <a:fld id="{F7021451-1387-4CA6-816F-3879F97B5CBC}" type="slidenum">
+              <a:rPr b="0" lang="en-US"/>
+              <a:t>32</a:t>
+            </a:fld>
+            <a:endParaRPr lang="en-US"/>
+          </a:p>
+        </p:txBody>
+      </p:sp>
+    </p:spTree>
+  </p:cSld>
+  <p:clrMapOvr>
+    <a:masterClrMapping/>
+  </p:clrMapOvr>
+</p:sld>
+</file>
+
+<file path=ppt/slides/slide33.xml><?xml version="1.0" encoding="utf-8"?>
+<p:sld xmlns:a="http://schemas.openxmlformats.org/drawingml/2006/main" xmlns:r="http://schemas.openxmlformats.org/officeDocument/2006/relationships" xmlns:p="http://schemas.openxmlformats.org/presentationml/2006/main">
+  <p:cSld name="Slide 33">
+    <p:spTree>
+      <p:nvGrpSpPr>
+        <p:cNvPr id="1" name=""/>
+        <p:cNvGrpSpPr/>
+        <p:nvPr/>
+      </p:nvGrpSpPr>
+      <p:grpSpPr>
+        <a:xfrm>
+          <a:off x="0" y="0"/>
+          <a:ext cx="0" cy="0"/>
+          <a:chOff x="0" y="0"/>
+          <a:chExt cx="0" cy="0"/>
+        </a:xfrm>
+      </p:grpSpPr>
+      <p:sp>
+        <p:nvSpPr>
           <p:cNvPr id="2" name="Title"/>
           <p:cNvSpPr txBox="1"/>
           <p:nvPr/>
@@ -13443,7 +13910,7 @@
             <a:pPr algn="l"/>
             <a:fld id="{F7021451-1387-4CA6-816F-3879F97B5CBC}" type="slidenum">
               <a:rPr b="0" lang="en-US"/>
-              <a:t>32</a:t>
+              <a:t>33</a:t>
             </a:fld>
             <a:endParaRPr lang="en-US"/>
           </a:p>
